--- a/docs/hdx2rdls_journey_20260512.pptx
+++ b/docs/hdx2rdls_journey_20260512.pptx
@@ -148,23 +148,86 @@
 </p:presentation>
 </file>
 
+<file path=ppt/revisionInfo.xml><?xml version="1.0" encoding="utf-8"?>
+<p1510:revInfo xmlns:a="http://schemas.openxmlformats.org/drawingml/2006/main" xmlns:r="http://schemas.openxmlformats.org/officeDocument/2006/relationships" xmlns:p1510="http://schemas.microsoft.com/office/powerpoint/2015/10/main">
+  <p1510:revLst>
+    <p1510:client id="{064E3BDF-F156-460A-93E8-222FDE0127F2}" v="7" dt="2026-05-12T22:47:36.722"/>
+  </p1510:revLst>
+</p1510:revInfo>
+</file>
+
 <file path=ppt/changesInfos/changesInfo1.xml><?xml version="1.0" encoding="utf-8"?>
 <pc:chgInfo xmlns:a="http://schemas.openxmlformats.org/drawingml/2006/main" xmlns:r="http://schemas.openxmlformats.org/officeDocument/2006/relationships" xmlns:ac="http://schemas.microsoft.com/office/drawing/2013/main/command" xmlns:pc="http://schemas.microsoft.com/office/powerpoint/2013/main/command">
   <pc:docChgLst>
     <pc:chgData name="Benny Istanto" userId="ccea0e650e68d75e" providerId="LiveId" clId="{D8DD1CC7-EDF5-40EB-A44D-3059B72F36E1}"/>
-    <pc:docChg chg="undo custSel modSld">
-      <pc:chgData name="Benny Istanto" userId="ccea0e650e68d75e" providerId="LiveId" clId="{D8DD1CC7-EDF5-40EB-A44D-3059B72F36E1}" dt="2026-05-12T09:19:40.263" v="142" actId="1036"/>
+    <pc:docChg chg="undo redo custSel modSld">
+      <pc:chgData name="Benny Istanto" userId="ccea0e650e68d75e" providerId="LiveId" clId="{D8DD1CC7-EDF5-40EB-A44D-3059B72F36E1}" dt="2026-05-12T22:50:25.779" v="615" actId="20577"/>
       <pc:docMkLst>
         <pc:docMk/>
       </pc:docMkLst>
-      <pc:sldChg chg="modSp mod">
-        <pc:chgData name="Benny Istanto" userId="ccea0e650e68d75e" providerId="LiveId" clId="{D8DD1CC7-EDF5-40EB-A44D-3059B72F36E1}" dt="2026-05-12T07:16:05.483" v="53" actId="255"/>
+      <pc:sldChg chg="delSp modSp mod">
+        <pc:chgData name="Benny Istanto" userId="ccea0e650e68d75e" providerId="LiveId" clId="{D8DD1CC7-EDF5-40EB-A44D-3059B72F36E1}" dt="2026-05-12T22:50:25.779" v="615" actId="20577"/>
+        <pc:sldMkLst>
+          <pc:docMk/>
+          <pc:sldMk cId="0" sldId="256"/>
+        </pc:sldMkLst>
+        <pc:spChg chg="mod">
+          <ac:chgData name="Benny Istanto" userId="ccea0e650e68d75e" providerId="LiveId" clId="{D8DD1CC7-EDF5-40EB-A44D-3059B72F36E1}" dt="2026-05-12T22:46:44.279" v="590" actId="403"/>
+          <ac:spMkLst>
+            <pc:docMk/>
+            <pc:sldMk cId="0" sldId="256"/>
+            <ac:spMk id="4" creationId="{00000000-0000-0000-0000-000000000000}"/>
+          </ac:spMkLst>
+        </pc:spChg>
+        <pc:spChg chg="mod">
+          <ac:chgData name="Benny Istanto" userId="ccea0e650e68d75e" providerId="LiveId" clId="{D8DD1CC7-EDF5-40EB-A44D-3059B72F36E1}" dt="2026-05-12T22:50:25.779" v="615" actId="20577"/>
+          <ac:spMkLst>
+            <pc:docMk/>
+            <pc:sldMk cId="0" sldId="256"/>
+            <ac:spMk id="5" creationId="{00000000-0000-0000-0000-000000000000}"/>
+          </ac:spMkLst>
+        </pc:spChg>
+        <pc:spChg chg="mod">
+          <ac:chgData name="Benny Istanto" userId="ccea0e650e68d75e" providerId="LiveId" clId="{D8DD1CC7-EDF5-40EB-A44D-3059B72F36E1}" dt="2026-05-12T22:47:01.129" v="594" actId="403"/>
+          <ac:spMkLst>
+            <pc:docMk/>
+            <pc:sldMk cId="0" sldId="256"/>
+            <ac:spMk id="6" creationId="{00000000-0000-0000-0000-000000000000}"/>
+          </ac:spMkLst>
+        </pc:spChg>
+        <pc:spChg chg="del">
+          <ac:chgData name="Benny Istanto" userId="ccea0e650e68d75e" providerId="LiveId" clId="{D8DD1CC7-EDF5-40EB-A44D-3059B72F36E1}" dt="2026-05-12T22:47:50.363" v="603" actId="478"/>
+          <ac:spMkLst>
+            <pc:docMk/>
+            <pc:sldMk cId="0" sldId="256"/>
+            <ac:spMk id="7" creationId="{00000000-0000-0000-0000-000000000000}"/>
+          </ac:spMkLst>
+        </pc:spChg>
+        <pc:spChg chg="mod">
+          <ac:chgData name="Benny Istanto" userId="ccea0e650e68d75e" providerId="LiveId" clId="{D8DD1CC7-EDF5-40EB-A44D-3059B72F36E1}" dt="2026-05-12T22:48:20.388" v="606" actId="2711"/>
+          <ac:spMkLst>
+            <pc:docMk/>
+            <pc:sldMk cId="0" sldId="256"/>
+            <ac:spMk id="8" creationId="{00000000-0000-0000-0000-000000000000}"/>
+          </ac:spMkLst>
+        </pc:spChg>
+        <pc:spChg chg="mod">
+          <ac:chgData name="Benny Istanto" userId="ccea0e650e68d75e" providerId="LiveId" clId="{D8DD1CC7-EDF5-40EB-A44D-3059B72F36E1}" dt="2026-05-12T22:48:07.148" v="605" actId="404"/>
+          <ac:spMkLst>
+            <pc:docMk/>
+            <pc:sldMk cId="0" sldId="256"/>
+            <ac:spMk id="10" creationId="{441CD2F9-3358-F437-2589-4E0C9E84994C}"/>
+          </ac:spMkLst>
+        </pc:spChg>
+      </pc:sldChg>
+      <pc:sldChg chg="addSp modSp mod">
+        <pc:chgData name="Benny Istanto" userId="ccea0e650e68d75e" providerId="LiveId" clId="{D8DD1CC7-EDF5-40EB-A44D-3059B72F36E1}" dt="2026-05-12T14:04:44.227" v="188" actId="20577"/>
         <pc:sldMkLst>
           <pc:docMk/>
           <pc:sldMk cId="0" sldId="257"/>
         </pc:sldMkLst>
         <pc:spChg chg="mod">
-          <ac:chgData name="Benny Istanto" userId="ccea0e650e68d75e" providerId="LiveId" clId="{D8DD1CC7-EDF5-40EB-A44D-3059B72F36E1}" dt="2026-05-12T07:15:11.104" v="27" actId="255"/>
+          <ac:chgData name="Benny Istanto" userId="ccea0e650e68d75e" providerId="LiveId" clId="{D8DD1CC7-EDF5-40EB-A44D-3059B72F36E1}" dt="2026-05-12T14:02:04.777" v="146" actId="20577"/>
           <ac:spMkLst>
             <pc:docMk/>
             <pc:sldMk cId="0" sldId="257"/>
@@ -172,7 +235,7 @@
           </ac:spMkLst>
         </pc:spChg>
         <pc:spChg chg="mod">
-          <ac:chgData name="Benny Istanto" userId="ccea0e650e68d75e" providerId="LiveId" clId="{D8DD1CC7-EDF5-40EB-A44D-3059B72F36E1}" dt="2026-05-12T07:15:47.228" v="31" actId="255"/>
+          <ac:chgData name="Benny Istanto" userId="ccea0e650e68d75e" providerId="LiveId" clId="{D8DD1CC7-EDF5-40EB-A44D-3059B72F36E1}" dt="2026-05-12T14:02:40.079" v="156" actId="20577"/>
           <ac:spMkLst>
             <pc:docMk/>
             <pc:sldMk cId="0" sldId="257"/>
@@ -180,7 +243,7 @@
           </ac:spMkLst>
         </pc:spChg>
         <pc:spChg chg="mod">
-          <ac:chgData name="Benny Istanto" userId="ccea0e650e68d75e" providerId="LiveId" clId="{D8DD1CC7-EDF5-40EB-A44D-3059B72F36E1}" dt="2026-05-12T07:15:11.104" v="27" actId="255"/>
+          <ac:chgData name="Benny Istanto" userId="ccea0e650e68d75e" providerId="LiveId" clId="{D8DD1CC7-EDF5-40EB-A44D-3059B72F36E1}" dt="2026-05-12T14:02:03.940" v="145" actId="20577"/>
           <ac:spMkLst>
             <pc:docMk/>
             <pc:sldMk cId="0" sldId="257"/>
@@ -188,7 +251,7 @@
           </ac:spMkLst>
         </pc:spChg>
         <pc:spChg chg="mod">
-          <ac:chgData name="Benny Istanto" userId="ccea0e650e68d75e" providerId="LiveId" clId="{D8DD1CC7-EDF5-40EB-A44D-3059B72F36E1}" dt="2026-05-12T07:15:47.228" v="31" actId="255"/>
+          <ac:chgData name="Benny Istanto" userId="ccea0e650e68d75e" providerId="LiveId" clId="{D8DD1CC7-EDF5-40EB-A44D-3059B72F36E1}" dt="2026-05-12T14:02:49.327" v="162" actId="20577"/>
           <ac:spMkLst>
             <pc:docMk/>
             <pc:sldMk cId="0" sldId="257"/>
@@ -196,7 +259,7 @@
           </ac:spMkLst>
         </pc:spChg>
         <pc:spChg chg="mod">
-          <ac:chgData name="Benny Istanto" userId="ccea0e650e68d75e" providerId="LiveId" clId="{D8DD1CC7-EDF5-40EB-A44D-3059B72F36E1}" dt="2026-05-12T07:15:11.104" v="27" actId="255"/>
+          <ac:chgData name="Benny Istanto" userId="ccea0e650e68d75e" providerId="LiveId" clId="{D8DD1CC7-EDF5-40EB-A44D-3059B72F36E1}" dt="2026-05-12T14:02:12.871" v="148" actId="20577"/>
           <ac:spMkLst>
             <pc:docMk/>
             <pc:sldMk cId="0" sldId="257"/>
@@ -204,7 +267,7 @@
           </ac:spMkLst>
         </pc:spChg>
         <pc:spChg chg="mod">
-          <ac:chgData name="Benny Istanto" userId="ccea0e650e68d75e" providerId="LiveId" clId="{D8DD1CC7-EDF5-40EB-A44D-3059B72F36E1}" dt="2026-05-12T07:15:47.228" v="31" actId="255"/>
+          <ac:chgData name="Benny Istanto" userId="ccea0e650e68d75e" providerId="LiveId" clId="{D8DD1CC7-EDF5-40EB-A44D-3059B72F36E1}" dt="2026-05-12T14:02:55.829" v="168" actId="20577"/>
           <ac:spMkLst>
             <pc:docMk/>
             <pc:sldMk cId="0" sldId="257"/>
@@ -212,7 +275,7 @@
           </ac:spMkLst>
         </pc:spChg>
         <pc:spChg chg="mod">
-          <ac:chgData name="Benny Istanto" userId="ccea0e650e68d75e" providerId="LiveId" clId="{D8DD1CC7-EDF5-40EB-A44D-3059B72F36E1}" dt="2026-05-12T07:15:11.104" v="27" actId="255"/>
+          <ac:chgData name="Benny Istanto" userId="ccea0e650e68d75e" providerId="LiveId" clId="{D8DD1CC7-EDF5-40EB-A44D-3059B72F36E1}" dt="2026-05-12T14:02:16.826" v="150" actId="20577"/>
           <ac:spMkLst>
             <pc:docMk/>
             <pc:sldMk cId="0" sldId="257"/>
@@ -220,7 +283,7 @@
           </ac:spMkLst>
         </pc:spChg>
         <pc:spChg chg="mod">
-          <ac:chgData name="Benny Istanto" userId="ccea0e650e68d75e" providerId="LiveId" clId="{D8DD1CC7-EDF5-40EB-A44D-3059B72F36E1}" dt="2026-05-12T07:15:47.228" v="31" actId="255"/>
+          <ac:chgData name="Benny Istanto" userId="ccea0e650e68d75e" providerId="LiveId" clId="{D8DD1CC7-EDF5-40EB-A44D-3059B72F36E1}" dt="2026-05-12T14:03:03.026" v="174" actId="20577"/>
           <ac:spMkLst>
             <pc:docMk/>
             <pc:sldMk cId="0" sldId="257"/>
@@ -235,15 +298,94 @@
             <ac:spMk id="30" creationId="{00000000-0000-0000-0000-000000000000}"/>
           </ac:spMkLst>
         </pc:spChg>
+        <pc:spChg chg="add mod">
+          <ac:chgData name="Benny Istanto" userId="ccea0e650e68d75e" providerId="LiveId" clId="{D8DD1CC7-EDF5-40EB-A44D-3059B72F36E1}" dt="2026-05-12T14:04:44.227" v="188" actId="20577"/>
+          <ac:spMkLst>
+            <pc:docMk/>
+            <pc:sldMk cId="0" sldId="257"/>
+            <ac:spMk id="31" creationId="{FD2E3788-5657-38D3-411B-482DC06F034C}"/>
+          </ac:spMkLst>
+        </pc:spChg>
       </pc:sldChg>
       <pc:sldChg chg="modSp mod">
-        <pc:chgData name="Benny Istanto" userId="ccea0e650e68d75e" providerId="LiveId" clId="{D8DD1CC7-EDF5-40EB-A44D-3059B72F36E1}" dt="2026-05-12T07:17:45.001" v="100" actId="1035"/>
+        <pc:chgData name="Benny Istanto" userId="ccea0e650e68d75e" providerId="LiveId" clId="{D8DD1CC7-EDF5-40EB-A44D-3059B72F36E1}" dt="2026-05-12T15:51:14.830" v="329" actId="207"/>
+        <pc:sldMkLst>
+          <pc:docMk/>
+          <pc:sldMk cId="0" sldId="258"/>
+        </pc:sldMkLst>
+        <pc:spChg chg="mod">
+          <ac:chgData name="Benny Istanto" userId="ccea0e650e68d75e" providerId="LiveId" clId="{D8DD1CC7-EDF5-40EB-A44D-3059B72F36E1}" dt="2026-05-12T14:05:10.096" v="193" actId="20577"/>
+          <ac:spMkLst>
+            <pc:docMk/>
+            <pc:sldMk cId="0" sldId="258"/>
+            <ac:spMk id="4" creationId="{00000000-0000-0000-0000-000000000000}"/>
+          </ac:spMkLst>
+        </pc:spChg>
+        <pc:spChg chg="mod">
+          <ac:chgData name="Benny Istanto" userId="ccea0e650e68d75e" providerId="LiveId" clId="{D8DD1CC7-EDF5-40EB-A44D-3059B72F36E1}" dt="2026-05-12T15:51:14.830" v="329" actId="207"/>
+          <ac:spMkLst>
+            <pc:docMk/>
+            <pc:sldMk cId="0" sldId="258"/>
+            <ac:spMk id="6" creationId="{00000000-0000-0000-0000-000000000000}"/>
+          </ac:spMkLst>
+        </pc:spChg>
+      </pc:sldChg>
+      <pc:sldChg chg="modSp mod">
+        <pc:chgData name="Benny Istanto" userId="ccea0e650e68d75e" providerId="LiveId" clId="{D8DD1CC7-EDF5-40EB-A44D-3059B72F36E1}" dt="2026-05-12T14:06:17.938" v="206" actId="403"/>
         <pc:sldMkLst>
           <pc:docMk/>
           <pc:sldMk cId="0" sldId="259"/>
         </pc:sldMkLst>
         <pc:spChg chg="mod">
-          <ac:chgData name="Benny Istanto" userId="ccea0e650e68d75e" providerId="LiveId" clId="{D8DD1CC7-EDF5-40EB-A44D-3059B72F36E1}" dt="2026-05-12T07:17:15.020" v="98" actId="1035"/>
+          <ac:chgData name="Benny Istanto" userId="ccea0e650e68d75e" providerId="LiveId" clId="{D8DD1CC7-EDF5-40EB-A44D-3059B72F36E1}" dt="2026-05-12T14:06:02.625" v="203" actId="1036"/>
+          <ac:spMkLst>
+            <pc:docMk/>
+            <pc:sldMk cId="0" sldId="259"/>
+            <ac:spMk id="7" creationId="{00000000-0000-0000-0000-000000000000}"/>
+          </ac:spMkLst>
+        </pc:spChg>
+        <pc:spChg chg="mod">
+          <ac:chgData name="Benny Istanto" userId="ccea0e650e68d75e" providerId="LiveId" clId="{D8DD1CC7-EDF5-40EB-A44D-3059B72F36E1}" dt="2026-05-12T14:06:02.625" v="203" actId="1036"/>
+          <ac:spMkLst>
+            <pc:docMk/>
+            <pc:sldMk cId="0" sldId="259"/>
+            <ac:spMk id="8" creationId="{00000000-0000-0000-0000-000000000000}"/>
+          </ac:spMkLst>
+        </pc:spChg>
+        <pc:spChg chg="mod">
+          <ac:chgData name="Benny Istanto" userId="ccea0e650e68d75e" providerId="LiveId" clId="{D8DD1CC7-EDF5-40EB-A44D-3059B72F36E1}" dt="2026-05-12T14:06:02.625" v="203" actId="1036"/>
+          <ac:spMkLst>
+            <pc:docMk/>
+            <pc:sldMk cId="0" sldId="259"/>
+            <ac:spMk id="9" creationId="{00000000-0000-0000-0000-000000000000}"/>
+          </ac:spMkLst>
+        </pc:spChg>
+        <pc:spChg chg="mod">
+          <ac:chgData name="Benny Istanto" userId="ccea0e650e68d75e" providerId="LiveId" clId="{D8DD1CC7-EDF5-40EB-A44D-3059B72F36E1}" dt="2026-05-12T14:06:17.938" v="206" actId="403"/>
+          <ac:spMkLst>
+            <pc:docMk/>
+            <pc:sldMk cId="0" sldId="259"/>
+            <ac:spMk id="10" creationId="{00000000-0000-0000-0000-000000000000}"/>
+          </ac:spMkLst>
+        </pc:spChg>
+        <pc:spChg chg="mod">
+          <ac:chgData name="Benny Istanto" userId="ccea0e650e68d75e" providerId="LiveId" clId="{D8DD1CC7-EDF5-40EB-A44D-3059B72F36E1}" dt="2026-05-12T14:06:02.625" v="203" actId="1036"/>
+          <ac:spMkLst>
+            <pc:docMk/>
+            <pc:sldMk cId="0" sldId="259"/>
+            <ac:spMk id="13" creationId="{00000000-0000-0000-0000-000000000000}"/>
+          </ac:spMkLst>
+        </pc:spChg>
+        <pc:spChg chg="mod">
+          <ac:chgData name="Benny Istanto" userId="ccea0e650e68d75e" providerId="LiveId" clId="{D8DD1CC7-EDF5-40EB-A44D-3059B72F36E1}" dt="2026-05-12T14:06:02.625" v="203" actId="1036"/>
+          <ac:spMkLst>
+            <pc:docMk/>
+            <pc:sldMk cId="0" sldId="259"/>
+            <ac:spMk id="15" creationId="{00000000-0000-0000-0000-000000000000}"/>
+          </ac:spMkLst>
+        </pc:spChg>
+        <pc:spChg chg="mod">
+          <ac:chgData name="Benny Istanto" userId="ccea0e650e68d75e" providerId="LiveId" clId="{D8DD1CC7-EDF5-40EB-A44D-3059B72F36E1}" dt="2026-05-12T14:06:02.625" v="203" actId="1036"/>
           <ac:spMkLst>
             <pc:docMk/>
             <pc:sldMk cId="0" sldId="259"/>
@@ -251,7 +393,23 @@
           </ac:spMkLst>
         </pc:spChg>
         <pc:spChg chg="mod">
-          <ac:chgData name="Benny Istanto" userId="ccea0e650e68d75e" providerId="LiveId" clId="{D8DD1CC7-EDF5-40EB-A44D-3059B72F36E1}" dt="2026-05-12T07:17:45.001" v="100" actId="1035"/>
+          <ac:chgData name="Benny Istanto" userId="ccea0e650e68d75e" providerId="LiveId" clId="{D8DD1CC7-EDF5-40EB-A44D-3059B72F36E1}" dt="2026-05-12T14:06:02.625" v="203" actId="1036"/>
+          <ac:spMkLst>
+            <pc:docMk/>
+            <pc:sldMk cId="0" sldId="259"/>
+            <ac:spMk id="17" creationId="{00000000-0000-0000-0000-000000000000}"/>
+          </ac:spMkLst>
+        </pc:spChg>
+        <pc:spChg chg="mod">
+          <ac:chgData name="Benny Istanto" userId="ccea0e650e68d75e" providerId="LiveId" clId="{D8DD1CC7-EDF5-40EB-A44D-3059B72F36E1}" dt="2026-05-12T14:06:02.625" v="203" actId="1036"/>
+          <ac:spMkLst>
+            <pc:docMk/>
+            <pc:sldMk cId="0" sldId="259"/>
+            <ac:spMk id="18" creationId="{00000000-0000-0000-0000-000000000000}"/>
+          </ac:spMkLst>
+        </pc:spChg>
+        <pc:spChg chg="mod">
+          <ac:chgData name="Benny Istanto" userId="ccea0e650e68d75e" providerId="LiveId" clId="{D8DD1CC7-EDF5-40EB-A44D-3059B72F36E1}" dt="2026-05-12T14:06:02.625" v="203" actId="1036"/>
           <ac:spMkLst>
             <pc:docMk/>
             <pc:sldMk cId="0" sldId="259"/>
@@ -259,18 +417,50 @@
           </ac:spMkLst>
         </pc:spChg>
       </pc:sldChg>
-      <pc:sldChg chg="modSp mod">
-        <pc:chgData name="Benny Istanto" userId="ccea0e650e68d75e" providerId="LiveId" clId="{D8DD1CC7-EDF5-40EB-A44D-3059B72F36E1}" dt="2026-05-12T07:18:22.369" v="121" actId="1036"/>
+      <pc:sldChg chg="addSp modSp mod">
+        <pc:chgData name="Benny Istanto" userId="ccea0e650e68d75e" providerId="LiveId" clId="{D8DD1CC7-EDF5-40EB-A44D-3059B72F36E1}" dt="2026-05-12T14:58:56.560" v="230" actId="403"/>
         <pc:sldMkLst>
           <pc:docMk/>
           <pc:sldMk cId="0" sldId="260"/>
         </pc:sldMkLst>
+        <pc:spChg chg="mod">
+          <ac:chgData name="Benny Istanto" userId="ccea0e650e68d75e" providerId="LiveId" clId="{D8DD1CC7-EDF5-40EB-A44D-3059B72F36E1}" dt="2026-05-12T14:09:10.781" v="207" actId="14100"/>
+          <ac:spMkLst>
+            <pc:docMk/>
+            <pc:sldMk cId="0" sldId="260"/>
+            <ac:spMk id="7" creationId="{00000000-0000-0000-0000-000000000000}"/>
+          </ac:spMkLst>
+        </pc:spChg>
+        <pc:spChg chg="mod">
+          <ac:chgData name="Benny Istanto" userId="ccea0e650e68d75e" providerId="LiveId" clId="{D8DD1CC7-EDF5-40EB-A44D-3059B72F36E1}" dt="2026-05-12T14:11:28.255" v="223" actId="20577"/>
+          <ac:spMkLst>
+            <pc:docMk/>
+            <pc:sldMk cId="0" sldId="260"/>
+            <ac:spMk id="10" creationId="{00000000-0000-0000-0000-000000000000}"/>
+          </ac:spMkLst>
+        </pc:spChg>
+        <pc:spChg chg="mod">
+          <ac:chgData name="Benny Istanto" userId="ccea0e650e68d75e" providerId="LiveId" clId="{D8DD1CC7-EDF5-40EB-A44D-3059B72F36E1}" dt="2026-05-12T14:58:56.560" v="230" actId="403"/>
+          <ac:spMkLst>
+            <pc:docMk/>
+            <pc:sldMk cId="0" sldId="260"/>
+            <ac:spMk id="11" creationId="{00000000-0000-0000-0000-000000000000}"/>
+          </ac:spMkLst>
+        </pc:spChg>
         <pc:spChg chg="mod">
           <ac:chgData name="Benny Istanto" userId="ccea0e650e68d75e" providerId="LiveId" clId="{D8DD1CC7-EDF5-40EB-A44D-3059B72F36E1}" dt="2026-05-12T07:18:22.369" v="121" actId="1036"/>
           <ac:spMkLst>
             <pc:docMk/>
             <pc:sldMk cId="0" sldId="260"/>
             <ac:spMk id="15" creationId="{00000000-0000-0000-0000-000000000000}"/>
+          </ac:spMkLst>
+        </pc:spChg>
+        <pc:spChg chg="add mod">
+          <ac:chgData name="Benny Istanto" userId="ccea0e650e68d75e" providerId="LiveId" clId="{D8DD1CC7-EDF5-40EB-A44D-3059B72F36E1}" dt="2026-05-12T14:10:23.292" v="219" actId="20577"/>
+          <ac:spMkLst>
+            <pc:docMk/>
+            <pc:sldMk cId="0" sldId="260"/>
+            <ac:spMk id="16" creationId="{5742809A-8091-A22A-8CDC-0250A499B00B}"/>
           </ac:spMkLst>
         </pc:spChg>
         <pc:graphicFrameChg chg="mod">
@@ -283,13 +473,296 @@
         </pc:graphicFrameChg>
       </pc:sldChg>
       <pc:sldChg chg="modSp mod">
-        <pc:chgData name="Benny Istanto" userId="ccea0e650e68d75e" providerId="LiveId" clId="{D8DD1CC7-EDF5-40EB-A44D-3059B72F36E1}" dt="2026-05-12T09:19:40.263" v="142" actId="1036"/>
+        <pc:chgData name="Benny Istanto" userId="ccea0e650e68d75e" providerId="LiveId" clId="{D8DD1CC7-EDF5-40EB-A44D-3059B72F36E1}" dt="2026-05-12T15:00:58.480" v="256" actId="1036"/>
+        <pc:sldMkLst>
+          <pc:docMk/>
+          <pc:sldMk cId="0" sldId="261"/>
+        </pc:sldMkLst>
+        <pc:spChg chg="mod">
+          <ac:chgData name="Benny Istanto" userId="ccea0e650e68d75e" providerId="LiveId" clId="{D8DD1CC7-EDF5-40EB-A44D-3059B72F36E1}" dt="2026-05-12T15:00:58.480" v="256" actId="1036"/>
+          <ac:spMkLst>
+            <pc:docMk/>
+            <pc:sldMk cId="0" sldId="261"/>
+            <ac:spMk id="8" creationId="{00000000-0000-0000-0000-000000000000}"/>
+          </ac:spMkLst>
+        </pc:spChg>
+        <pc:spChg chg="mod">
+          <ac:chgData name="Benny Istanto" userId="ccea0e650e68d75e" providerId="LiveId" clId="{D8DD1CC7-EDF5-40EB-A44D-3059B72F36E1}" dt="2026-05-12T15:00:58.480" v="256" actId="1036"/>
+          <ac:spMkLst>
+            <pc:docMk/>
+            <pc:sldMk cId="0" sldId="261"/>
+            <ac:spMk id="9" creationId="{00000000-0000-0000-0000-000000000000}"/>
+          </ac:spMkLst>
+        </pc:spChg>
+        <pc:spChg chg="mod">
+          <ac:chgData name="Benny Istanto" userId="ccea0e650e68d75e" providerId="LiveId" clId="{D8DD1CC7-EDF5-40EB-A44D-3059B72F36E1}" dt="2026-05-12T15:00:58.480" v="256" actId="1036"/>
+          <ac:spMkLst>
+            <pc:docMk/>
+            <pc:sldMk cId="0" sldId="261"/>
+            <ac:spMk id="10" creationId="{00000000-0000-0000-0000-000000000000}"/>
+          </ac:spMkLst>
+        </pc:spChg>
+        <pc:spChg chg="mod">
+          <ac:chgData name="Benny Istanto" userId="ccea0e650e68d75e" providerId="LiveId" clId="{D8DD1CC7-EDF5-40EB-A44D-3059B72F36E1}" dt="2026-05-12T15:00:58.480" v="256" actId="1036"/>
+          <ac:spMkLst>
+            <pc:docMk/>
+            <pc:sldMk cId="0" sldId="261"/>
+            <ac:spMk id="11" creationId="{00000000-0000-0000-0000-000000000000}"/>
+          </ac:spMkLst>
+        </pc:spChg>
+        <pc:spChg chg="mod">
+          <ac:chgData name="Benny Istanto" userId="ccea0e650e68d75e" providerId="LiveId" clId="{D8DD1CC7-EDF5-40EB-A44D-3059B72F36E1}" dt="2026-05-12T15:00:58.480" v="256" actId="1036"/>
+          <ac:spMkLst>
+            <pc:docMk/>
+            <pc:sldMk cId="0" sldId="261"/>
+            <ac:spMk id="12" creationId="{00000000-0000-0000-0000-000000000000}"/>
+          </ac:spMkLst>
+        </pc:spChg>
+        <pc:spChg chg="mod">
+          <ac:chgData name="Benny Istanto" userId="ccea0e650e68d75e" providerId="LiveId" clId="{D8DD1CC7-EDF5-40EB-A44D-3059B72F36E1}" dt="2026-05-12T15:00:58.480" v="256" actId="1036"/>
+          <ac:spMkLst>
+            <pc:docMk/>
+            <pc:sldMk cId="0" sldId="261"/>
+            <ac:spMk id="13" creationId="{00000000-0000-0000-0000-000000000000}"/>
+          </ac:spMkLst>
+        </pc:spChg>
+        <pc:spChg chg="mod">
+          <ac:chgData name="Benny Istanto" userId="ccea0e650e68d75e" providerId="LiveId" clId="{D8DD1CC7-EDF5-40EB-A44D-3059B72F36E1}" dt="2026-05-12T15:00:58.480" v="256" actId="1036"/>
+          <ac:spMkLst>
+            <pc:docMk/>
+            <pc:sldMk cId="0" sldId="261"/>
+            <ac:spMk id="14" creationId="{00000000-0000-0000-0000-000000000000}"/>
+          </ac:spMkLst>
+        </pc:spChg>
+        <pc:spChg chg="mod">
+          <ac:chgData name="Benny Istanto" userId="ccea0e650e68d75e" providerId="LiveId" clId="{D8DD1CC7-EDF5-40EB-A44D-3059B72F36E1}" dt="2026-05-12T15:00:58.480" v="256" actId="1036"/>
+          <ac:spMkLst>
+            <pc:docMk/>
+            <pc:sldMk cId="0" sldId="261"/>
+            <ac:spMk id="15" creationId="{00000000-0000-0000-0000-000000000000}"/>
+          </ac:spMkLst>
+        </pc:spChg>
+        <pc:graphicFrameChg chg="mod modGraphic">
+          <ac:chgData name="Benny Istanto" userId="ccea0e650e68d75e" providerId="LiveId" clId="{D8DD1CC7-EDF5-40EB-A44D-3059B72F36E1}" dt="2026-05-12T15:00:58.480" v="256" actId="1036"/>
+          <ac:graphicFrameMkLst>
+            <pc:docMk/>
+            <pc:sldMk cId="0" sldId="261"/>
+            <ac:graphicFrameMk id="7" creationId="{00000000-0000-0000-0000-000000000000}"/>
+          </ac:graphicFrameMkLst>
+        </pc:graphicFrameChg>
+      </pc:sldChg>
+      <pc:sldChg chg="modSp mod">
+        <pc:chgData name="Benny Istanto" userId="ccea0e650e68d75e" providerId="LiveId" clId="{D8DD1CC7-EDF5-40EB-A44D-3059B72F36E1}" dt="2026-05-12T15:00:42.178" v="246" actId="1036"/>
+        <pc:sldMkLst>
+          <pc:docMk/>
+          <pc:sldMk cId="0" sldId="262"/>
+        </pc:sldMkLst>
+        <pc:spChg chg="mod">
+          <ac:chgData name="Benny Istanto" userId="ccea0e650e68d75e" providerId="LiveId" clId="{D8DD1CC7-EDF5-40EB-A44D-3059B72F36E1}" dt="2026-05-12T15:00:42.178" v="246" actId="1036"/>
+          <ac:spMkLst>
+            <pc:docMk/>
+            <pc:sldMk cId="0" sldId="262"/>
+            <ac:spMk id="7" creationId="{00000000-0000-0000-0000-000000000000}"/>
+          </ac:spMkLst>
+        </pc:spChg>
+        <pc:spChg chg="mod">
+          <ac:chgData name="Benny Istanto" userId="ccea0e650e68d75e" providerId="LiveId" clId="{D8DD1CC7-EDF5-40EB-A44D-3059B72F36E1}" dt="2026-05-12T15:00:42.178" v="246" actId="1036"/>
+          <ac:spMkLst>
+            <pc:docMk/>
+            <pc:sldMk cId="0" sldId="262"/>
+            <ac:spMk id="8" creationId="{00000000-0000-0000-0000-000000000000}"/>
+          </ac:spMkLst>
+        </pc:spChg>
+        <pc:spChg chg="mod">
+          <ac:chgData name="Benny Istanto" userId="ccea0e650e68d75e" providerId="LiveId" clId="{D8DD1CC7-EDF5-40EB-A44D-3059B72F36E1}" dt="2026-05-12T15:00:42.178" v="246" actId="1036"/>
+          <ac:spMkLst>
+            <pc:docMk/>
+            <pc:sldMk cId="0" sldId="262"/>
+            <ac:spMk id="9" creationId="{00000000-0000-0000-0000-000000000000}"/>
+          </ac:spMkLst>
+        </pc:spChg>
+        <pc:spChg chg="mod">
+          <ac:chgData name="Benny Istanto" userId="ccea0e650e68d75e" providerId="LiveId" clId="{D8DD1CC7-EDF5-40EB-A44D-3059B72F36E1}" dt="2026-05-12T15:00:42.178" v="246" actId="1036"/>
+          <ac:spMkLst>
+            <pc:docMk/>
+            <pc:sldMk cId="0" sldId="262"/>
+            <ac:spMk id="10" creationId="{00000000-0000-0000-0000-000000000000}"/>
+          </ac:spMkLst>
+        </pc:spChg>
+        <pc:spChg chg="mod">
+          <ac:chgData name="Benny Istanto" userId="ccea0e650e68d75e" providerId="LiveId" clId="{D8DD1CC7-EDF5-40EB-A44D-3059B72F36E1}" dt="2026-05-12T15:00:42.178" v="246" actId="1036"/>
+          <ac:spMkLst>
+            <pc:docMk/>
+            <pc:sldMk cId="0" sldId="262"/>
+            <ac:spMk id="11" creationId="{00000000-0000-0000-0000-000000000000}"/>
+          </ac:spMkLst>
+        </pc:spChg>
+        <pc:spChg chg="mod">
+          <ac:chgData name="Benny Istanto" userId="ccea0e650e68d75e" providerId="LiveId" clId="{D8DD1CC7-EDF5-40EB-A44D-3059B72F36E1}" dt="2026-05-12T15:00:42.178" v="246" actId="1036"/>
+          <ac:spMkLst>
+            <pc:docMk/>
+            <pc:sldMk cId="0" sldId="262"/>
+            <ac:spMk id="12" creationId="{00000000-0000-0000-0000-000000000000}"/>
+          </ac:spMkLst>
+        </pc:spChg>
+        <pc:spChg chg="mod">
+          <ac:chgData name="Benny Istanto" userId="ccea0e650e68d75e" providerId="LiveId" clId="{D8DD1CC7-EDF5-40EB-A44D-3059B72F36E1}" dt="2026-05-12T15:00:42.178" v="246" actId="1036"/>
+          <ac:spMkLst>
+            <pc:docMk/>
+            <pc:sldMk cId="0" sldId="262"/>
+            <ac:spMk id="13" creationId="{00000000-0000-0000-0000-000000000000}"/>
+          </ac:spMkLst>
+        </pc:spChg>
+        <pc:spChg chg="mod">
+          <ac:chgData name="Benny Istanto" userId="ccea0e650e68d75e" providerId="LiveId" clId="{D8DD1CC7-EDF5-40EB-A44D-3059B72F36E1}" dt="2026-05-12T15:00:42.178" v="246" actId="1036"/>
+          <ac:spMkLst>
+            <pc:docMk/>
+            <pc:sldMk cId="0" sldId="262"/>
+            <ac:spMk id="14" creationId="{00000000-0000-0000-0000-000000000000}"/>
+          </ac:spMkLst>
+        </pc:spChg>
+        <pc:spChg chg="mod">
+          <ac:chgData name="Benny Istanto" userId="ccea0e650e68d75e" providerId="LiveId" clId="{D8DD1CC7-EDF5-40EB-A44D-3059B72F36E1}" dt="2026-05-12T15:00:42.178" v="246" actId="1036"/>
+          <ac:spMkLst>
+            <pc:docMk/>
+            <pc:sldMk cId="0" sldId="262"/>
+            <ac:spMk id="15" creationId="{00000000-0000-0000-0000-000000000000}"/>
+          </ac:spMkLst>
+        </pc:spChg>
+        <pc:graphicFrameChg chg="mod modGraphic">
+          <ac:chgData name="Benny Istanto" userId="ccea0e650e68d75e" providerId="LiveId" clId="{D8DD1CC7-EDF5-40EB-A44D-3059B72F36E1}" dt="2026-05-12T15:00:42.178" v="246" actId="1036"/>
+          <ac:graphicFrameMkLst>
+            <pc:docMk/>
+            <pc:sldMk cId="0" sldId="262"/>
+            <ac:graphicFrameMk id="6" creationId="{00000000-0000-0000-0000-000000000000}"/>
+          </ac:graphicFrameMkLst>
+        </pc:graphicFrameChg>
+      </pc:sldChg>
+      <pc:sldChg chg="modSp mod">
+        <pc:chgData name="Benny Istanto" userId="ccea0e650e68d75e" providerId="LiveId" clId="{D8DD1CC7-EDF5-40EB-A44D-3059B72F36E1}" dt="2026-05-12T15:50:52.199" v="326" actId="207"/>
+        <pc:sldMkLst>
+          <pc:docMk/>
+          <pc:sldMk cId="0" sldId="263"/>
+        </pc:sldMkLst>
+        <pc:spChg chg="mod">
+          <ac:chgData name="Benny Istanto" userId="ccea0e650e68d75e" providerId="LiveId" clId="{D8DD1CC7-EDF5-40EB-A44D-3059B72F36E1}" dt="2026-05-12T15:01:23.328" v="261" actId="20577"/>
+          <ac:spMkLst>
+            <pc:docMk/>
+            <pc:sldMk cId="0" sldId="263"/>
+            <ac:spMk id="4" creationId="{00000000-0000-0000-0000-000000000000}"/>
+          </ac:spMkLst>
+        </pc:spChg>
+        <pc:spChg chg="mod">
+          <ac:chgData name="Benny Istanto" userId="ccea0e650e68d75e" providerId="LiveId" clId="{D8DD1CC7-EDF5-40EB-A44D-3059B72F36E1}" dt="2026-05-12T15:50:52.199" v="326" actId="207"/>
+          <ac:spMkLst>
+            <pc:docMk/>
+            <pc:sldMk cId="0" sldId="263"/>
+            <ac:spMk id="6" creationId="{00000000-0000-0000-0000-000000000000}"/>
+          </ac:spMkLst>
+        </pc:spChg>
+      </pc:sldChg>
+      <pc:sldChg chg="modSp mod">
+        <pc:chgData name="Benny Istanto" userId="ccea0e650e68d75e" providerId="LiveId" clId="{D8DD1CC7-EDF5-40EB-A44D-3059B72F36E1}" dt="2026-05-12T15:02:40.628" v="271" actId="1036"/>
+        <pc:sldMkLst>
+          <pc:docMk/>
+          <pc:sldMk cId="0" sldId="264"/>
+        </pc:sldMkLst>
+        <pc:spChg chg="mod">
+          <ac:chgData name="Benny Istanto" userId="ccea0e650e68d75e" providerId="LiveId" clId="{D8DD1CC7-EDF5-40EB-A44D-3059B72F36E1}" dt="2026-05-12T15:02:40.628" v="271" actId="1036"/>
+          <ac:spMkLst>
+            <pc:docMk/>
+            <pc:sldMk cId="0" sldId="264"/>
+            <ac:spMk id="7" creationId="{00000000-0000-0000-0000-000000000000}"/>
+          </ac:spMkLst>
+        </pc:spChg>
+        <pc:spChg chg="mod">
+          <ac:chgData name="Benny Istanto" userId="ccea0e650e68d75e" providerId="LiveId" clId="{D8DD1CC7-EDF5-40EB-A44D-3059B72F36E1}" dt="2026-05-12T15:02:40.628" v="271" actId="1036"/>
+          <ac:spMkLst>
+            <pc:docMk/>
+            <pc:sldMk cId="0" sldId="264"/>
+            <ac:spMk id="8" creationId="{00000000-0000-0000-0000-000000000000}"/>
+          </ac:spMkLst>
+        </pc:spChg>
+        <pc:spChg chg="mod">
+          <ac:chgData name="Benny Istanto" userId="ccea0e650e68d75e" providerId="LiveId" clId="{D8DD1CC7-EDF5-40EB-A44D-3059B72F36E1}" dt="2026-05-12T15:02:40.628" v="271" actId="1036"/>
+          <ac:spMkLst>
+            <pc:docMk/>
+            <pc:sldMk cId="0" sldId="264"/>
+            <ac:spMk id="9" creationId="{00000000-0000-0000-0000-000000000000}"/>
+          </ac:spMkLst>
+        </pc:spChg>
+      </pc:sldChg>
+      <pc:sldChg chg="modSp mod">
+        <pc:chgData name="Benny Istanto" userId="ccea0e650e68d75e" providerId="LiveId" clId="{D8DD1CC7-EDF5-40EB-A44D-3059B72F36E1}" dt="2026-05-12T15:04:35.040" v="293" actId="1036"/>
+        <pc:sldMkLst>
+          <pc:docMk/>
+          <pc:sldMk cId="0" sldId="265"/>
+        </pc:sldMkLst>
+        <pc:spChg chg="mod">
+          <ac:chgData name="Benny Istanto" userId="ccea0e650e68d75e" providerId="LiveId" clId="{D8DD1CC7-EDF5-40EB-A44D-3059B72F36E1}" dt="2026-05-12T15:03:21.021" v="272" actId="403"/>
+          <ac:spMkLst>
+            <pc:docMk/>
+            <pc:sldMk cId="0" sldId="265"/>
+            <ac:spMk id="7" creationId="{00000000-0000-0000-0000-000000000000}"/>
+          </ac:spMkLst>
+        </pc:spChg>
+        <pc:spChg chg="mod">
+          <ac:chgData name="Benny Istanto" userId="ccea0e650e68d75e" providerId="LiveId" clId="{D8DD1CC7-EDF5-40EB-A44D-3059B72F36E1}" dt="2026-05-12T15:03:21.021" v="272" actId="403"/>
+          <ac:spMkLst>
+            <pc:docMk/>
+            <pc:sldMk cId="0" sldId="265"/>
+            <ac:spMk id="11" creationId="{00000000-0000-0000-0000-000000000000}"/>
+          </ac:spMkLst>
+        </pc:spChg>
+        <pc:spChg chg="mod">
+          <ac:chgData name="Benny Istanto" userId="ccea0e650e68d75e" providerId="LiveId" clId="{D8DD1CC7-EDF5-40EB-A44D-3059B72F36E1}" dt="2026-05-12T15:03:36.134" v="273" actId="403"/>
+          <ac:spMkLst>
+            <pc:docMk/>
+            <pc:sldMk cId="0" sldId="265"/>
+            <ac:spMk id="17" creationId="{00000000-0000-0000-0000-000000000000}"/>
+          </ac:spMkLst>
+        </pc:spChg>
+        <pc:spChg chg="mod">
+          <ac:chgData name="Benny Istanto" userId="ccea0e650e68d75e" providerId="LiveId" clId="{D8DD1CC7-EDF5-40EB-A44D-3059B72F36E1}" dt="2026-05-12T15:04:35.040" v="293" actId="1036"/>
+          <ac:spMkLst>
+            <pc:docMk/>
+            <pc:sldMk cId="0" sldId="265"/>
+            <ac:spMk id="18" creationId="{00000000-0000-0000-0000-000000000000}"/>
+          </ac:spMkLst>
+        </pc:spChg>
+        <pc:spChg chg="mod">
+          <ac:chgData name="Benny Istanto" userId="ccea0e650e68d75e" providerId="LiveId" clId="{D8DD1CC7-EDF5-40EB-A44D-3059B72F36E1}" dt="2026-05-12T15:04:15.619" v="280" actId="1036"/>
+          <ac:spMkLst>
+            <pc:docMk/>
+            <pc:sldMk cId="0" sldId="265"/>
+            <ac:spMk id="21" creationId="{00000000-0000-0000-0000-000000000000}"/>
+          </ac:spMkLst>
+        </pc:spChg>
+      </pc:sldChg>
+      <pc:sldChg chg="modSp mod">
+        <pc:chgData name="Benny Istanto" userId="ccea0e650e68d75e" providerId="LiveId" clId="{D8DD1CC7-EDF5-40EB-A44D-3059B72F36E1}" dt="2026-05-12T15:48:18.800" v="304" actId="403"/>
         <pc:sldMkLst>
           <pc:docMk/>
           <pc:sldMk cId="0" sldId="266"/>
         </pc:sldMkLst>
         <pc:spChg chg="mod">
-          <ac:chgData name="Benny Istanto" userId="ccea0e650e68d75e" providerId="LiveId" clId="{D8DD1CC7-EDF5-40EB-A44D-3059B72F36E1}" dt="2026-05-12T09:19:21.216" v="136" actId="20577"/>
+          <ac:chgData name="Benny Istanto" userId="ccea0e650e68d75e" providerId="LiveId" clId="{D8DD1CC7-EDF5-40EB-A44D-3059B72F36E1}" dt="2026-05-12T15:04:53.460" v="303" actId="1036"/>
+          <ac:spMkLst>
+            <pc:docMk/>
+            <pc:sldMk cId="0" sldId="266"/>
+            <ac:spMk id="7" creationId="{00000000-0000-0000-0000-000000000000}"/>
+          </ac:spMkLst>
+        </pc:spChg>
+        <pc:spChg chg="mod">
+          <ac:chgData name="Benny Istanto" userId="ccea0e650e68d75e" providerId="LiveId" clId="{D8DD1CC7-EDF5-40EB-A44D-3059B72F36E1}" dt="2026-05-12T15:04:53.460" v="303" actId="1036"/>
+          <ac:spMkLst>
+            <pc:docMk/>
+            <pc:sldMk cId="0" sldId="266"/>
+            <ac:spMk id="8" creationId="{00000000-0000-0000-0000-000000000000}"/>
+          </ac:spMkLst>
+        </pc:spChg>
+        <pc:spChg chg="mod">
+          <ac:chgData name="Benny Istanto" userId="ccea0e650e68d75e" providerId="LiveId" clId="{D8DD1CC7-EDF5-40EB-A44D-3059B72F36E1}" dt="2026-05-12T15:04:53.460" v="303" actId="1036"/>
           <ac:spMkLst>
             <pc:docMk/>
             <pc:sldMk cId="0" sldId="266"/>
@@ -297,13 +770,838 @@
           </ac:spMkLst>
         </pc:spChg>
         <pc:spChg chg="mod">
-          <ac:chgData name="Benny Istanto" userId="ccea0e650e68d75e" providerId="LiveId" clId="{D8DD1CC7-EDF5-40EB-A44D-3059B72F36E1}" dt="2026-05-12T09:19:40.263" v="142" actId="1036"/>
+          <ac:chgData name="Benny Istanto" userId="ccea0e650e68d75e" providerId="LiveId" clId="{D8DD1CC7-EDF5-40EB-A44D-3059B72F36E1}" dt="2026-05-12T15:04:53.460" v="303" actId="1036"/>
+          <ac:spMkLst>
+            <pc:docMk/>
+            <pc:sldMk cId="0" sldId="266"/>
+            <ac:spMk id="10" creationId="{00000000-0000-0000-0000-000000000000}"/>
+          </ac:spMkLst>
+        </pc:spChg>
+        <pc:spChg chg="mod">
+          <ac:chgData name="Benny Istanto" userId="ccea0e650e68d75e" providerId="LiveId" clId="{D8DD1CC7-EDF5-40EB-A44D-3059B72F36E1}" dt="2026-05-12T15:04:53.460" v="303" actId="1036"/>
+          <ac:spMkLst>
+            <pc:docMk/>
+            <pc:sldMk cId="0" sldId="266"/>
+            <ac:spMk id="11" creationId="{00000000-0000-0000-0000-000000000000}"/>
+          </ac:spMkLst>
+        </pc:spChg>
+        <pc:spChg chg="mod">
+          <ac:chgData name="Benny Istanto" userId="ccea0e650e68d75e" providerId="LiveId" clId="{D8DD1CC7-EDF5-40EB-A44D-3059B72F36E1}" dt="2026-05-12T15:48:18.800" v="304" actId="403"/>
           <ac:spMkLst>
             <pc:docMk/>
             <pc:sldMk cId="0" sldId="266"/>
             <ac:spMk id="12" creationId="{00000000-0000-0000-0000-000000000000}"/>
           </ac:spMkLst>
         </pc:spChg>
+      </pc:sldChg>
+      <pc:sldChg chg="modSp mod">
+        <pc:chgData name="Benny Istanto" userId="ccea0e650e68d75e" providerId="LiveId" clId="{D8DD1CC7-EDF5-40EB-A44D-3059B72F36E1}" dt="2026-05-12T15:48:44.509" v="312" actId="403"/>
+        <pc:sldMkLst>
+          <pc:docMk/>
+          <pc:sldMk cId="0" sldId="267"/>
+        </pc:sldMkLst>
+        <pc:spChg chg="mod">
+          <ac:chgData name="Benny Istanto" userId="ccea0e650e68d75e" providerId="LiveId" clId="{D8DD1CC7-EDF5-40EB-A44D-3059B72F36E1}" dt="2026-05-12T15:48:44.509" v="312" actId="403"/>
+          <ac:spMkLst>
+            <pc:docMk/>
+            <pc:sldMk cId="0" sldId="267"/>
+            <ac:spMk id="12" creationId="{00000000-0000-0000-0000-000000000000}"/>
+          </ac:spMkLst>
+        </pc:spChg>
+        <pc:graphicFrameChg chg="modGraphic">
+          <ac:chgData name="Benny Istanto" userId="ccea0e650e68d75e" providerId="LiveId" clId="{D8DD1CC7-EDF5-40EB-A44D-3059B72F36E1}" dt="2026-05-12T15:48:30.258" v="306" actId="403"/>
+          <ac:graphicFrameMkLst>
+            <pc:docMk/>
+            <pc:sldMk cId="0" sldId="267"/>
+            <ac:graphicFrameMk id="7" creationId="{00000000-0000-0000-0000-000000000000}"/>
+          </ac:graphicFrameMkLst>
+        </pc:graphicFrameChg>
+        <pc:graphicFrameChg chg="modGraphic">
+          <ac:chgData name="Benny Istanto" userId="ccea0e650e68d75e" providerId="LiveId" clId="{D8DD1CC7-EDF5-40EB-A44D-3059B72F36E1}" dt="2026-05-12T15:48:35.074" v="309" actId="403"/>
+          <ac:graphicFrameMkLst>
+            <pc:docMk/>
+            <pc:sldMk cId="0" sldId="267"/>
+            <ac:graphicFrameMk id="8" creationId="{00000000-0000-0000-0000-000000000000}"/>
+          </ac:graphicFrameMkLst>
+        </pc:graphicFrameChg>
+        <pc:graphicFrameChg chg="modGraphic">
+          <ac:chgData name="Benny Istanto" userId="ccea0e650e68d75e" providerId="LiveId" clId="{D8DD1CC7-EDF5-40EB-A44D-3059B72F36E1}" dt="2026-05-12T15:48:40.300" v="311" actId="403"/>
+          <ac:graphicFrameMkLst>
+            <pc:docMk/>
+            <pc:sldMk cId="0" sldId="267"/>
+            <ac:graphicFrameMk id="9" creationId="{00000000-0000-0000-0000-000000000000}"/>
+          </ac:graphicFrameMkLst>
+        </pc:graphicFrameChg>
+      </pc:sldChg>
+      <pc:sldChg chg="modSp mod">
+        <pc:chgData name="Benny Istanto" userId="ccea0e650e68d75e" providerId="LiveId" clId="{D8DD1CC7-EDF5-40EB-A44D-3059B72F36E1}" dt="2026-05-12T15:49:16.839" v="317" actId="403"/>
+        <pc:sldMkLst>
+          <pc:docMk/>
+          <pc:sldMk cId="0" sldId="268"/>
+        </pc:sldMkLst>
+        <pc:spChg chg="mod">
+          <ac:chgData name="Benny Istanto" userId="ccea0e650e68d75e" providerId="LiveId" clId="{D8DD1CC7-EDF5-40EB-A44D-3059B72F36E1}" dt="2026-05-12T15:49:05.535" v="313" actId="403"/>
+          <ac:spMkLst>
+            <pc:docMk/>
+            <pc:sldMk cId="0" sldId="268"/>
+            <ac:spMk id="7" creationId="{00000000-0000-0000-0000-000000000000}"/>
+          </ac:spMkLst>
+        </pc:spChg>
+        <pc:spChg chg="mod">
+          <ac:chgData name="Benny Istanto" userId="ccea0e650e68d75e" providerId="LiveId" clId="{D8DD1CC7-EDF5-40EB-A44D-3059B72F36E1}" dt="2026-05-12T15:49:09.336" v="314" actId="403"/>
+          <ac:spMkLst>
+            <pc:docMk/>
+            <pc:sldMk cId="0" sldId="268"/>
+            <ac:spMk id="11" creationId="{00000000-0000-0000-0000-000000000000}"/>
+          </ac:spMkLst>
+        </pc:spChg>
+        <pc:graphicFrameChg chg="modGraphic">
+          <ac:chgData name="Benny Istanto" userId="ccea0e650e68d75e" providerId="LiveId" clId="{D8DD1CC7-EDF5-40EB-A44D-3059B72F36E1}" dt="2026-05-12T15:49:16.839" v="317" actId="403"/>
+          <ac:graphicFrameMkLst>
+            <pc:docMk/>
+            <pc:sldMk cId="0" sldId="268"/>
+            <ac:graphicFrameMk id="12" creationId="{00000000-0000-0000-0000-000000000000}"/>
+          </ac:graphicFrameMkLst>
+        </pc:graphicFrameChg>
+      </pc:sldChg>
+      <pc:sldChg chg="modSp mod">
+        <pc:chgData name="Benny Istanto" userId="ccea0e650e68d75e" providerId="LiveId" clId="{D8DD1CC7-EDF5-40EB-A44D-3059B72F36E1}" dt="2026-05-12T15:51:34.348" v="332" actId="207"/>
+        <pc:sldMkLst>
+          <pc:docMk/>
+          <pc:sldMk cId="0" sldId="269"/>
+        </pc:sldMkLst>
+        <pc:spChg chg="mod">
+          <ac:chgData name="Benny Istanto" userId="ccea0e650e68d75e" providerId="LiveId" clId="{D8DD1CC7-EDF5-40EB-A44D-3059B72F36E1}" dt="2026-05-12T15:49:27.699" v="322" actId="20577"/>
+          <ac:spMkLst>
+            <pc:docMk/>
+            <pc:sldMk cId="0" sldId="269"/>
+            <ac:spMk id="4" creationId="{00000000-0000-0000-0000-000000000000}"/>
+          </ac:spMkLst>
+        </pc:spChg>
+        <pc:spChg chg="mod">
+          <ac:chgData name="Benny Istanto" userId="ccea0e650e68d75e" providerId="LiveId" clId="{D8DD1CC7-EDF5-40EB-A44D-3059B72F36E1}" dt="2026-05-12T15:51:34.348" v="332" actId="207"/>
+          <ac:spMkLst>
+            <pc:docMk/>
+            <pc:sldMk cId="0" sldId="269"/>
+            <ac:spMk id="6" creationId="{00000000-0000-0000-0000-000000000000}"/>
+          </ac:spMkLst>
+        </pc:spChg>
+      </pc:sldChg>
+      <pc:sldChg chg="modSp mod">
+        <pc:chgData name="Benny Istanto" userId="ccea0e650e68d75e" providerId="LiveId" clId="{D8DD1CC7-EDF5-40EB-A44D-3059B72F36E1}" dt="2026-05-12T15:52:20.988" v="356" actId="403"/>
+        <pc:sldMkLst>
+          <pc:docMk/>
+          <pc:sldMk cId="0" sldId="270"/>
+        </pc:sldMkLst>
+        <pc:spChg chg="mod">
+          <ac:chgData name="Benny Istanto" userId="ccea0e650e68d75e" providerId="LiveId" clId="{D8DD1CC7-EDF5-40EB-A44D-3059B72F36E1}" dt="2026-05-12T15:51:42.191" v="333" actId="403"/>
+          <ac:spMkLst>
+            <pc:docMk/>
+            <pc:sldMk cId="0" sldId="270"/>
+            <ac:spMk id="7" creationId="{00000000-0000-0000-0000-000000000000}"/>
+          </ac:spMkLst>
+        </pc:spChg>
+        <pc:spChg chg="mod">
+          <ac:chgData name="Benny Istanto" userId="ccea0e650e68d75e" providerId="LiveId" clId="{D8DD1CC7-EDF5-40EB-A44D-3059B72F36E1}" dt="2026-05-12T15:52:06.362" v="339" actId="403"/>
+          <ac:spMkLst>
+            <pc:docMk/>
+            <pc:sldMk cId="0" sldId="270"/>
+            <ac:spMk id="11" creationId="{00000000-0000-0000-0000-000000000000}"/>
+          </ac:spMkLst>
+        </pc:spChg>
+        <pc:spChg chg="mod">
+          <ac:chgData name="Benny Istanto" userId="ccea0e650e68d75e" providerId="LiveId" clId="{D8DD1CC7-EDF5-40EB-A44D-3059B72F36E1}" dt="2026-05-12T15:51:47.466" v="334" actId="403"/>
+          <ac:spMkLst>
+            <pc:docMk/>
+            <pc:sldMk cId="0" sldId="270"/>
+            <ac:spMk id="12" creationId="{00000000-0000-0000-0000-000000000000}"/>
+          </ac:spMkLst>
+        </pc:spChg>
+        <pc:spChg chg="mod">
+          <ac:chgData name="Benny Istanto" userId="ccea0e650e68d75e" providerId="LiveId" clId="{D8DD1CC7-EDF5-40EB-A44D-3059B72F36E1}" dt="2026-05-12T15:52:20.988" v="356" actId="403"/>
+          <ac:spMkLst>
+            <pc:docMk/>
+            <pc:sldMk cId="0" sldId="270"/>
+            <ac:spMk id="22" creationId="{00000000-0000-0000-0000-000000000000}"/>
+          </ac:spMkLst>
+        </pc:spChg>
+        <pc:spChg chg="mod">
+          <ac:chgData name="Benny Istanto" userId="ccea0e650e68d75e" providerId="LiveId" clId="{D8DD1CC7-EDF5-40EB-A44D-3059B72F36E1}" dt="2026-05-12T15:52:16.987" v="355" actId="1036"/>
+          <ac:spMkLst>
+            <pc:docMk/>
+            <pc:sldMk cId="0" sldId="270"/>
+            <ac:spMk id="25" creationId="{00000000-0000-0000-0000-000000000000}"/>
+          </ac:spMkLst>
+        </pc:spChg>
+        <pc:graphicFrameChg chg="modGraphic">
+          <ac:chgData name="Benny Istanto" userId="ccea0e650e68d75e" providerId="LiveId" clId="{D8DD1CC7-EDF5-40EB-A44D-3059B72F36E1}" dt="2026-05-12T15:51:54.149" v="338" actId="404"/>
+          <ac:graphicFrameMkLst>
+            <pc:docMk/>
+            <pc:sldMk cId="0" sldId="270"/>
+            <ac:graphicFrameMk id="8" creationId="{00000000-0000-0000-0000-000000000000}"/>
+          </ac:graphicFrameMkLst>
+        </pc:graphicFrameChg>
+      </pc:sldChg>
+      <pc:sldChg chg="modSp mod">
+        <pc:chgData name="Benny Istanto" userId="ccea0e650e68d75e" providerId="LiveId" clId="{D8DD1CC7-EDF5-40EB-A44D-3059B72F36E1}" dt="2026-05-12T16:16:54.960" v="366" actId="1036"/>
+        <pc:sldMkLst>
+          <pc:docMk/>
+          <pc:sldMk cId="0" sldId="271"/>
+        </pc:sldMkLst>
+        <pc:spChg chg="mod">
+          <ac:chgData name="Benny Istanto" userId="ccea0e650e68d75e" providerId="LiveId" clId="{D8DD1CC7-EDF5-40EB-A44D-3059B72F36E1}" dt="2026-05-12T16:16:54.960" v="366" actId="1036"/>
+          <ac:spMkLst>
+            <pc:docMk/>
+            <pc:sldMk cId="0" sldId="271"/>
+            <ac:spMk id="7" creationId="{00000000-0000-0000-0000-000000000000}"/>
+          </ac:spMkLst>
+        </pc:spChg>
+        <pc:spChg chg="mod">
+          <ac:chgData name="Benny Istanto" userId="ccea0e650e68d75e" providerId="LiveId" clId="{D8DD1CC7-EDF5-40EB-A44D-3059B72F36E1}" dt="2026-05-12T16:16:54.960" v="366" actId="1036"/>
+          <ac:spMkLst>
+            <pc:docMk/>
+            <pc:sldMk cId="0" sldId="271"/>
+            <ac:spMk id="8" creationId="{00000000-0000-0000-0000-000000000000}"/>
+          </ac:spMkLst>
+        </pc:spChg>
+        <pc:spChg chg="mod">
+          <ac:chgData name="Benny Istanto" userId="ccea0e650e68d75e" providerId="LiveId" clId="{D8DD1CC7-EDF5-40EB-A44D-3059B72F36E1}" dt="2026-05-12T16:16:54.960" v="366" actId="1036"/>
+          <ac:spMkLst>
+            <pc:docMk/>
+            <pc:sldMk cId="0" sldId="271"/>
+            <ac:spMk id="9" creationId="{00000000-0000-0000-0000-000000000000}"/>
+          </ac:spMkLst>
+        </pc:spChg>
+      </pc:sldChg>
+      <pc:sldChg chg="modSp mod">
+        <pc:chgData name="Benny Istanto" userId="ccea0e650e68d75e" providerId="LiveId" clId="{D8DD1CC7-EDF5-40EB-A44D-3059B72F36E1}" dt="2026-05-12T16:17:15.356" v="368" actId="403"/>
+        <pc:sldMkLst>
+          <pc:docMk/>
+          <pc:sldMk cId="0" sldId="272"/>
+        </pc:sldMkLst>
+        <pc:spChg chg="mod">
+          <ac:chgData name="Benny Istanto" userId="ccea0e650e68d75e" providerId="LiveId" clId="{D8DD1CC7-EDF5-40EB-A44D-3059B72F36E1}" dt="2026-05-12T16:17:09.559" v="367" actId="403"/>
+          <ac:spMkLst>
+            <pc:docMk/>
+            <pc:sldMk cId="0" sldId="272"/>
+            <ac:spMk id="7" creationId="{00000000-0000-0000-0000-000000000000}"/>
+          </ac:spMkLst>
+        </pc:spChg>
+        <pc:spChg chg="mod">
+          <ac:chgData name="Benny Istanto" userId="ccea0e650e68d75e" providerId="LiveId" clId="{D8DD1CC7-EDF5-40EB-A44D-3059B72F36E1}" dt="2026-05-12T16:17:09.559" v="367" actId="403"/>
+          <ac:spMkLst>
+            <pc:docMk/>
+            <pc:sldMk cId="0" sldId="272"/>
+            <ac:spMk id="11" creationId="{00000000-0000-0000-0000-000000000000}"/>
+          </ac:spMkLst>
+        </pc:spChg>
+        <pc:spChg chg="mod">
+          <ac:chgData name="Benny Istanto" userId="ccea0e650e68d75e" providerId="LiveId" clId="{D8DD1CC7-EDF5-40EB-A44D-3059B72F36E1}" dt="2026-05-12T16:17:15.356" v="368" actId="403"/>
+          <ac:spMkLst>
+            <pc:docMk/>
+            <pc:sldMk cId="0" sldId="272"/>
+            <ac:spMk id="17" creationId="{00000000-0000-0000-0000-000000000000}"/>
+          </ac:spMkLst>
+        </pc:spChg>
+      </pc:sldChg>
+      <pc:sldChg chg="modSp mod">
+        <pc:chgData name="Benny Istanto" userId="ccea0e650e68d75e" providerId="LiveId" clId="{D8DD1CC7-EDF5-40EB-A44D-3059B72F36E1}" dt="2026-05-12T16:17:27.748" v="369" actId="403"/>
+        <pc:sldMkLst>
+          <pc:docMk/>
+          <pc:sldMk cId="0" sldId="273"/>
+        </pc:sldMkLst>
+        <pc:spChg chg="mod">
+          <ac:chgData name="Benny Istanto" userId="ccea0e650e68d75e" providerId="LiveId" clId="{D8DD1CC7-EDF5-40EB-A44D-3059B72F36E1}" dt="2026-05-12T16:17:27.748" v="369" actId="403"/>
+          <ac:spMkLst>
+            <pc:docMk/>
+            <pc:sldMk cId="0" sldId="273"/>
+            <ac:spMk id="7" creationId="{00000000-0000-0000-0000-000000000000}"/>
+          </ac:spMkLst>
+        </pc:spChg>
+        <pc:spChg chg="mod">
+          <ac:chgData name="Benny Istanto" userId="ccea0e650e68d75e" providerId="LiveId" clId="{D8DD1CC7-EDF5-40EB-A44D-3059B72F36E1}" dt="2026-05-12T16:17:27.748" v="369" actId="403"/>
+          <ac:spMkLst>
+            <pc:docMk/>
+            <pc:sldMk cId="0" sldId="273"/>
+            <ac:spMk id="11" creationId="{00000000-0000-0000-0000-000000000000}"/>
+          </ac:spMkLst>
+        </pc:spChg>
+      </pc:sldChg>
+      <pc:sldChg chg="modSp mod">
+        <pc:chgData name="Benny Istanto" userId="ccea0e650e68d75e" providerId="LiveId" clId="{D8DD1CC7-EDF5-40EB-A44D-3059B72F36E1}" dt="2026-05-12T16:19:05.816" v="388" actId="403"/>
+        <pc:sldMkLst>
+          <pc:docMk/>
+          <pc:sldMk cId="0" sldId="274"/>
+        </pc:sldMkLst>
+        <pc:spChg chg="mod">
+          <ac:chgData name="Benny Istanto" userId="ccea0e650e68d75e" providerId="LiveId" clId="{D8DD1CC7-EDF5-40EB-A44D-3059B72F36E1}" dt="2026-05-12T16:18:04.568" v="379" actId="1036"/>
+          <ac:spMkLst>
+            <pc:docMk/>
+            <pc:sldMk cId="0" sldId="274"/>
+            <ac:spMk id="8" creationId="{00000000-0000-0000-0000-000000000000}"/>
+          </ac:spMkLst>
+        </pc:spChg>
+        <pc:spChg chg="mod">
+          <ac:chgData name="Benny Istanto" userId="ccea0e650e68d75e" providerId="LiveId" clId="{D8DD1CC7-EDF5-40EB-A44D-3059B72F36E1}" dt="2026-05-12T16:18:04.568" v="379" actId="1036"/>
+          <ac:spMkLst>
+            <pc:docMk/>
+            <pc:sldMk cId="0" sldId="274"/>
+            <ac:spMk id="9" creationId="{00000000-0000-0000-0000-000000000000}"/>
+          </ac:spMkLst>
+        </pc:spChg>
+        <pc:spChg chg="mod">
+          <ac:chgData name="Benny Istanto" userId="ccea0e650e68d75e" providerId="LiveId" clId="{D8DD1CC7-EDF5-40EB-A44D-3059B72F36E1}" dt="2026-05-12T16:19:05.816" v="388" actId="403"/>
+          <ac:spMkLst>
+            <pc:docMk/>
+            <pc:sldMk cId="0" sldId="274"/>
+            <ac:spMk id="10" creationId="{00000000-0000-0000-0000-000000000000}"/>
+          </ac:spMkLst>
+        </pc:spChg>
+        <pc:graphicFrameChg chg="mod modGraphic">
+          <ac:chgData name="Benny Istanto" userId="ccea0e650e68d75e" providerId="LiveId" clId="{D8DD1CC7-EDF5-40EB-A44D-3059B72F36E1}" dt="2026-05-12T16:18:48.957" v="387" actId="122"/>
+          <ac:graphicFrameMkLst>
+            <pc:docMk/>
+            <pc:sldMk cId="0" sldId="274"/>
+            <ac:graphicFrameMk id="7" creationId="{00000000-0000-0000-0000-000000000000}"/>
+          </ac:graphicFrameMkLst>
+        </pc:graphicFrameChg>
+      </pc:sldChg>
+      <pc:sldChg chg="modSp mod">
+        <pc:chgData name="Benny Istanto" userId="ccea0e650e68d75e" providerId="LiveId" clId="{D8DD1CC7-EDF5-40EB-A44D-3059B72F36E1}" dt="2026-05-12T16:20:59.496" v="421" actId="1036"/>
+        <pc:sldMkLst>
+          <pc:docMk/>
+          <pc:sldMk cId="0" sldId="275"/>
+        </pc:sldMkLst>
+        <pc:spChg chg="mod">
+          <ac:chgData name="Benny Istanto" userId="ccea0e650e68d75e" providerId="LiveId" clId="{D8DD1CC7-EDF5-40EB-A44D-3059B72F36E1}" dt="2026-05-12T16:20:59.496" v="421" actId="1036"/>
+          <ac:spMkLst>
+            <pc:docMk/>
+            <pc:sldMk cId="0" sldId="275"/>
+            <ac:spMk id="8" creationId="{00000000-0000-0000-0000-000000000000}"/>
+          </ac:spMkLst>
+        </pc:spChg>
+        <pc:spChg chg="mod">
+          <ac:chgData name="Benny Istanto" userId="ccea0e650e68d75e" providerId="LiveId" clId="{D8DD1CC7-EDF5-40EB-A44D-3059B72F36E1}" dt="2026-05-12T16:20:59.496" v="421" actId="1036"/>
+          <ac:spMkLst>
+            <pc:docMk/>
+            <pc:sldMk cId="0" sldId="275"/>
+            <ac:spMk id="9" creationId="{00000000-0000-0000-0000-000000000000}"/>
+          </ac:spMkLst>
+        </pc:spChg>
+        <pc:spChg chg="mod">
+          <ac:chgData name="Benny Istanto" userId="ccea0e650e68d75e" providerId="LiveId" clId="{D8DD1CC7-EDF5-40EB-A44D-3059B72F36E1}" dt="2026-05-12T16:20:59.496" v="421" actId="1036"/>
+          <ac:spMkLst>
+            <pc:docMk/>
+            <pc:sldMk cId="0" sldId="275"/>
+            <ac:spMk id="10" creationId="{00000000-0000-0000-0000-000000000000}"/>
+          </ac:spMkLst>
+        </pc:spChg>
+        <pc:spChg chg="mod">
+          <ac:chgData name="Benny Istanto" userId="ccea0e650e68d75e" providerId="LiveId" clId="{D8DD1CC7-EDF5-40EB-A44D-3059B72F36E1}" dt="2026-05-12T16:20:59.496" v="421" actId="1036"/>
+          <ac:spMkLst>
+            <pc:docMk/>
+            <pc:sldMk cId="0" sldId="275"/>
+            <ac:spMk id="11" creationId="{00000000-0000-0000-0000-000000000000}"/>
+          </ac:spMkLst>
+        </pc:spChg>
+        <pc:spChg chg="mod">
+          <ac:chgData name="Benny Istanto" userId="ccea0e650e68d75e" providerId="LiveId" clId="{D8DD1CC7-EDF5-40EB-A44D-3059B72F36E1}" dt="2026-05-12T16:20:59.496" v="421" actId="1036"/>
+          <ac:spMkLst>
+            <pc:docMk/>
+            <pc:sldMk cId="0" sldId="275"/>
+            <ac:spMk id="12" creationId="{00000000-0000-0000-0000-000000000000}"/>
+          </ac:spMkLst>
+        </pc:spChg>
+        <pc:spChg chg="mod">
+          <ac:chgData name="Benny Istanto" userId="ccea0e650e68d75e" providerId="LiveId" clId="{D8DD1CC7-EDF5-40EB-A44D-3059B72F36E1}" dt="2026-05-12T16:20:59.496" v="421" actId="1036"/>
+          <ac:spMkLst>
+            <pc:docMk/>
+            <pc:sldMk cId="0" sldId="275"/>
+            <ac:spMk id="13" creationId="{00000000-0000-0000-0000-000000000000}"/>
+          </ac:spMkLst>
+        </pc:spChg>
+        <pc:spChg chg="mod">
+          <ac:chgData name="Benny Istanto" userId="ccea0e650e68d75e" providerId="LiveId" clId="{D8DD1CC7-EDF5-40EB-A44D-3059B72F36E1}" dt="2026-05-12T16:20:26.068" v="409" actId="122"/>
+          <ac:spMkLst>
+            <pc:docMk/>
+            <pc:sldMk cId="0" sldId="275"/>
+            <ac:spMk id="14" creationId="{00000000-0000-0000-0000-000000000000}"/>
+          </ac:spMkLst>
+        </pc:spChg>
+        <pc:spChg chg="mod">
+          <ac:chgData name="Benny Istanto" userId="ccea0e650e68d75e" providerId="LiveId" clId="{D8DD1CC7-EDF5-40EB-A44D-3059B72F36E1}" dt="2026-05-12T16:20:59.496" v="421" actId="1036"/>
+          <ac:spMkLst>
+            <pc:docMk/>
+            <pc:sldMk cId="0" sldId="275"/>
+            <ac:spMk id="15" creationId="{00000000-0000-0000-0000-000000000000}"/>
+          </ac:spMkLst>
+        </pc:spChg>
+        <pc:spChg chg="mod">
+          <ac:chgData name="Benny Istanto" userId="ccea0e650e68d75e" providerId="LiveId" clId="{D8DD1CC7-EDF5-40EB-A44D-3059B72F36E1}" dt="2026-05-12T16:20:59.496" v="421" actId="1036"/>
+          <ac:spMkLst>
+            <pc:docMk/>
+            <pc:sldMk cId="0" sldId="275"/>
+            <ac:spMk id="16" creationId="{00000000-0000-0000-0000-000000000000}"/>
+          </ac:spMkLst>
+        </pc:spChg>
+        <pc:spChg chg="mod">
+          <ac:chgData name="Benny Istanto" userId="ccea0e650e68d75e" providerId="LiveId" clId="{D8DD1CC7-EDF5-40EB-A44D-3059B72F36E1}" dt="2026-05-12T16:20:59.496" v="421" actId="1036"/>
+          <ac:spMkLst>
+            <pc:docMk/>
+            <pc:sldMk cId="0" sldId="275"/>
+            <ac:spMk id="17" creationId="{00000000-0000-0000-0000-000000000000}"/>
+          </ac:spMkLst>
+        </pc:spChg>
+        <pc:spChg chg="mod">
+          <ac:chgData name="Benny Istanto" userId="ccea0e650e68d75e" providerId="LiveId" clId="{D8DD1CC7-EDF5-40EB-A44D-3059B72F36E1}" dt="2026-05-12T16:20:59.496" v="421" actId="1036"/>
+          <ac:spMkLst>
+            <pc:docMk/>
+            <pc:sldMk cId="0" sldId="275"/>
+            <ac:spMk id="18" creationId="{00000000-0000-0000-0000-000000000000}"/>
+          </ac:spMkLst>
+        </pc:spChg>
+      </pc:sldChg>
+      <pc:sldChg chg="modSp mod">
+        <pc:chgData name="Benny Istanto" userId="ccea0e650e68d75e" providerId="LiveId" clId="{D8DD1CC7-EDF5-40EB-A44D-3059B72F36E1}" dt="2026-05-12T16:21:14.825" v="432" actId="403"/>
+        <pc:sldMkLst>
+          <pc:docMk/>
+          <pc:sldMk cId="0" sldId="276"/>
+        </pc:sldMkLst>
+        <pc:spChg chg="mod">
+          <ac:chgData name="Benny Istanto" userId="ccea0e650e68d75e" providerId="LiveId" clId="{D8DD1CC7-EDF5-40EB-A44D-3059B72F36E1}" dt="2026-05-12T16:21:10.810" v="431" actId="1036"/>
+          <ac:spMkLst>
+            <pc:docMk/>
+            <pc:sldMk cId="0" sldId="276"/>
+            <ac:spMk id="8" creationId="{00000000-0000-0000-0000-000000000000}"/>
+          </ac:spMkLst>
+        </pc:spChg>
+        <pc:spChg chg="mod">
+          <ac:chgData name="Benny Istanto" userId="ccea0e650e68d75e" providerId="LiveId" clId="{D8DD1CC7-EDF5-40EB-A44D-3059B72F36E1}" dt="2026-05-12T16:21:10.810" v="431" actId="1036"/>
+          <ac:spMkLst>
+            <pc:docMk/>
+            <pc:sldMk cId="0" sldId="276"/>
+            <ac:spMk id="9" creationId="{00000000-0000-0000-0000-000000000000}"/>
+          </ac:spMkLst>
+        </pc:spChg>
+        <pc:spChg chg="mod">
+          <ac:chgData name="Benny Istanto" userId="ccea0e650e68d75e" providerId="LiveId" clId="{D8DD1CC7-EDF5-40EB-A44D-3059B72F36E1}" dt="2026-05-12T16:21:10.810" v="431" actId="1036"/>
+          <ac:spMkLst>
+            <pc:docMk/>
+            <pc:sldMk cId="0" sldId="276"/>
+            <ac:spMk id="10" creationId="{00000000-0000-0000-0000-000000000000}"/>
+          </ac:spMkLst>
+        </pc:spChg>
+        <pc:spChg chg="mod">
+          <ac:chgData name="Benny Istanto" userId="ccea0e650e68d75e" providerId="LiveId" clId="{D8DD1CC7-EDF5-40EB-A44D-3059B72F36E1}" dt="2026-05-12T16:21:10.810" v="431" actId="1036"/>
+          <ac:spMkLst>
+            <pc:docMk/>
+            <pc:sldMk cId="0" sldId="276"/>
+            <ac:spMk id="11" creationId="{00000000-0000-0000-0000-000000000000}"/>
+          </ac:spMkLst>
+        </pc:spChg>
+        <pc:graphicFrameChg chg="mod modGraphic">
+          <ac:chgData name="Benny Istanto" userId="ccea0e650e68d75e" providerId="LiveId" clId="{D8DD1CC7-EDF5-40EB-A44D-3059B72F36E1}" dt="2026-05-12T16:21:14.825" v="432" actId="403"/>
+          <ac:graphicFrameMkLst>
+            <pc:docMk/>
+            <pc:sldMk cId="0" sldId="276"/>
+            <ac:graphicFrameMk id="7" creationId="{00000000-0000-0000-0000-000000000000}"/>
+          </ac:graphicFrameMkLst>
+        </pc:graphicFrameChg>
+      </pc:sldChg>
+      <pc:sldChg chg="modSp mod">
+        <pc:chgData name="Benny Istanto" userId="ccea0e650e68d75e" providerId="LiveId" clId="{D8DD1CC7-EDF5-40EB-A44D-3059B72F36E1}" dt="2026-05-12T16:21:26.518" v="442" actId="1036"/>
+        <pc:sldMkLst>
+          <pc:docMk/>
+          <pc:sldMk cId="0" sldId="277"/>
+        </pc:sldMkLst>
+        <pc:spChg chg="mod">
+          <ac:chgData name="Benny Istanto" userId="ccea0e650e68d75e" providerId="LiveId" clId="{D8DD1CC7-EDF5-40EB-A44D-3059B72F36E1}" dt="2026-05-12T16:21:26.518" v="442" actId="1036"/>
+          <ac:spMkLst>
+            <pc:docMk/>
+            <pc:sldMk cId="0" sldId="277"/>
+            <ac:spMk id="7" creationId="{00000000-0000-0000-0000-000000000000}"/>
+          </ac:spMkLst>
+        </pc:spChg>
+        <pc:spChg chg="mod">
+          <ac:chgData name="Benny Istanto" userId="ccea0e650e68d75e" providerId="LiveId" clId="{D8DD1CC7-EDF5-40EB-A44D-3059B72F36E1}" dt="2026-05-12T16:21:26.518" v="442" actId="1036"/>
+          <ac:spMkLst>
+            <pc:docMk/>
+            <pc:sldMk cId="0" sldId="277"/>
+            <ac:spMk id="8" creationId="{00000000-0000-0000-0000-000000000000}"/>
+          </ac:spMkLst>
+        </pc:spChg>
+        <pc:spChg chg="mod">
+          <ac:chgData name="Benny Istanto" userId="ccea0e650e68d75e" providerId="LiveId" clId="{D8DD1CC7-EDF5-40EB-A44D-3059B72F36E1}" dt="2026-05-12T16:21:26.518" v="442" actId="1036"/>
+          <ac:spMkLst>
+            <pc:docMk/>
+            <pc:sldMk cId="0" sldId="277"/>
+            <ac:spMk id="9" creationId="{00000000-0000-0000-0000-000000000000}"/>
+          </ac:spMkLst>
+        </pc:spChg>
+      </pc:sldChg>
+      <pc:sldChg chg="modSp mod">
+        <pc:chgData name="Benny Istanto" userId="ccea0e650e68d75e" providerId="LiveId" clId="{D8DD1CC7-EDF5-40EB-A44D-3059B72F36E1}" dt="2026-05-12T16:21:41.044" v="454" actId="403"/>
+        <pc:sldMkLst>
+          <pc:docMk/>
+          <pc:sldMk cId="0" sldId="278"/>
+        </pc:sldMkLst>
+        <pc:graphicFrameChg chg="mod modGraphic">
+          <ac:chgData name="Benny Istanto" userId="ccea0e650e68d75e" providerId="LiveId" clId="{D8DD1CC7-EDF5-40EB-A44D-3059B72F36E1}" dt="2026-05-12T16:21:41.044" v="454" actId="403"/>
+          <ac:graphicFrameMkLst>
+            <pc:docMk/>
+            <pc:sldMk cId="0" sldId="278"/>
+            <ac:graphicFrameMk id="7" creationId="{00000000-0000-0000-0000-000000000000}"/>
+          </ac:graphicFrameMkLst>
+        </pc:graphicFrameChg>
+      </pc:sldChg>
+      <pc:sldChg chg="modSp mod">
+        <pc:chgData name="Benny Istanto" userId="ccea0e650e68d75e" providerId="LiveId" clId="{D8DD1CC7-EDF5-40EB-A44D-3059B72F36E1}" dt="2026-05-12T16:22:21.589" v="468" actId="1036"/>
+        <pc:sldMkLst>
+          <pc:docMk/>
+          <pc:sldMk cId="0" sldId="279"/>
+        </pc:sldMkLst>
+        <pc:spChg chg="mod">
+          <ac:chgData name="Benny Istanto" userId="ccea0e650e68d75e" providerId="LiveId" clId="{D8DD1CC7-EDF5-40EB-A44D-3059B72F36E1}" dt="2026-05-12T16:22:21.589" v="468" actId="1036"/>
+          <ac:spMkLst>
+            <pc:docMk/>
+            <pc:sldMk cId="0" sldId="279"/>
+            <ac:spMk id="7" creationId="{00000000-0000-0000-0000-000000000000}"/>
+          </ac:spMkLst>
+        </pc:spChg>
+        <pc:spChg chg="mod">
+          <ac:chgData name="Benny Istanto" userId="ccea0e650e68d75e" providerId="LiveId" clId="{D8DD1CC7-EDF5-40EB-A44D-3059B72F36E1}" dt="2026-05-12T16:22:21.589" v="468" actId="1036"/>
+          <ac:spMkLst>
+            <pc:docMk/>
+            <pc:sldMk cId="0" sldId="279"/>
+            <ac:spMk id="8" creationId="{00000000-0000-0000-0000-000000000000}"/>
+          </ac:spMkLst>
+        </pc:spChg>
+        <pc:spChg chg="mod">
+          <ac:chgData name="Benny Istanto" userId="ccea0e650e68d75e" providerId="LiveId" clId="{D8DD1CC7-EDF5-40EB-A44D-3059B72F36E1}" dt="2026-05-12T16:22:11.542" v="458" actId="403"/>
+          <ac:spMkLst>
+            <pc:docMk/>
+            <pc:sldMk cId="0" sldId="279"/>
+            <ac:spMk id="9" creationId="{00000000-0000-0000-0000-000000000000}"/>
+          </ac:spMkLst>
+        </pc:spChg>
+        <pc:spChg chg="mod">
+          <ac:chgData name="Benny Istanto" userId="ccea0e650e68d75e" providerId="LiveId" clId="{D8DD1CC7-EDF5-40EB-A44D-3059B72F36E1}" dt="2026-05-12T16:22:21.589" v="468" actId="1036"/>
+          <ac:spMkLst>
+            <pc:docMk/>
+            <pc:sldMk cId="0" sldId="279"/>
+            <ac:spMk id="10" creationId="{00000000-0000-0000-0000-000000000000}"/>
+          </ac:spMkLst>
+        </pc:spChg>
+        <pc:spChg chg="mod">
+          <ac:chgData name="Benny Istanto" userId="ccea0e650e68d75e" providerId="LiveId" clId="{D8DD1CC7-EDF5-40EB-A44D-3059B72F36E1}" dt="2026-05-12T16:21:55.568" v="456" actId="403"/>
+          <ac:spMkLst>
+            <pc:docMk/>
+            <pc:sldMk cId="0" sldId="279"/>
+            <ac:spMk id="12" creationId="{00000000-0000-0000-0000-000000000000}"/>
+          </ac:spMkLst>
+        </pc:spChg>
+        <pc:spChg chg="mod">
+          <ac:chgData name="Benny Istanto" userId="ccea0e650e68d75e" providerId="LiveId" clId="{D8DD1CC7-EDF5-40EB-A44D-3059B72F36E1}" dt="2026-05-12T16:22:21.589" v="468" actId="1036"/>
+          <ac:spMkLst>
+            <pc:docMk/>
+            <pc:sldMk cId="0" sldId="279"/>
+            <ac:spMk id="13" creationId="{00000000-0000-0000-0000-000000000000}"/>
+          </ac:spMkLst>
+        </pc:spChg>
+        <pc:spChg chg="mod">
+          <ac:chgData name="Benny Istanto" userId="ccea0e650e68d75e" providerId="LiveId" clId="{D8DD1CC7-EDF5-40EB-A44D-3059B72F36E1}" dt="2026-05-12T16:21:55.568" v="456" actId="403"/>
+          <ac:spMkLst>
+            <pc:docMk/>
+            <pc:sldMk cId="0" sldId="279"/>
+            <ac:spMk id="16" creationId="{00000000-0000-0000-0000-000000000000}"/>
+          </ac:spMkLst>
+        </pc:spChg>
+        <pc:spChg chg="mod">
+          <ac:chgData name="Benny Istanto" userId="ccea0e650e68d75e" providerId="LiveId" clId="{D8DD1CC7-EDF5-40EB-A44D-3059B72F36E1}" dt="2026-05-12T16:22:21.589" v="468" actId="1036"/>
+          <ac:spMkLst>
+            <pc:docMk/>
+            <pc:sldMk cId="0" sldId="279"/>
+            <ac:spMk id="17" creationId="{00000000-0000-0000-0000-000000000000}"/>
+          </ac:spMkLst>
+        </pc:spChg>
+        <pc:spChg chg="mod">
+          <ac:chgData name="Benny Istanto" userId="ccea0e650e68d75e" providerId="LiveId" clId="{D8DD1CC7-EDF5-40EB-A44D-3059B72F36E1}" dt="2026-05-12T16:22:21.589" v="468" actId="1036"/>
+          <ac:spMkLst>
+            <pc:docMk/>
+            <pc:sldMk cId="0" sldId="279"/>
+            <ac:spMk id="18" creationId="{00000000-0000-0000-0000-000000000000}"/>
+          </ac:spMkLst>
+        </pc:spChg>
+        <pc:spChg chg="mod">
+          <ac:chgData name="Benny Istanto" userId="ccea0e650e68d75e" providerId="LiveId" clId="{D8DD1CC7-EDF5-40EB-A44D-3059B72F36E1}" dt="2026-05-12T16:22:21.589" v="468" actId="1036"/>
+          <ac:spMkLst>
+            <pc:docMk/>
+            <pc:sldMk cId="0" sldId="279"/>
+            <ac:spMk id="19" creationId="{00000000-0000-0000-0000-000000000000}"/>
+          </ac:spMkLst>
+        </pc:spChg>
+        <pc:spChg chg="mod">
+          <ac:chgData name="Benny Istanto" userId="ccea0e650e68d75e" providerId="LiveId" clId="{D8DD1CC7-EDF5-40EB-A44D-3059B72F36E1}" dt="2026-05-12T16:22:21.589" v="468" actId="1036"/>
+          <ac:spMkLst>
+            <pc:docMk/>
+            <pc:sldMk cId="0" sldId="279"/>
+            <ac:spMk id="20" creationId="{00000000-0000-0000-0000-000000000000}"/>
+          </ac:spMkLst>
+        </pc:spChg>
+        <pc:spChg chg="mod">
+          <ac:chgData name="Benny Istanto" userId="ccea0e650e68d75e" providerId="LiveId" clId="{D8DD1CC7-EDF5-40EB-A44D-3059B72F36E1}" dt="2026-05-12T16:22:21.589" v="468" actId="1036"/>
+          <ac:spMkLst>
+            <pc:docMk/>
+            <pc:sldMk cId="0" sldId="279"/>
+            <ac:spMk id="21" creationId="{00000000-0000-0000-0000-000000000000}"/>
+          </ac:spMkLst>
+        </pc:spChg>
+        <pc:spChg chg="mod">
+          <ac:chgData name="Benny Istanto" userId="ccea0e650e68d75e" providerId="LiveId" clId="{D8DD1CC7-EDF5-40EB-A44D-3059B72F36E1}" dt="2026-05-12T16:22:21.589" v="468" actId="1036"/>
+          <ac:spMkLst>
+            <pc:docMk/>
+            <pc:sldMk cId="0" sldId="279"/>
+            <ac:spMk id="23" creationId="{00000000-0000-0000-0000-000000000000}"/>
+          </ac:spMkLst>
+        </pc:spChg>
+        <pc:spChg chg="mod">
+          <ac:chgData name="Benny Istanto" userId="ccea0e650e68d75e" providerId="LiveId" clId="{D8DD1CC7-EDF5-40EB-A44D-3059B72F36E1}" dt="2026-05-12T16:21:55.568" v="456" actId="403"/>
+          <ac:spMkLst>
+            <pc:docMk/>
+            <pc:sldMk cId="0" sldId="279"/>
+            <ac:spMk id="24" creationId="{00000000-0000-0000-0000-000000000000}"/>
+          </ac:spMkLst>
+        </pc:spChg>
+        <pc:spChg chg="mod">
+          <ac:chgData name="Benny Istanto" userId="ccea0e650e68d75e" providerId="LiveId" clId="{D8DD1CC7-EDF5-40EB-A44D-3059B72F36E1}" dt="2026-05-12T16:22:11.542" v="458" actId="403"/>
+          <ac:spMkLst>
+            <pc:docMk/>
+            <pc:sldMk cId="0" sldId="279"/>
+            <ac:spMk id="25" creationId="{00000000-0000-0000-0000-000000000000}"/>
+          </ac:spMkLst>
+        </pc:spChg>
+        <pc:spChg chg="mod">
+          <ac:chgData name="Benny Istanto" userId="ccea0e650e68d75e" providerId="LiveId" clId="{D8DD1CC7-EDF5-40EB-A44D-3059B72F36E1}" dt="2026-05-12T16:21:55.568" v="456" actId="403"/>
+          <ac:spMkLst>
+            <pc:docMk/>
+            <pc:sldMk cId="0" sldId="279"/>
+            <ac:spMk id="28" creationId="{00000000-0000-0000-0000-000000000000}"/>
+          </ac:spMkLst>
+        </pc:spChg>
+        <pc:spChg chg="mod">
+          <ac:chgData name="Benny Istanto" userId="ccea0e650e68d75e" providerId="LiveId" clId="{D8DD1CC7-EDF5-40EB-A44D-3059B72F36E1}" dt="2026-05-12T16:22:11.542" v="458" actId="403"/>
+          <ac:spMkLst>
+            <pc:docMk/>
+            <pc:sldMk cId="0" sldId="279"/>
+            <ac:spMk id="29" creationId="{00000000-0000-0000-0000-000000000000}"/>
+          </ac:spMkLst>
+        </pc:spChg>
+      </pc:sldChg>
+      <pc:sldChg chg="modSp mod">
+        <pc:chgData name="Benny Istanto" userId="ccea0e650e68d75e" providerId="LiveId" clId="{D8DD1CC7-EDF5-40EB-A44D-3059B72F36E1}" dt="2026-05-12T16:23:29.399" v="533" actId="403"/>
+        <pc:sldMkLst>
+          <pc:docMk/>
+          <pc:sldMk cId="0" sldId="280"/>
+        </pc:sldMkLst>
+        <pc:spChg chg="mod">
+          <ac:chgData name="Benny Istanto" userId="ccea0e650e68d75e" providerId="LiveId" clId="{D8DD1CC7-EDF5-40EB-A44D-3059B72F36E1}" dt="2026-05-12T16:23:24.979" v="532" actId="403"/>
+          <ac:spMkLst>
+            <pc:docMk/>
+            <pc:sldMk cId="0" sldId="280"/>
+            <ac:spMk id="6" creationId="{00000000-0000-0000-0000-000000000000}"/>
+          </ac:spMkLst>
+        </pc:spChg>
+        <pc:spChg chg="mod">
+          <ac:chgData name="Benny Istanto" userId="ccea0e650e68d75e" providerId="LiveId" clId="{D8DD1CC7-EDF5-40EB-A44D-3059B72F36E1}" dt="2026-05-12T16:22:35.518" v="469" actId="207"/>
+          <ac:spMkLst>
+            <pc:docMk/>
+            <pc:sldMk cId="0" sldId="280"/>
+            <ac:spMk id="8" creationId="{00000000-0000-0000-0000-000000000000}"/>
+          </ac:spMkLst>
+        </pc:spChg>
+        <pc:spChg chg="mod">
+          <ac:chgData name="Benny Istanto" userId="ccea0e650e68d75e" providerId="LiveId" clId="{D8DD1CC7-EDF5-40EB-A44D-3059B72F36E1}" dt="2026-05-12T16:22:57.181" v="492" actId="1035"/>
+          <ac:spMkLst>
+            <pc:docMk/>
+            <pc:sldMk cId="0" sldId="280"/>
+            <ac:spMk id="10" creationId="{00000000-0000-0000-0000-000000000000}"/>
+          </ac:spMkLst>
+        </pc:spChg>
+        <pc:spChg chg="mod">
+          <ac:chgData name="Benny Istanto" userId="ccea0e650e68d75e" providerId="LiveId" clId="{D8DD1CC7-EDF5-40EB-A44D-3059B72F36E1}" dt="2026-05-12T16:23:15.718" v="531" actId="1035"/>
+          <ac:spMkLst>
+            <pc:docMk/>
+            <pc:sldMk cId="0" sldId="280"/>
+            <ac:spMk id="11" creationId="{00000000-0000-0000-0000-000000000000}"/>
+          </ac:spMkLst>
+        </pc:spChg>
+        <pc:spChg chg="mod">
+          <ac:chgData name="Benny Istanto" userId="ccea0e650e68d75e" providerId="LiveId" clId="{D8DD1CC7-EDF5-40EB-A44D-3059B72F36E1}" dt="2026-05-12T16:22:35.518" v="469" actId="207"/>
+          <ac:spMkLst>
+            <pc:docMk/>
+            <pc:sldMk cId="0" sldId="280"/>
+            <ac:spMk id="13" creationId="{00000000-0000-0000-0000-000000000000}"/>
+          </ac:spMkLst>
+        </pc:spChg>
+        <pc:spChg chg="mod">
+          <ac:chgData name="Benny Istanto" userId="ccea0e650e68d75e" providerId="LiveId" clId="{D8DD1CC7-EDF5-40EB-A44D-3059B72F36E1}" dt="2026-05-12T16:22:57.181" v="492" actId="1035"/>
+          <ac:spMkLst>
+            <pc:docMk/>
+            <pc:sldMk cId="0" sldId="280"/>
+            <ac:spMk id="15" creationId="{00000000-0000-0000-0000-000000000000}"/>
+          </ac:spMkLst>
+        </pc:spChg>
+        <pc:spChg chg="mod">
+          <ac:chgData name="Benny Istanto" userId="ccea0e650e68d75e" providerId="LiveId" clId="{D8DD1CC7-EDF5-40EB-A44D-3059B72F36E1}" dt="2026-05-12T16:23:15.718" v="531" actId="1035"/>
+          <ac:spMkLst>
+            <pc:docMk/>
+            <pc:sldMk cId="0" sldId="280"/>
+            <ac:spMk id="16" creationId="{00000000-0000-0000-0000-000000000000}"/>
+          </ac:spMkLst>
+        </pc:spChg>
+        <pc:spChg chg="mod">
+          <ac:chgData name="Benny Istanto" userId="ccea0e650e68d75e" providerId="LiveId" clId="{D8DD1CC7-EDF5-40EB-A44D-3059B72F36E1}" dt="2026-05-12T16:22:35.518" v="469" actId="207"/>
+          <ac:spMkLst>
+            <pc:docMk/>
+            <pc:sldMk cId="0" sldId="280"/>
+            <ac:spMk id="18" creationId="{00000000-0000-0000-0000-000000000000}"/>
+          </ac:spMkLst>
+        </pc:spChg>
+        <pc:spChg chg="mod">
+          <ac:chgData name="Benny Istanto" userId="ccea0e650e68d75e" providerId="LiveId" clId="{D8DD1CC7-EDF5-40EB-A44D-3059B72F36E1}" dt="2026-05-12T16:22:57.181" v="492" actId="1035"/>
+          <ac:spMkLst>
+            <pc:docMk/>
+            <pc:sldMk cId="0" sldId="280"/>
+            <ac:spMk id="20" creationId="{00000000-0000-0000-0000-000000000000}"/>
+          </ac:spMkLst>
+        </pc:spChg>
+        <pc:spChg chg="mod">
+          <ac:chgData name="Benny Istanto" userId="ccea0e650e68d75e" providerId="LiveId" clId="{D8DD1CC7-EDF5-40EB-A44D-3059B72F36E1}" dt="2026-05-12T16:23:15.718" v="531" actId="1035"/>
+          <ac:spMkLst>
+            <pc:docMk/>
+            <pc:sldMk cId="0" sldId="280"/>
+            <ac:spMk id="21" creationId="{00000000-0000-0000-0000-000000000000}"/>
+          </ac:spMkLst>
+        </pc:spChg>
+        <pc:spChg chg="mod">
+          <ac:chgData name="Benny Istanto" userId="ccea0e650e68d75e" providerId="LiveId" clId="{D8DD1CC7-EDF5-40EB-A44D-3059B72F36E1}" dt="2026-05-12T16:22:35.518" v="469" actId="207"/>
+          <ac:spMkLst>
+            <pc:docMk/>
+            <pc:sldMk cId="0" sldId="280"/>
+            <ac:spMk id="23" creationId="{00000000-0000-0000-0000-000000000000}"/>
+          </ac:spMkLst>
+        </pc:spChg>
+        <pc:spChg chg="mod">
+          <ac:chgData name="Benny Istanto" userId="ccea0e650e68d75e" providerId="LiveId" clId="{D8DD1CC7-EDF5-40EB-A44D-3059B72F36E1}" dt="2026-05-12T16:22:57.181" v="492" actId="1035"/>
+          <ac:spMkLst>
+            <pc:docMk/>
+            <pc:sldMk cId="0" sldId="280"/>
+            <ac:spMk id="25" creationId="{00000000-0000-0000-0000-000000000000}"/>
+          </ac:spMkLst>
+        </pc:spChg>
+        <pc:spChg chg="mod">
+          <ac:chgData name="Benny Istanto" userId="ccea0e650e68d75e" providerId="LiveId" clId="{D8DD1CC7-EDF5-40EB-A44D-3059B72F36E1}" dt="2026-05-12T16:23:15.718" v="531" actId="1035"/>
+          <ac:spMkLst>
+            <pc:docMk/>
+            <pc:sldMk cId="0" sldId="280"/>
+            <ac:spMk id="26" creationId="{00000000-0000-0000-0000-000000000000}"/>
+          </ac:spMkLst>
+        </pc:spChg>
+        <pc:spChg chg="mod">
+          <ac:chgData name="Benny Istanto" userId="ccea0e650e68d75e" providerId="LiveId" clId="{D8DD1CC7-EDF5-40EB-A44D-3059B72F36E1}" dt="2026-05-12T16:23:29.399" v="533" actId="403"/>
+          <ac:spMkLst>
+            <pc:docMk/>
+            <pc:sldMk cId="0" sldId="280"/>
+            <ac:spMk id="27" creationId="{00000000-0000-0000-0000-000000000000}"/>
+          </ac:spMkLst>
+        </pc:spChg>
+      </pc:sldChg>
+      <pc:sldChg chg="modSp mod">
+        <pc:chgData name="Benny Istanto" userId="ccea0e650e68d75e" providerId="LiveId" clId="{D8DD1CC7-EDF5-40EB-A44D-3059B72F36E1}" dt="2026-05-12T16:24:34.627" v="584" actId="403"/>
+        <pc:sldMkLst>
+          <pc:docMk/>
+          <pc:sldMk cId="0" sldId="281"/>
+        </pc:sldMkLst>
+        <pc:spChg chg="mod">
+          <ac:chgData name="Benny Istanto" userId="ccea0e650e68d75e" providerId="LiveId" clId="{D8DD1CC7-EDF5-40EB-A44D-3059B72F36E1}" dt="2026-05-12T16:24:22.225" v="581" actId="1035"/>
+          <ac:spMkLst>
+            <pc:docMk/>
+            <pc:sldMk cId="0" sldId="281"/>
+            <ac:spMk id="4" creationId="{00000000-0000-0000-0000-000000000000}"/>
+          </ac:spMkLst>
+        </pc:spChg>
+        <pc:spChg chg="mod">
+          <ac:chgData name="Benny Istanto" userId="ccea0e650e68d75e" providerId="LiveId" clId="{D8DD1CC7-EDF5-40EB-A44D-3059B72F36E1}" dt="2026-05-12T16:24:22.225" v="581" actId="1035"/>
+          <ac:spMkLst>
+            <pc:docMk/>
+            <pc:sldMk cId="0" sldId="281"/>
+            <ac:spMk id="5" creationId="{00000000-0000-0000-0000-000000000000}"/>
+          </ac:spMkLst>
+        </pc:spChg>
+        <pc:spChg chg="mod">
+          <ac:chgData name="Benny Istanto" userId="ccea0e650e68d75e" providerId="LiveId" clId="{D8DD1CC7-EDF5-40EB-A44D-3059B72F36E1}" dt="2026-05-12T16:24:34.627" v="584" actId="403"/>
+          <ac:spMkLst>
+            <pc:docMk/>
+            <pc:sldMk cId="0" sldId="281"/>
+            <ac:spMk id="7" creationId="{00000000-0000-0000-0000-000000000000}"/>
+          </ac:spMkLst>
+        </pc:spChg>
+        <pc:spChg chg="mod">
+          <ac:chgData name="Benny Istanto" userId="ccea0e650e68d75e" providerId="LiveId" clId="{D8DD1CC7-EDF5-40EB-A44D-3059B72F36E1}" dt="2026-05-12T16:24:22.225" v="581" actId="1035"/>
+          <ac:spMkLst>
+            <pc:docMk/>
+            <pc:sldMk cId="0" sldId="281"/>
+            <ac:spMk id="8" creationId="{00000000-0000-0000-0000-000000000000}"/>
+          </ac:spMkLst>
+        </pc:spChg>
+        <pc:spChg chg="mod">
+          <ac:chgData name="Benny Istanto" userId="ccea0e650e68d75e" providerId="LiveId" clId="{D8DD1CC7-EDF5-40EB-A44D-3059B72F36E1}" dt="2026-05-12T16:24:22.225" v="581" actId="1035"/>
+          <ac:spMkLst>
+            <pc:docMk/>
+            <pc:sldMk cId="0" sldId="281"/>
+            <ac:spMk id="9" creationId="{00000000-0000-0000-0000-000000000000}"/>
+          </ac:spMkLst>
+        </pc:spChg>
+        <pc:spChg chg="mod">
+          <ac:chgData name="Benny Istanto" userId="ccea0e650e68d75e" providerId="LiveId" clId="{D8DD1CC7-EDF5-40EB-A44D-3059B72F36E1}" dt="2026-05-12T16:24:22.225" v="581" actId="1035"/>
+          <ac:spMkLst>
+            <pc:docMk/>
+            <pc:sldMk cId="0" sldId="281"/>
+            <ac:spMk id="10" creationId="{00000000-0000-0000-0000-000000000000}"/>
+          </ac:spMkLst>
+        </pc:spChg>
+        <pc:spChg chg="mod">
+          <ac:chgData name="Benny Istanto" userId="ccea0e650e68d75e" providerId="LiveId" clId="{D8DD1CC7-EDF5-40EB-A44D-3059B72F36E1}" dt="2026-05-12T16:24:22.225" v="581" actId="1035"/>
+          <ac:spMkLst>
+            <pc:docMk/>
+            <pc:sldMk cId="0" sldId="281"/>
+            <ac:spMk id="11" creationId="{00000000-0000-0000-0000-000000000000}"/>
+          </ac:spMkLst>
+        </pc:spChg>
+        <pc:spChg chg="mod">
+          <ac:chgData name="Benny Istanto" userId="ccea0e650e68d75e" providerId="LiveId" clId="{D8DD1CC7-EDF5-40EB-A44D-3059B72F36E1}" dt="2026-05-12T16:24:22.225" v="581" actId="1035"/>
+          <ac:spMkLst>
+            <pc:docMk/>
+            <pc:sldMk cId="0" sldId="281"/>
+            <ac:spMk id="12" creationId="{00000000-0000-0000-0000-000000000000}"/>
+          </ac:spMkLst>
+        </pc:spChg>
+        <pc:spChg chg="mod">
+          <ac:chgData name="Benny Istanto" userId="ccea0e650e68d75e" providerId="LiveId" clId="{D8DD1CC7-EDF5-40EB-A44D-3059B72F36E1}" dt="2026-05-12T16:23:55.528" v="563" actId="20577"/>
+          <ac:spMkLst>
+            <pc:docMk/>
+            <pc:sldMk cId="0" sldId="281"/>
+            <ac:spMk id="13" creationId="{00000000-0000-0000-0000-000000000000}"/>
+          </ac:spMkLst>
+        </pc:spChg>
+        <pc:graphicFrameChg chg="mod modGraphic">
+          <ac:chgData name="Benny Istanto" userId="ccea0e650e68d75e" providerId="LiveId" clId="{D8DD1CC7-EDF5-40EB-A44D-3059B72F36E1}" dt="2026-05-12T16:24:29.080" v="583" actId="403"/>
+          <ac:graphicFrameMkLst>
+            <pc:docMk/>
+            <pc:sldMk cId="0" sldId="281"/>
+            <ac:graphicFrameMk id="6" creationId="{00000000-0000-0000-0000-000000000000}"/>
+          </ac:graphicFrameMkLst>
+        </pc:graphicFrameChg>
       </pc:sldChg>
     </pc:docChg>
   </pc:docChgLst>
@@ -3338,7 +4636,7 @@
         <p:spPr>
           <a:xfrm>
             <a:off x="502920" y="1188720"/>
-            <a:ext cx="10972800" cy="822960"/>
+            <a:ext cx="10972800" cy="677108"/>
           </a:xfrm>
           <a:prstGeom prst="rect">
             <a:avLst/>
@@ -3353,7 +4651,7 @@
           <a:p>
             <a:pPr algn="l"/>
             <a:r>
-              <a:rPr sz="3800" b="1">
+              <a:rPr sz="4400" b="1" dirty="0">
                 <a:solidFill>
                   <a:srgbClr val="383A42"/>
                 </a:solidFill>
@@ -3373,7 +4671,7 @@
         <p:spPr>
           <a:xfrm>
             <a:off x="502920" y="2103120"/>
-            <a:ext cx="10972800" cy="502920"/>
+            <a:ext cx="10972800" cy="430887"/>
           </a:xfrm>
           <a:prstGeom prst="rect">
             <a:avLst/>
@@ -3388,14 +4686,29 @@
           <a:p>
             <a:pPr algn="l"/>
             <a:r>
-              <a:rPr sz="2000" b="0">
+              <a:rPr sz="2800" b="0" dirty="0">
                 <a:solidFill>
                   <a:srgbClr val="0184BC"/>
                 </a:solidFill>
                 <a:latin typeface="Calibri"/>
               </a:rPr>
-              <a:t>The Journey of Cataloguing 26,246 Risk Datasets from HDX</a:t>
-            </a:r>
+              <a:t>The Journey of Cataloguing 26,246 Datasets from HDX</a:t>
+            </a:r>
+            <a:r>
+              <a:rPr lang="en-US" sz="2800" b="0" dirty="0">
+                <a:solidFill>
+                  <a:srgbClr val="0184BC"/>
+                </a:solidFill>
+                <a:latin typeface="Calibri"/>
+              </a:rPr>
+              <a:t> to RDLS</a:t>
+            </a:r>
+            <a:endParaRPr sz="2800" b="0" dirty="0">
+              <a:solidFill>
+                <a:srgbClr val="0184BC"/>
+              </a:solidFill>
+              <a:latin typeface="Calibri"/>
+            </a:endParaRPr>
           </a:p>
         </p:txBody>
       </p:sp>
@@ -3408,7 +4721,7 @@
         <p:spPr>
           <a:xfrm>
             <a:off x="502920" y="2743200"/>
-            <a:ext cx="10972800" cy="411480"/>
+            <a:ext cx="10972800" cy="276999"/>
           </a:xfrm>
           <a:prstGeom prst="rect">
             <a:avLst/>
@@ -3423,7 +4736,7 @@
           <a:p>
             <a:pPr algn="l"/>
             <a:r>
-              <a:rPr sz="1500" b="0">
+              <a:rPr b="0">
                 <a:solidFill>
                   <a:srgbClr val="696C77"/>
                 </a:solidFill>
@@ -3436,13 +4749,13 @@
       </p:sp>
       <p:sp>
         <p:nvSpPr>
-          <p:cNvPr id="7" name="TextBox 6"/>
+          <p:cNvPr id="8" name="TextBox 7"/>
           <p:cNvSpPr txBox="1"/>
           <p:nvPr/>
         </p:nvSpPr>
         <p:spPr>
           <a:xfrm>
-            <a:off x="502920" y="5812401"/>
+            <a:off x="502920" y="6178161"/>
             <a:ext cx="10972800" cy="184666"/>
           </a:xfrm>
           <a:prstGeom prst="rect">
@@ -3456,99 +4769,38 @@
           </a:bodyPr>
           <a:lstStyle/>
           <a:p>
-            <a:pPr algn="l"/>
+            <a:r>
+              <a:rPr lang="en-US" sz="1200" dirty="0">
+                <a:solidFill>
+                  <a:srgbClr val="696C77"/>
+                </a:solidFill>
+                <a:hlinkClick r:id="rId2"/>
+              </a:rPr>
+              <a:t>https://riskdatalibrary.org/</a:t>
+            </a:r>
+            <a:r>
+              <a:rPr lang="en-US" sz="1200" dirty="0">
+                <a:solidFill>
+                  <a:srgbClr val="696C77"/>
+                </a:solidFill>
+              </a:rPr>
+              <a:t> </a:t>
+            </a:r>
             <a:r>
               <a:rPr sz="1200" b="0" dirty="0">
                 <a:solidFill>
                   <a:srgbClr val="696C77"/>
                 </a:solidFill>
-                <a:latin typeface="Calibri"/>
-              </a:rPr>
-              <a:t>Global Facility for Disaster Reduction and Recovery (GFDRR)  -  </a:t>
-            </a:r>
-            <a:r>
-              <a:rPr lang="en-US" sz="1200" b="0" dirty="0">
+              </a:rPr>
+              <a:t>   |   May 2026</a:t>
+            </a:r>
+            <a:r>
+              <a:rPr lang="en-US" sz="1200" dirty="0">
                 <a:solidFill>
                   <a:srgbClr val="696C77"/>
                 </a:solidFill>
-                <a:latin typeface="Calibri"/>
-              </a:rPr>
-              <a:t>The </a:t>
-            </a:r>
-            <a:r>
-              <a:rPr sz="1200" b="0" dirty="0">
-                <a:solidFill>
-                  <a:srgbClr val="696C77"/>
-                </a:solidFill>
-                <a:latin typeface="Calibri"/>
-              </a:rPr>
-              <a:t>World Bank</a:t>
-            </a:r>
-            <a:r>
-              <a:rPr lang="en-US" sz="1200" b="0" dirty="0">
-                <a:solidFill>
-                  <a:srgbClr val="696C77"/>
-                </a:solidFill>
-                <a:latin typeface="Calibri"/>
-              </a:rPr>
-              <a:t> Group</a:t>
-            </a:r>
-            <a:endParaRPr sz="1200" b="0" dirty="0">
-              <a:solidFill>
-                <a:srgbClr val="696C77"/>
-              </a:solidFill>
-              <a:latin typeface="Calibri"/>
-            </a:endParaRPr>
-          </a:p>
-        </p:txBody>
-      </p:sp>
-      <p:sp>
-        <p:nvSpPr>
-          <p:cNvPr id="8" name="TextBox 7"/>
-          <p:cNvSpPr txBox="1"/>
-          <p:nvPr/>
-        </p:nvSpPr>
-        <p:spPr>
-          <a:xfrm>
-            <a:off x="502920" y="6178161"/>
-            <a:ext cx="10972800" cy="184666"/>
-          </a:xfrm>
-          <a:prstGeom prst="rect">
-            <a:avLst/>
-          </a:prstGeom>
-          <a:noFill/>
-        </p:spPr>
-        <p:txBody>
-          <a:bodyPr wrap="square" lIns="0" tIns="0" rIns="0" bIns="0">
-            <a:spAutoFit/>
-          </a:bodyPr>
-          <a:lstStyle/>
-          <a:p>
-            <a:r>
-              <a:rPr lang="en-US" sz="1200" dirty="0">
-                <a:solidFill>
-                  <a:srgbClr val="696C77"/>
-                </a:solidFill>
-                <a:hlinkClick r:id="rId2"/>
-              </a:rPr>
-              <a:t>https://riskdatalibrary.org/</a:t>
-            </a:r>
-            <a:r>
-              <a:rPr lang="en-US" sz="1200" dirty="0">
-                <a:solidFill>
-                  <a:srgbClr val="696C77"/>
-                </a:solidFill>
-              </a:rPr>
-              <a:t> </a:t>
-            </a:r>
-            <a:r>
-              <a:rPr sz="1200" b="0" dirty="0">
-                <a:solidFill>
-                  <a:srgbClr val="696C77"/>
-                </a:solidFill>
-                <a:latin typeface="Calibri"/>
-              </a:rPr>
-              <a:t>   |   May 2026</a:t>
+              </a:rPr>
+              <a:t>  |  Global Facility for Disaster Reduction and Recovery (GFDRR)  -  The World Bank Group</a:t>
             </a:r>
           </a:p>
         </p:txBody>
@@ -3647,7 +4899,7 @@
         <p:spPr>
           <a:xfrm>
             <a:off x="504250" y="4573325"/>
-            <a:ext cx="10972800" cy="553998"/>
+            <a:ext cx="10972800" cy="646331"/>
           </a:xfrm>
           <a:prstGeom prst="rect">
             <a:avLst/>
@@ -3662,7 +4914,7 @@
           <a:p>
             <a:pPr algn="l"/>
             <a:r>
-              <a:rPr lang="en-US" sz="1200" b="1" dirty="0">
+              <a:rPr lang="en-US" sz="1400" b="1" dirty="0">
                 <a:solidFill>
                   <a:srgbClr val="696C77"/>
                 </a:solidFill>
@@ -3674,7 +4926,7 @@
           <a:p>
             <a:pPr algn="l"/>
             <a:r>
-              <a:rPr lang="en-US" sz="1200" dirty="0">
+              <a:rPr lang="en-US" sz="1400" dirty="0">
                 <a:solidFill>
                   <a:srgbClr val="696C77"/>
                 </a:solidFill>
@@ -3686,7 +4938,7 @@
           <a:p>
             <a:pPr algn="l"/>
             <a:r>
-              <a:rPr lang="en-US" sz="1200" b="0" dirty="0">
+              <a:rPr lang="en-US" sz="1400" b="0" dirty="0">
                 <a:solidFill>
                   <a:srgbClr val="696C77"/>
                 </a:solidFill>
@@ -3696,7 +4948,7 @@
               <a:t>bistanto@worldbank.org</a:t>
             </a:r>
             <a:r>
-              <a:rPr lang="en-US" sz="1200" b="0" dirty="0">
+              <a:rPr lang="en-US" sz="1400" b="0" dirty="0">
                 <a:solidFill>
                   <a:srgbClr val="696C77"/>
                 </a:solidFill>
@@ -3704,7 +4956,7 @@
               </a:rPr>
               <a:t> </a:t>
             </a:r>
-            <a:endParaRPr sz="1200" b="0" dirty="0">
+            <a:endParaRPr sz="1400" b="0" dirty="0">
               <a:solidFill>
                 <a:srgbClr val="696C77"/>
               </a:solidFill>
@@ -3947,7 +5199,7 @@
         <p:spPr>
           <a:xfrm>
             <a:off x="411480" y="1024128"/>
-            <a:ext cx="5577840" cy="347472"/>
+            <a:ext cx="5577840" cy="215444"/>
           </a:xfrm>
           <a:prstGeom prst="rect">
             <a:avLst/>
@@ -3962,7 +5214,7 @@
           <a:p>
             <a:pPr algn="l"/>
             <a:r>
-              <a:rPr sz="1200" b="1">
+              <a:rPr sz="1400" b="1" dirty="0">
                 <a:solidFill>
                   <a:srgbClr val="E45649"/>
                 </a:solidFill>
@@ -4258,7 +5510,7 @@
         <p:spPr>
           <a:xfrm>
             <a:off x="6217920" y="1024128"/>
-            <a:ext cx="5486400" cy="347472"/>
+            <a:ext cx="5486400" cy="215444"/>
           </a:xfrm>
           <a:prstGeom prst="rect">
             <a:avLst/>
@@ -4273,7 +5525,7 @@
           <a:p>
             <a:pPr algn="l"/>
             <a:r>
-              <a:rPr sz="1200" b="1">
+              <a:rPr sz="1400" b="1">
                 <a:solidFill>
                   <a:srgbClr val="50A14F"/>
                 </a:solidFill>
@@ -4733,7 +5985,7 @@
         <p:spPr>
           <a:xfrm>
             <a:off x="589280" y="4053839"/>
-            <a:ext cx="11084560" cy="505968"/>
+            <a:ext cx="11084560" cy="430887"/>
           </a:xfrm>
           <a:prstGeom prst="rect">
             <a:avLst/>
@@ -4747,7 +5999,7 @@
           <a:lstStyle/>
           <a:p>
             <a:r>
-              <a:rPr sz="1200" b="0">
+              <a:rPr sz="1400" b="0" dirty="0">
                 <a:solidFill>
                   <a:srgbClr val="383A42"/>
                 </a:solidFill>
@@ -4766,8 +6018,8 @@
         </p:nvSpPr>
         <p:spPr>
           <a:xfrm>
-            <a:off x="411480" y="4736592"/>
-            <a:ext cx="11338560" cy="475488"/>
+            <a:off x="411480" y="4839955"/>
+            <a:ext cx="11338560" cy="246221"/>
           </a:xfrm>
           <a:prstGeom prst="rect">
             <a:avLst/>
@@ -4782,13 +6034,40 @@
           <a:p>
             <a:pPr algn="l"/>
             <a:r>
-              <a:rPr sz="1400" b="1">
+              <a:rPr sz="1400" b="1" dirty="0">
                 <a:solidFill>
                   <a:srgbClr val="383A42"/>
                 </a:solidFill>
                 <a:latin typeface="Calibri"/>
               </a:rPr>
-              <a:t>"Building_Damaged_Severe"  is unambiguous in a way that "damaged buildings" in a dataset title is not.</a:t>
+              <a:t>"</a:t>
+            </a:r>
+            <a:r>
+              <a:rPr sz="1400" b="1" dirty="0" err="1">
+                <a:solidFill>
+                  <a:srgbClr val="383A42"/>
+                </a:solidFill>
+                <a:latin typeface="Calibri"/>
+              </a:rPr>
+              <a:t>Building_Damaged_</a:t>
+            </a:r>
+            <a:r>
+              <a:rPr sz="1600" b="1" dirty="0" err="1">
+                <a:solidFill>
+                  <a:srgbClr val="383A42"/>
+                </a:solidFill>
+                <a:latin typeface="Calibri"/>
+              </a:rPr>
+              <a:t>Severe</a:t>
+            </a:r>
+            <a:r>
+              <a:rPr sz="1400" b="1" dirty="0">
+                <a:solidFill>
+                  <a:srgbClr val="383A42"/>
+                </a:solidFill>
+                <a:latin typeface="Calibri"/>
+              </a:rPr>
+              <a:t>"  is unambiguous in a way that "damaged buildings" in a dataset title is not.</a:t>
             </a:r>
           </a:p>
         </p:txBody>
@@ -4889,8 +6168,8 @@
         </p:nvSpPr>
         <p:spPr>
           <a:xfrm>
-            <a:off x="589280" y="5398008"/>
-            <a:ext cx="11084560" cy="505968"/>
+            <a:off x="589280" y="5429812"/>
+            <a:ext cx="11084560" cy="215444"/>
           </a:xfrm>
           <a:prstGeom prst="rect">
             <a:avLst/>
@@ -4904,7 +6183,7 @@
           <a:lstStyle/>
           <a:p>
             <a:r>
-              <a:rPr sz="1200" b="1">
+              <a:rPr sz="1400" b="1" dirty="0">
                 <a:solidFill>
                   <a:srgbClr val="383A42"/>
                 </a:solidFill>
@@ -5148,7 +6427,7 @@
         </p:nvSpPr>
         <p:spPr>
           <a:xfrm>
-            <a:off x="411480" y="1024128"/>
+            <a:off x="411480" y="1103638"/>
             <a:ext cx="11338560" cy="4462272"/>
           </a:xfrm>
           <a:prstGeom prst="rect">
@@ -5192,7 +6471,7 @@
         </p:nvSpPr>
         <p:spPr>
           <a:xfrm>
-            <a:off x="411480" y="1024128"/>
+            <a:off x="411480" y="1103638"/>
             <a:ext cx="38100" cy="4462272"/>
           </a:xfrm>
           <a:prstGeom prst="rect">
@@ -5236,7 +6515,7 @@
         </p:nvSpPr>
         <p:spPr>
           <a:xfrm>
-            <a:off x="538480" y="1125728"/>
+            <a:off x="538480" y="1205238"/>
             <a:ext cx="5360442" cy="3077766"/>
           </a:xfrm>
           <a:prstGeom prst="rect">
@@ -5861,7 +7140,7 @@
         </p:nvSpPr>
         <p:spPr>
           <a:xfrm>
-            <a:off x="411480" y="5596128"/>
+            <a:off x="411480" y="5675638"/>
             <a:ext cx="11338560" cy="804672"/>
           </a:xfrm>
           <a:prstGeom prst="rect">
@@ -5905,7 +7184,7 @@
         </p:nvSpPr>
         <p:spPr>
           <a:xfrm>
-            <a:off x="411480" y="5596128"/>
+            <a:off x="411480" y="5675638"/>
             <a:ext cx="50800" cy="804672"/>
           </a:xfrm>
           <a:prstGeom prst="rect">
@@ -5949,8 +7228,8 @@
         </p:nvSpPr>
         <p:spPr>
           <a:xfrm>
-            <a:off x="589280" y="5704132"/>
-            <a:ext cx="11084560" cy="369332"/>
+            <a:off x="589280" y="5783642"/>
+            <a:ext cx="11084560" cy="430887"/>
           </a:xfrm>
           <a:prstGeom prst="rect">
             <a:avLst/>
@@ -5964,7 +7243,7 @@
           <a:lstStyle/>
           <a:p>
             <a:r>
-              <a:rPr sz="1200" b="1" dirty="0">
+              <a:rPr sz="1400" b="1" dirty="0">
                 <a:solidFill>
                   <a:srgbClr val="383A42"/>
                 </a:solidFill>
@@ -6206,7 +7485,13 @@
           <p:cNvGraphicFramePr>
             <a:graphicFrameLocks noGrp="1"/>
           </p:cNvGraphicFramePr>
-          <p:nvPr/>
+          <p:nvPr>
+            <p:extLst>
+              <p:ext uri="{D42A27DB-BD31-4B8C-83A1-F6EECF244321}">
+                <p14:modId xmlns:p14="http://schemas.microsoft.com/office/powerpoint/2010/main" val="825428641"/>
+              </p:ext>
+            </p:extLst>
+          </p:nvPr>
         </p:nvGraphicFramePr>
         <p:xfrm>
           <a:off x="411480" y="1024128"/>
@@ -6249,7 +7534,7 @@
                     <a:p>
                       <a:pPr algn="ctr"/>
                       <a:r>
-                        <a:rPr sz="1150" b="1">
+                        <a:rPr sz="1400" b="1" dirty="0">
                           <a:solidFill>
                             <a:srgbClr val="FFFFFF"/>
                           </a:solidFill>
@@ -6272,7 +7557,7 @@
                     <a:p>
                       <a:pPr algn="ctr"/>
                       <a:r>
-                        <a:rPr sz="1150" b="1">
+                        <a:rPr sz="1400" b="1" dirty="0">
                           <a:solidFill>
                             <a:srgbClr val="FFFFFF"/>
                           </a:solidFill>
@@ -6295,7 +7580,7 @@
                     <a:p>
                       <a:pPr algn="ctr"/>
                       <a:r>
-                        <a:rPr sz="1150" b="1">
+                        <a:rPr sz="1400" b="1" dirty="0">
                           <a:solidFill>
                             <a:srgbClr val="FFFFFF"/>
                           </a:solidFill>
@@ -6827,7 +8112,7 @@
                     <a:p>
                       <a:pPr algn="l"/>
                       <a:r>
-                        <a:rPr sz="1100" b="0">
+                        <a:rPr sz="1100" b="0" dirty="0">
                           <a:solidFill>
                             <a:srgbClr val="383A42"/>
                           </a:solidFill>
@@ -6859,7 +8144,13 @@
           <p:cNvGraphicFramePr>
             <a:graphicFrameLocks noGrp="1"/>
           </p:cNvGraphicFramePr>
-          <p:nvPr/>
+          <p:nvPr>
+            <p:extLst>
+              <p:ext uri="{D42A27DB-BD31-4B8C-83A1-F6EECF244321}">
+                <p14:modId xmlns:p14="http://schemas.microsoft.com/office/powerpoint/2010/main" val="2080130698"/>
+              </p:ext>
+            </p:extLst>
+          </p:nvPr>
         </p:nvGraphicFramePr>
         <p:xfrm>
           <a:off x="8321040" y="1024128"/>
@@ -6895,7 +8186,7 @@
                     <a:p>
                       <a:pPr algn="ctr"/>
                       <a:r>
-                        <a:rPr sz="1050" b="1">
+                        <a:rPr sz="1400" b="1" dirty="0">
                           <a:solidFill>
                             <a:srgbClr val="FFFFFF"/>
                           </a:solidFill>
@@ -6918,7 +8209,7 @@
                     <a:p>
                       <a:pPr algn="ctr"/>
                       <a:r>
-                        <a:rPr sz="1050" b="1">
+                        <a:rPr sz="1400" b="1" dirty="0">
                           <a:solidFill>
                             <a:srgbClr val="FFFFFF"/>
                           </a:solidFill>
@@ -7236,7 +8527,7 @@
                     <a:p>
                       <a:pPr algn="l"/>
                       <a:r>
-                        <a:rPr sz="1000" b="0">
+                        <a:rPr sz="1000" b="0" dirty="0">
                           <a:solidFill>
                             <a:srgbClr val="383A42"/>
                           </a:solidFill>
@@ -7268,7 +8559,13 @@
           <p:cNvGraphicFramePr>
             <a:graphicFrameLocks noGrp="1"/>
           </p:cNvGraphicFramePr>
-          <p:nvPr/>
+          <p:nvPr>
+            <p:extLst>
+              <p:ext uri="{D42A27DB-BD31-4B8C-83A1-F6EECF244321}">
+                <p14:modId xmlns:p14="http://schemas.microsoft.com/office/powerpoint/2010/main" val="3678513140"/>
+              </p:ext>
+            </p:extLst>
+          </p:nvPr>
         </p:nvGraphicFramePr>
         <p:xfrm>
           <a:off x="411480" y="4462272"/>
@@ -7304,7 +8601,7 @@
                     <a:p>
                       <a:pPr algn="ctr"/>
                       <a:r>
-                        <a:rPr sz="1100" b="1">
+                        <a:rPr sz="1400" b="1" dirty="0">
                           <a:solidFill>
                             <a:srgbClr val="FFFFFF"/>
                           </a:solidFill>
@@ -7327,7 +8624,7 @@
                     <a:p>
                       <a:pPr algn="ctr"/>
                       <a:r>
-                        <a:rPr sz="1100" b="1">
+                        <a:rPr sz="1400" b="1" dirty="0">
                           <a:solidFill>
                             <a:srgbClr val="FFFFFF"/>
                           </a:solidFill>
@@ -7539,7 +8836,7 @@
                     <a:p>
                       <a:pPr algn="l"/>
                       <a:r>
-                        <a:rPr sz="1100" b="0">
+                        <a:rPr sz="1100" b="0" dirty="0">
                           <a:solidFill>
                             <a:srgbClr val="383A42"/>
                           </a:solidFill>
@@ -7662,7 +8959,7 @@
         <p:spPr>
           <a:xfrm>
             <a:off x="5252720" y="4538472"/>
-            <a:ext cx="6421120" cy="899160"/>
+            <a:ext cx="6421120" cy="430887"/>
           </a:xfrm>
           <a:prstGeom prst="rect">
             <a:avLst/>
@@ -7676,7 +8973,7 @@
           <a:lstStyle/>
           <a:p>
             <a:r>
-              <a:rPr sz="1200" b="0">
+              <a:rPr sz="1400" b="0" dirty="0">
                 <a:solidFill>
                   <a:srgbClr val="383A42"/>
                 </a:solidFill>
@@ -7921,7 +9218,7 @@
         <p:spPr>
           <a:xfrm>
             <a:off x="411480" y="1024128"/>
-            <a:ext cx="11430000" cy="347472"/>
+            <a:ext cx="11430000" cy="215444"/>
           </a:xfrm>
           <a:prstGeom prst="rect">
             <a:avLst/>
@@ -7936,7 +9233,7 @@
           <a:p>
             <a:pPr algn="l"/>
             <a:r>
-              <a:rPr sz="1300" b="1">
+              <a:rPr sz="1400" b="1" dirty="0">
                 <a:solidFill>
                   <a:srgbClr val="C18401"/>
                 </a:solidFill>
@@ -8238,7 +9535,7 @@
         <p:spPr>
           <a:xfrm>
             <a:off x="411480" y="3858768"/>
-            <a:ext cx="11430000" cy="347472"/>
+            <a:ext cx="11430000" cy="215444"/>
           </a:xfrm>
           <a:prstGeom prst="rect">
             <a:avLst/>
@@ -8253,7 +9550,7 @@
           <a:p>
             <a:pPr algn="l"/>
             <a:r>
-              <a:rPr sz="1300" b="1">
+              <a:rPr sz="1400" b="1" dirty="0">
                 <a:solidFill>
                   <a:srgbClr val="C18401"/>
                 </a:solidFill>
@@ -8270,11 +9567,17 @@
           <p:cNvGraphicFramePr>
             <a:graphicFrameLocks noGrp="1"/>
           </p:cNvGraphicFramePr>
-          <p:nvPr/>
+          <p:nvPr>
+            <p:extLst>
+              <p:ext uri="{D42A27DB-BD31-4B8C-83A1-F6EECF244321}">
+                <p14:modId xmlns:p14="http://schemas.microsoft.com/office/powerpoint/2010/main" val="2847386230"/>
+              </p:ext>
+            </p:extLst>
+          </p:nvPr>
         </p:nvGraphicFramePr>
         <p:xfrm>
           <a:off x="411480" y="4251960"/>
-          <a:ext cx="11338560" cy="1920240"/>
+          <a:ext cx="11338560" cy="1950720"/>
         </p:xfrm>
         <a:graphic>
           <a:graphicData uri="http://schemas.openxmlformats.org/drawingml/2006/table">
@@ -8313,7 +9616,7 @@
                     <a:p>
                       <a:pPr algn="ctr"/>
                       <a:r>
-                        <a:rPr sz="1050" b="1">
+                        <a:rPr sz="1400" b="1" dirty="0">
                           <a:solidFill>
                             <a:srgbClr val="FFFFFF"/>
                           </a:solidFill>
@@ -8336,7 +9639,7 @@
                     <a:p>
                       <a:pPr algn="ctr"/>
                       <a:r>
-                        <a:rPr sz="1050" b="1">
+                        <a:rPr sz="1400" b="1" dirty="0">
                           <a:solidFill>
                             <a:srgbClr val="FFFFFF"/>
                           </a:solidFill>
@@ -8359,7 +9662,7 @@
                     <a:p>
                       <a:pPr algn="ctr"/>
                       <a:r>
-                        <a:rPr sz="1050" b="1">
+                        <a:rPr sz="1400" b="1" dirty="0">
                           <a:solidFill>
                             <a:srgbClr val="FFFFFF"/>
                           </a:solidFill>
@@ -8815,7 +10118,7 @@
                     <a:p>
                       <a:pPr algn="l"/>
                       <a:r>
-                        <a:rPr sz="1000" b="0">
+                        <a:rPr sz="1000" b="0" dirty="0">
                           <a:solidFill>
                             <a:srgbClr val="383A42"/>
                           </a:solidFill>
@@ -8927,7 +10230,7 @@
         <p:spPr>
           <a:xfrm>
             <a:off x="502920" y="2331720"/>
-            <a:ext cx="10972800" cy="502920"/>
+            <a:ext cx="10972800" cy="246221"/>
           </a:xfrm>
           <a:prstGeom prst="rect">
             <a:avLst/>
@@ -8942,13 +10245,31 @@
           <a:p>
             <a:pPr algn="l"/>
             <a:r>
-              <a:rPr sz="1600" b="0">
+              <a:rPr sz="1600" b="0" dirty="0">
                 <a:solidFill>
                   <a:srgbClr val="50A14F"/>
                 </a:solidFill>
                 <a:latin typeface="Calibri"/>
               </a:rPr>
-              <a:t>Act 3</a:t>
+              <a:t>Act</a:t>
+            </a:r>
+            <a:r>
+              <a:rPr lang="en-US" sz="1600" b="0" dirty="0">
+                <a:solidFill>
+                  <a:srgbClr val="50A14F"/>
+                </a:solidFill>
+                <a:latin typeface="Calibri"/>
+              </a:rPr>
+              <a:t>ivity</a:t>
+            </a:r>
+            <a:r>
+              <a:rPr sz="1600" b="0" dirty="0">
+                <a:solidFill>
+                  <a:srgbClr val="50A14F"/>
+                </a:solidFill>
+                <a:latin typeface="Calibri"/>
+              </a:rPr>
+              <a:t> 3</a:t>
             </a:r>
           </a:p>
         </p:txBody>
@@ -8997,7 +10318,7 @@
         <p:spPr>
           <a:xfrm>
             <a:off x="502920" y="3749039"/>
-            <a:ext cx="10972800" cy="502920"/>
+            <a:ext cx="10972800" cy="246221"/>
           </a:xfrm>
           <a:prstGeom prst="rect">
             <a:avLst/>
@@ -9012,13 +10333,58 @@
           <a:p>
             <a:pPr algn="l"/>
             <a:r>
-              <a:rPr sz="1600" b="0">
+              <a:rPr sz="1600" b="0" dirty="0">
                 <a:solidFill>
                   <a:srgbClr val="383A42"/>
                 </a:solidFill>
                 <a:latin typeface="Calibri"/>
               </a:rPr>
-              <a:t>One call. Full richness. Zero regex. RDLS v1.0. 26,246 datasets. Zero invalid records.</a:t>
+              <a:t>One call. </a:t>
+            </a:r>
+            <a:r>
+              <a:rPr sz="1600" b="0" dirty="0">
+                <a:solidFill>
+                  <a:srgbClr val="50A14F"/>
+                </a:solidFill>
+                <a:latin typeface="Calibri"/>
+              </a:rPr>
+              <a:t>Full richness. </a:t>
+            </a:r>
+            <a:r>
+              <a:rPr sz="1600" b="0" dirty="0">
+                <a:solidFill>
+                  <a:srgbClr val="383A42"/>
+                </a:solidFill>
+                <a:latin typeface="Calibri"/>
+              </a:rPr>
+              <a:t>Zero regex. </a:t>
+            </a:r>
+            <a:r>
+              <a:rPr sz="1600" b="0" dirty="0">
+                <a:solidFill>
+                  <a:srgbClr val="50A14F"/>
+                </a:solidFill>
+                <a:latin typeface="Calibri"/>
+              </a:rPr>
+              <a:t>RDLS v1.0. </a:t>
+            </a:r>
+            <a:r>
+              <a:rPr sz="1600" b="0" dirty="0">
+                <a:solidFill>
+                  <a:srgbClr val="383A42"/>
+                </a:solidFill>
+                <a:latin typeface="Calibri"/>
+              </a:rPr>
+              <a:t>26,246 datasets. </a:t>
+            </a:r>
+            <a:r>
+              <a:rPr sz="1600" b="0" dirty="0">
+                <a:solidFill>
+                  <a:srgbClr val="50A14F"/>
+                </a:solidFill>
+                <a:latin typeface="Calibri"/>
+              </a:rPr>
+              <a:t>Zero invalid records.</a:t>
             </a:r>
           </a:p>
         </p:txBody>
@@ -9336,7 +10702,7 @@
         <p:spPr>
           <a:xfrm>
             <a:off x="411480" y="1024128"/>
-            <a:ext cx="5577840" cy="347472"/>
+            <a:ext cx="5577840" cy="215444"/>
           </a:xfrm>
           <a:prstGeom prst="rect">
             <a:avLst/>
@@ -9351,7 +10717,7 @@
           <a:p>
             <a:pPr algn="l"/>
             <a:r>
-              <a:rPr sz="1300" b="1">
+              <a:rPr sz="1400" b="1" dirty="0">
                 <a:solidFill>
                   <a:srgbClr val="0184BC"/>
                 </a:solidFill>
@@ -9368,7 +10734,13 @@
           <p:cNvGraphicFramePr>
             <a:graphicFrameLocks noGrp="1"/>
           </p:cNvGraphicFramePr>
-          <p:nvPr/>
+          <p:nvPr>
+            <p:extLst>
+              <p:ext uri="{D42A27DB-BD31-4B8C-83A1-F6EECF244321}">
+                <p14:modId xmlns:p14="http://schemas.microsoft.com/office/powerpoint/2010/main" val="4190105291"/>
+              </p:ext>
+            </p:extLst>
+          </p:nvPr>
         </p:nvGraphicFramePr>
         <p:xfrm>
           <a:off x="411480" y="1417320"/>
@@ -9411,7 +10783,7 @@
                     <a:p>
                       <a:pPr algn="ctr"/>
                       <a:r>
-                        <a:rPr sz="1100" b="1">
+                        <a:rPr sz="1400" b="1" dirty="0">
                           <a:solidFill>
                             <a:srgbClr val="FFFFFF"/>
                           </a:solidFill>
@@ -9434,7 +10806,7 @@
                     <a:p>
                       <a:pPr algn="ctr"/>
                       <a:r>
-                        <a:rPr sz="1100" b="1">
+                        <a:rPr sz="1400" b="1" dirty="0">
                           <a:solidFill>
                             <a:srgbClr val="FFFFFF"/>
                           </a:solidFill>
@@ -9457,7 +10829,7 @@
                     <a:p>
                       <a:pPr algn="ctr"/>
                       <a:r>
-                        <a:rPr sz="1100" b="1">
+                        <a:rPr sz="1400" b="1" dirty="0">
                           <a:solidFill>
                             <a:srgbClr val="FFFFFF"/>
                           </a:solidFill>
@@ -9685,7 +11057,7 @@
                     <a:p>
                       <a:pPr algn="l"/>
                       <a:r>
-                        <a:rPr sz="1100" b="0">
+                        <a:rPr sz="1100" b="0" dirty="0">
                           <a:solidFill>
                             <a:srgbClr val="383A42"/>
                           </a:solidFill>
@@ -9808,7 +11180,7 @@
         <p:spPr>
           <a:xfrm>
             <a:off x="589280" y="3294888"/>
-            <a:ext cx="5232400" cy="762000"/>
+            <a:ext cx="5232400" cy="369332"/>
           </a:xfrm>
           <a:prstGeom prst="rect">
             <a:avLst/>
@@ -9822,7 +11194,7 @@
           <a:lstStyle/>
           <a:p>
             <a:r>
-              <a:rPr sz="1100" b="0">
+              <a:rPr sz="1200" b="0" dirty="0">
                 <a:solidFill>
                   <a:srgbClr val="383A42"/>
                 </a:solidFill>
@@ -9842,7 +11214,7 @@
         <p:spPr>
           <a:xfrm>
             <a:off x="6217920" y="1024128"/>
-            <a:ext cx="5486400" cy="347472"/>
+            <a:ext cx="5486400" cy="215444"/>
           </a:xfrm>
           <a:prstGeom prst="rect">
             <a:avLst/>
@@ -9857,7 +11229,7 @@
           <a:p>
             <a:pPr algn="l"/>
             <a:r>
-              <a:rPr sz="1300" b="1">
+              <a:rPr sz="1400" b="1" dirty="0">
                 <a:solidFill>
                   <a:srgbClr val="0184BC"/>
                 </a:solidFill>
@@ -10210,7 +11582,7 @@
         <p:spPr>
           <a:xfrm>
             <a:off x="6395720" y="4419600"/>
-            <a:ext cx="5232400" cy="807720"/>
+            <a:ext cx="5232400" cy="369332"/>
           </a:xfrm>
           <a:prstGeom prst="rect">
             <a:avLst/>
@@ -10224,7 +11596,7 @@
           <a:lstStyle/>
           <a:p>
             <a:r>
-              <a:rPr sz="1100" b="0">
+              <a:rPr sz="1200" b="0" dirty="0">
                 <a:solidFill>
                   <a:srgbClr val="383A42"/>
                 </a:solidFill>
@@ -10331,8 +11703,8 @@
         </p:nvSpPr>
         <p:spPr>
           <a:xfrm>
-            <a:off x="589280" y="5489448"/>
-            <a:ext cx="11084560" cy="505968"/>
+            <a:off x="589280" y="5608713"/>
+            <a:ext cx="11084560" cy="215444"/>
           </a:xfrm>
           <a:prstGeom prst="rect">
             <a:avLst/>
@@ -10346,7 +11718,7 @@
           <a:lstStyle/>
           <a:p>
             <a:r>
-              <a:rPr sz="1200" b="1">
+              <a:rPr sz="1400" b="1" dirty="0">
                 <a:solidFill>
                   <a:srgbClr val="383A42"/>
                 </a:solidFill>
@@ -10590,7 +11962,7 @@
         </p:nvSpPr>
         <p:spPr>
           <a:xfrm>
-            <a:off x="411480" y="1024128"/>
+            <a:off x="411480" y="1103638"/>
             <a:ext cx="11338560" cy="5486400"/>
           </a:xfrm>
           <a:prstGeom prst="rect">
@@ -10634,7 +12006,7 @@
         </p:nvSpPr>
         <p:spPr>
           <a:xfrm>
-            <a:off x="411480" y="1024128"/>
+            <a:off x="411480" y="1103638"/>
             <a:ext cx="38100" cy="5486400"/>
           </a:xfrm>
           <a:prstGeom prst="rect">
@@ -10678,7 +12050,7 @@
         </p:nvSpPr>
         <p:spPr>
           <a:xfrm>
-            <a:off x="538480" y="1125728"/>
+            <a:off x="538480" y="1205238"/>
             <a:ext cx="11109960" cy="5283200"/>
           </a:xfrm>
           <a:prstGeom prst="rect">
@@ -11383,7 +12755,7 @@
         <p:spPr>
           <a:xfrm>
             <a:off x="411480" y="1024128"/>
-            <a:ext cx="5486400" cy="347472"/>
+            <a:ext cx="5486400" cy="215444"/>
           </a:xfrm>
           <a:prstGeom prst="rect">
             <a:avLst/>
@@ -11398,7 +12770,7 @@
           <a:p>
             <a:pPr algn="l"/>
             <a:r>
-              <a:rPr sz="1200" b="1">
+              <a:rPr sz="1400" b="1">
                 <a:solidFill>
                   <a:srgbClr val="E45649"/>
                 </a:solidFill>
@@ -11792,7 +13164,7 @@
         <p:spPr>
           <a:xfrm>
             <a:off x="6217920" y="1024128"/>
-            <a:ext cx="5486400" cy="347472"/>
+            <a:ext cx="5486400" cy="215444"/>
           </a:xfrm>
           <a:prstGeom prst="rect">
             <a:avLst/>
@@ -11807,7 +13179,7 @@
           <a:p>
             <a:pPr algn="l"/>
             <a:r>
-              <a:rPr sz="1200" b="1">
+              <a:rPr sz="1400" b="1">
                 <a:solidFill>
                   <a:srgbClr val="50A14F"/>
                 </a:solidFill>
@@ -12406,7 +13778,7 @@
         <p:spPr>
           <a:xfrm>
             <a:off x="589280" y="4904232"/>
-            <a:ext cx="5140960" cy="652272"/>
+            <a:ext cx="5140960" cy="369332"/>
           </a:xfrm>
           <a:prstGeom prst="rect">
             <a:avLst/>
@@ -12420,7 +13792,7 @@
           <a:lstStyle/>
           <a:p>
             <a:r>
-              <a:rPr sz="1100" b="0">
+              <a:rPr sz="1200" b="0" dirty="0">
                 <a:solidFill>
                   <a:srgbClr val="383A42"/>
                 </a:solidFill>
@@ -12665,7 +14037,7 @@
         <p:spPr>
           <a:xfrm>
             <a:off x="411480" y="1024128"/>
-            <a:ext cx="5486400" cy="347472"/>
+            <a:ext cx="5486400" cy="215444"/>
           </a:xfrm>
           <a:prstGeom prst="rect">
             <a:avLst/>
@@ -12680,7 +14052,7 @@
           <a:p>
             <a:pPr algn="l"/>
             <a:r>
-              <a:rPr sz="1200" b="1">
+              <a:rPr sz="1400" b="1">
                 <a:solidFill>
                   <a:srgbClr val="0184BC"/>
                 </a:solidFill>
@@ -13210,7 +14582,7 @@
         <p:spPr>
           <a:xfrm>
             <a:off x="6217920" y="1024128"/>
-            <a:ext cx="5486400" cy="347472"/>
+            <a:ext cx="5486400" cy="215444"/>
           </a:xfrm>
           <a:prstGeom prst="rect">
             <a:avLst/>
@@ -13225,7 +14597,7 @@
           <a:p>
             <a:pPr algn="l"/>
             <a:r>
-              <a:rPr sz="1200" b="1">
+              <a:rPr sz="1400" b="1">
                 <a:solidFill>
                   <a:srgbClr val="0184BC"/>
                 </a:solidFill>
@@ -13996,10 +15368,16 @@
           <p:cNvGraphicFramePr>
             <a:graphicFrameLocks noGrp="1"/>
           </p:cNvGraphicFramePr>
-          <p:nvPr/>
+          <p:nvPr>
+            <p:extLst>
+              <p:ext uri="{D42A27DB-BD31-4B8C-83A1-F6EECF244321}">
+                <p14:modId xmlns:p14="http://schemas.microsoft.com/office/powerpoint/2010/main" val="3160386809"/>
+              </p:ext>
+            </p:extLst>
+          </p:nvPr>
         </p:nvGraphicFramePr>
         <p:xfrm>
-          <a:off x="411480" y="1024128"/>
+          <a:off x="411480" y="1103638"/>
           <a:ext cx="11338560" cy="4709160"/>
         </p:xfrm>
         <a:graphic>
@@ -14009,28 +15387,28 @@
                 <a:tableStyleId>{5C22544A-7EE6-4342-B048-85BDC9FD1C3A}</a:tableStyleId>
               </a:tblPr>
               <a:tblGrid>
-                <a:gridCol w="2834640">
+                <a:gridCol w="1091317">
                   <a:extLst>
                     <a:ext uri="{9D8B030D-6E8A-4147-A177-3AD203B41FA5}">
                       <a16:colId xmlns:a16="http://schemas.microsoft.com/office/drawing/2014/main" val="20000"/>
                     </a:ext>
                   </a:extLst>
                 </a:gridCol>
-                <a:gridCol w="2834640">
+                <a:gridCol w="3371353">
                   <a:extLst>
                     <a:ext uri="{9D8B030D-6E8A-4147-A177-3AD203B41FA5}">
                       <a16:colId xmlns:a16="http://schemas.microsoft.com/office/drawing/2014/main" val="20001"/>
                     </a:ext>
                   </a:extLst>
                 </a:gridCol>
-                <a:gridCol w="2834640">
+                <a:gridCol w="3427012">
                   <a:extLst>
                     <a:ext uri="{9D8B030D-6E8A-4147-A177-3AD203B41FA5}">
                       <a16:colId xmlns:a16="http://schemas.microsoft.com/office/drawing/2014/main" val="20002"/>
                     </a:ext>
                   </a:extLst>
                 </a:gridCol>
-                <a:gridCol w="2834640">
+                <a:gridCol w="3448878">
                   <a:extLst>
                     <a:ext uri="{9D8B030D-6E8A-4147-A177-3AD203B41FA5}">
                       <a16:colId xmlns:a16="http://schemas.microsoft.com/office/drawing/2014/main" val="20003"/>
@@ -14046,7 +15424,7 @@
                     <a:p>
                       <a:pPr algn="ctr"/>
                       <a:r>
-                        <a:rPr sz="1000" b="1">
+                        <a:rPr sz="1400" b="1" dirty="0">
                           <a:solidFill>
                             <a:srgbClr val="FFFFFF"/>
                           </a:solidFill>
@@ -14069,7 +15447,7 @@
                     <a:p>
                       <a:pPr algn="ctr"/>
                       <a:r>
-                        <a:rPr sz="1000" b="1">
+                        <a:rPr sz="1400" b="1" dirty="0">
                           <a:solidFill>
                             <a:srgbClr val="FFFFFF"/>
                           </a:solidFill>
@@ -14092,7 +15470,7 @@
                     <a:p>
                       <a:pPr algn="ctr"/>
                       <a:r>
-                        <a:rPr sz="1000" b="1">
+                        <a:rPr sz="1400" b="1" dirty="0">
                           <a:solidFill>
                             <a:srgbClr val="FFFFFF"/>
                           </a:solidFill>
@@ -14115,7 +15493,7 @@
                     <a:p>
                       <a:pPr algn="ctr"/>
                       <a:r>
-                        <a:rPr sz="1000" b="1">
+                        <a:rPr sz="1400" b="1" dirty="0">
                           <a:solidFill>
                             <a:srgbClr val="FFFFFF"/>
                           </a:solidFill>
@@ -14143,9 +15521,9 @@
                     <a:bodyPr/>
                     <a:lstStyle/>
                     <a:p>
-                      <a:pPr algn="l"/>
+                      <a:pPr algn="ctr"/>
                       <a:r>
-                        <a:rPr sz="950" b="0">
+                        <a:rPr sz="950" b="0" dirty="0">
                           <a:solidFill>
                             <a:srgbClr val="383A42"/>
                           </a:solidFill>
@@ -14168,13 +15546,22 @@
                     <a:p>
                       <a:pPr algn="l"/>
                       <a:r>
-                        <a:rPr sz="950" b="0">
+                        <a:rPr sz="950" b="0" dirty="0" err="1">
                           <a:solidFill>
                             <a:srgbClr val="383A42"/>
                           </a:solidFill>
                           <a:latin typeface="Calibri"/>
                         </a:rPr>
-                        <a:t>exposure.dimension: 'count' is not one of [...]</a:t>
+                        <a:t>exposure.dimension</a:t>
+                      </a:r>
+                      <a:r>
+                        <a:rPr sz="950" b="0" dirty="0">
+                          <a:solidFill>
+                            <a:srgbClr val="383A42"/>
+                          </a:solidFill>
+                          <a:latin typeface="Calibri"/>
+                        </a:rPr>
+                        <a:t>: 'count' is not one of [...]</a:t>
                       </a:r>
                     </a:p>
                   </a:txBody>
@@ -14242,7 +15629,7 @@
                     <a:bodyPr/>
                     <a:lstStyle/>
                     <a:p>
-                      <a:pPr algn="l"/>
+                      <a:pPr algn="ctr"/>
                       <a:r>
                         <a:rPr sz="950" b="0">
                           <a:solidFill>
@@ -14341,7 +15728,7 @@
                     <a:bodyPr/>
                     <a:lstStyle/>
                     <a:p>
-                      <a:pPr algn="l"/>
+                      <a:pPr algn="ctr"/>
                       <a:r>
                         <a:rPr sz="950" b="0">
                           <a:solidFill>
@@ -14440,7 +15827,7 @@
                     <a:bodyPr/>
                     <a:lstStyle/>
                     <a:p>
-                      <a:pPr algn="l"/>
+                      <a:pPr algn="ctr"/>
                       <a:r>
                         <a:rPr sz="950" b="0">
                           <a:solidFill>
@@ -14539,7 +15926,7 @@
                     <a:bodyPr/>
                     <a:lstStyle/>
                     <a:p>
-                      <a:pPr algn="l"/>
+                      <a:pPr algn="ctr"/>
                       <a:r>
                         <a:rPr sz="950" b="0">
                           <a:solidFill>
@@ -14638,7 +16025,7 @@
                     <a:bodyPr/>
                     <a:lstStyle/>
                     <a:p>
-                      <a:pPr algn="l"/>
+                      <a:pPr algn="ctr"/>
                       <a:r>
                         <a:rPr sz="950" b="0">
                           <a:solidFill>
@@ -14737,9 +16124,9 @@
                     <a:bodyPr/>
                     <a:lstStyle/>
                     <a:p>
-                      <a:pPr algn="l"/>
+                      <a:pPr algn="ctr"/>
                       <a:r>
-                        <a:rPr sz="950" b="0">
+                        <a:rPr sz="950" b="0" dirty="0">
                           <a:solidFill>
                             <a:srgbClr val="383A42"/>
                           </a:solidFill>
@@ -14808,7 +16195,7 @@
                     <a:p>
                       <a:pPr algn="l"/>
                       <a:r>
-                        <a:rPr sz="950" b="0">
+                        <a:rPr sz="950" b="0" dirty="0">
                           <a:solidFill>
                             <a:srgbClr val="383A42"/>
                           </a:solidFill>
@@ -14842,7 +16229,7 @@
         </p:nvSpPr>
         <p:spPr>
           <a:xfrm>
-            <a:off x="411480" y="5833872"/>
+            <a:off x="411480" y="5913382"/>
             <a:ext cx="11338560" cy="685800"/>
           </a:xfrm>
           <a:prstGeom prst="rect">
@@ -14886,7 +16273,7 @@
         </p:nvSpPr>
         <p:spPr>
           <a:xfrm>
-            <a:off x="411480" y="5833872"/>
+            <a:off x="411480" y="5913382"/>
             <a:ext cx="50800" cy="685800"/>
           </a:xfrm>
           <a:prstGeom prst="rect">
@@ -14930,8 +16317,8 @@
         </p:nvSpPr>
         <p:spPr>
           <a:xfrm>
-            <a:off x="589280" y="5910072"/>
-            <a:ext cx="11084560" cy="533400"/>
+            <a:off x="589280" y="5989582"/>
+            <a:ext cx="11084560" cy="369332"/>
           </a:xfrm>
           <a:prstGeom prst="rect">
             <a:avLst/>
@@ -14945,7 +16332,7 @@
           <a:lstStyle/>
           <a:p>
             <a:r>
-              <a:rPr sz="1150" b="0">
+              <a:rPr sz="1200" b="0" dirty="0">
                 <a:solidFill>
                   <a:srgbClr val="383A42"/>
                 </a:solidFill>
@@ -15205,7 +16592,7 @@
           <a:p>
             <a:pPr algn="l"/>
             <a:r>
-              <a:rPr sz="1300" b="0">
+              <a:rPr sz="1300" b="0" dirty="0">
                 <a:solidFill>
                   <a:srgbClr val="696C77"/>
                 </a:solidFill>
@@ -15283,13 +16670,22 @@
           <a:lstStyle/>
           <a:p>
             <a:r>
+              <a:rPr lang="en-US" sz="1500" b="1" dirty="0">
+                <a:solidFill>
+                  <a:srgbClr val="FFFFFF"/>
+                </a:solidFill>
+                <a:latin typeface="Consolas"/>
+              </a:rPr>
+              <a:t> </a:t>
+            </a:r>
+            <a:r>
               <a:rPr sz="1500" b="1" dirty="0">
                 <a:solidFill>
                   <a:srgbClr val="FFFFFF"/>
                 </a:solidFill>
                 <a:latin typeface="Consolas"/>
               </a:rPr>
-              <a:t>H  Hazard</a:t>
+              <a:t>H Hazard</a:t>
             </a:r>
           </a:p>
         </p:txBody>
@@ -15413,6 +16809,21 @@
               </a:rPr>
               <a:t>Flood depth grids, seismic intensity maps, drought indices, storm surge models</a:t>
             </a:r>
+            <a:r>
+              <a:rPr lang="en-US" sz="1500" b="0" dirty="0">
+                <a:solidFill>
+                  <a:srgbClr val="383A42"/>
+                </a:solidFill>
+                <a:latin typeface="Calibri"/>
+              </a:rPr>
+              <a:t>, etc.</a:t>
+            </a:r>
+            <a:endParaRPr sz="1500" b="0" dirty="0">
+              <a:solidFill>
+                <a:srgbClr val="383A42"/>
+              </a:solidFill>
+              <a:latin typeface="Calibri"/>
+            </a:endParaRPr>
           </a:p>
         </p:txBody>
       </p:sp>
@@ -15483,13 +16894,22 @@
           <a:lstStyle/>
           <a:p>
             <a:r>
+              <a:rPr lang="en-US" sz="1500" b="1" dirty="0">
+                <a:solidFill>
+                  <a:srgbClr val="FFFFFF"/>
+                </a:solidFill>
+                <a:latin typeface="Consolas"/>
+              </a:rPr>
+              <a:t> </a:t>
+            </a:r>
+            <a:r>
               <a:rPr sz="1500" b="1" dirty="0">
                 <a:solidFill>
                   <a:srgbClr val="FFFFFF"/>
                 </a:solidFill>
                 <a:latin typeface="Consolas"/>
               </a:rPr>
-              <a:t>E  Exposure</a:t>
+              <a:t>E Exposure</a:t>
             </a:r>
           </a:p>
         </p:txBody>
@@ -15605,7 +17025,7 @@
           <a:lstStyle/>
           <a:p>
             <a:r>
-              <a:rPr sz="1500" b="0">
+              <a:rPr sz="1500" b="0" dirty="0">
                 <a:solidFill>
                   <a:srgbClr val="383A42"/>
                 </a:solidFill>
@@ -15613,6 +17033,21 @@
               </a:rPr>
               <a:t>Building inventories, population grids, facility registries, infrastructure datasets</a:t>
             </a:r>
+            <a:r>
+              <a:rPr lang="en-US" sz="1500" b="0" dirty="0">
+                <a:solidFill>
+                  <a:srgbClr val="383A42"/>
+                </a:solidFill>
+                <a:latin typeface="Calibri"/>
+              </a:rPr>
+              <a:t>, etc.</a:t>
+            </a:r>
+            <a:endParaRPr sz="1500" b="0" dirty="0">
+              <a:solidFill>
+                <a:srgbClr val="383A42"/>
+              </a:solidFill>
+              <a:latin typeface="Calibri"/>
+            </a:endParaRPr>
           </a:p>
         </p:txBody>
       </p:sp>
@@ -15683,13 +17118,22 @@
           <a:lstStyle/>
           <a:p>
             <a:r>
+              <a:rPr lang="en-US" sz="1500" b="1" dirty="0">
+                <a:solidFill>
+                  <a:srgbClr val="FFFFFF"/>
+                </a:solidFill>
+                <a:latin typeface="Consolas"/>
+              </a:rPr>
+              <a:t> </a:t>
+            </a:r>
+            <a:r>
               <a:rPr sz="1500" b="1" dirty="0">
                 <a:solidFill>
                   <a:srgbClr val="FFFFFF"/>
                 </a:solidFill>
                 <a:latin typeface="Consolas"/>
               </a:rPr>
-              <a:t>V  Vulnerability</a:t>
+              <a:t>V Vulnerability</a:t>
             </a:r>
           </a:p>
         </p:txBody>
@@ -15805,7 +17249,7 @@
           <a:lstStyle/>
           <a:p>
             <a:r>
-              <a:rPr sz="1500" b="0">
+              <a:rPr sz="1500" b="0" dirty="0">
                 <a:solidFill>
                   <a:srgbClr val="383A42"/>
                 </a:solidFill>
@@ -15813,6 +17257,21 @@
               </a:rPr>
               <a:t>Damage and fragility functions, vulnerability curves, loss ratios by asset type</a:t>
             </a:r>
+            <a:r>
+              <a:rPr lang="en-US" sz="1500" b="0" dirty="0">
+                <a:solidFill>
+                  <a:srgbClr val="383A42"/>
+                </a:solidFill>
+                <a:latin typeface="Calibri"/>
+              </a:rPr>
+              <a:t>, etc.</a:t>
+            </a:r>
+            <a:endParaRPr sz="1500" b="0" dirty="0">
+              <a:solidFill>
+                <a:srgbClr val="383A42"/>
+              </a:solidFill>
+              <a:latin typeface="Calibri"/>
+            </a:endParaRPr>
           </a:p>
         </p:txBody>
       </p:sp>
@@ -15883,13 +17342,22 @@
           <a:lstStyle/>
           <a:p>
             <a:r>
+              <a:rPr lang="en-US" sz="1500" b="1" dirty="0">
+                <a:solidFill>
+                  <a:srgbClr val="FFFFFF"/>
+                </a:solidFill>
+                <a:latin typeface="Consolas"/>
+              </a:rPr>
+              <a:t> </a:t>
+            </a:r>
+            <a:r>
               <a:rPr sz="1500" b="1" dirty="0">
                 <a:solidFill>
                   <a:srgbClr val="FFFFFF"/>
                 </a:solidFill>
                 <a:latin typeface="Consolas"/>
               </a:rPr>
-              <a:t>L  Loss</a:t>
+              <a:t>L Loss</a:t>
             </a:r>
           </a:p>
         </p:txBody>
@@ -16005,7 +17473,7 @@
           <a:lstStyle/>
           <a:p>
             <a:r>
-              <a:rPr sz="1500" b="0">
+              <a:rPr sz="1500" b="0" dirty="0">
                 <a:solidFill>
                   <a:srgbClr val="383A42"/>
                 </a:solidFill>
@@ -16013,6 +17481,21 @@
               </a:rPr>
               <a:t>Casualties, displacement counts, economic damage, facility operational status</a:t>
             </a:r>
+            <a:r>
+              <a:rPr lang="en-US" sz="1500" b="0" dirty="0">
+                <a:solidFill>
+                  <a:srgbClr val="383A42"/>
+                </a:solidFill>
+                <a:latin typeface="Calibri"/>
+              </a:rPr>
+              <a:t>, etc.</a:t>
+            </a:r>
+            <a:endParaRPr sz="1500" b="0" dirty="0">
+              <a:solidFill>
+                <a:srgbClr val="383A42"/>
+              </a:solidFill>
+              <a:latin typeface="Calibri"/>
+            </a:endParaRPr>
           </a:p>
         </p:txBody>
       </p:sp>
@@ -16135,6 +17618,86 @@
               </a:rPr>
               <a:t>26,246 HDX datasets   -   ~12,594 potential RDLS candidates   -   Manual review: $2M+ and months of expert time</a:t>
             </a:r>
+          </a:p>
+        </p:txBody>
+      </p:sp>
+      <p:sp>
+        <p:nvSpPr>
+          <p:cNvPr id="31" name="TextBox 30">
+            <a:extLst>
+              <a:ext uri="{FF2B5EF4-FFF2-40B4-BE49-F238E27FC236}">
+                <a16:creationId xmlns:a16="http://schemas.microsoft.com/office/drawing/2014/main" id="{FD2E3788-5657-38D3-411B-482DC06F034C}"/>
+              </a:ext>
+            </a:extLst>
+          </p:cNvPr>
+          <p:cNvSpPr txBox="1"/>
+          <p:nvPr/>
+        </p:nvSpPr>
+        <p:spPr>
+          <a:xfrm>
+            <a:off x="379412" y="4553576"/>
+            <a:ext cx="11430000" cy="200055"/>
+          </a:xfrm>
+          <a:prstGeom prst="rect">
+            <a:avLst/>
+          </a:prstGeom>
+          <a:noFill/>
+        </p:spPr>
+        <p:txBody>
+          <a:bodyPr wrap="square" lIns="0" tIns="0" rIns="0" bIns="0">
+            <a:spAutoFit/>
+          </a:bodyPr>
+          <a:lstStyle/>
+          <a:p>
+            <a:r>
+              <a:rPr lang="en-US" sz="1300" b="0" dirty="0">
+                <a:solidFill>
+                  <a:srgbClr val="696C77"/>
+                </a:solidFill>
+                <a:latin typeface="Calibri"/>
+              </a:rPr>
+              <a:t>Reference</a:t>
+            </a:r>
+            <a:r>
+              <a:rPr sz="1300" b="0" dirty="0">
+                <a:solidFill>
+                  <a:srgbClr val="696C77"/>
+                </a:solidFill>
+                <a:latin typeface="Calibri"/>
+              </a:rPr>
+              <a:t>:</a:t>
+            </a:r>
+            <a:r>
+              <a:rPr lang="en-US" sz="1300" dirty="0">
+                <a:solidFill>
+                  <a:srgbClr val="696C77"/>
+                </a:solidFill>
+              </a:rPr>
+              <a:t> </a:t>
+            </a:r>
+            <a:r>
+              <a:rPr lang="en-US" sz="1300" dirty="0">
+                <a:solidFill>
+                  <a:srgbClr val="696C77"/>
+                </a:solidFill>
+                <a:hlinkClick r:id="rId2"/>
+              </a:rPr>
+              <a:t>https://docs.riskdatalibrary.org/en/latest/reference/schema/#</a:t>
+            </a:r>
+            <a:r>
+              <a:rPr lang="en-US" sz="1300" dirty="0">
+                <a:solidFill>
+                  <a:srgbClr val="696C77"/>
+                </a:solidFill>
+              </a:rPr>
+              <a:t> </a:t>
+            </a:r>
+            <a:endParaRPr sz="1300" b="0" dirty="0">
+              <a:solidFill>
+                <a:srgbClr val="696C77"/>
+              </a:solidFill>
+              <a:latin typeface="Calibri"/>
+            </a:endParaRPr>
           </a:p>
         </p:txBody>
       </p:sp>
@@ -16371,7 +17934,7 @@
         </p:nvSpPr>
         <p:spPr>
           <a:xfrm>
-            <a:off x="411480" y="1024128"/>
+            <a:off x="411480" y="1103638"/>
             <a:ext cx="3657600" cy="1691640"/>
           </a:xfrm>
           <a:prstGeom prst="rect">
@@ -16415,7 +17978,7 @@
         </p:nvSpPr>
         <p:spPr>
           <a:xfrm>
-            <a:off x="411480" y="1024128"/>
+            <a:off x="411480" y="1103638"/>
             <a:ext cx="3657600" cy="50800"/>
           </a:xfrm>
           <a:prstGeom prst="rect">
@@ -16459,7 +18022,7 @@
         </p:nvSpPr>
         <p:spPr>
           <a:xfrm>
-            <a:off x="411480" y="1097280"/>
+            <a:off x="411480" y="1383522"/>
             <a:ext cx="3657600" cy="914400"/>
           </a:xfrm>
           <a:prstGeom prst="rect">
@@ -16475,7 +18038,7 @@
           <a:p>
             <a:pPr algn="ctr"/>
             <a:r>
-              <a:rPr sz="5200" b="1">
+              <a:rPr sz="5200" b="1" dirty="0">
                 <a:solidFill>
                   <a:srgbClr val="50A14F"/>
                 </a:solidFill>
@@ -16494,8 +18057,8 @@
         </p:nvSpPr>
         <p:spPr>
           <a:xfrm>
-            <a:off x="411480" y="2029968"/>
-            <a:ext cx="3657600" cy="457200"/>
+            <a:off x="411480" y="2316210"/>
+            <a:ext cx="3657600" cy="200055"/>
           </a:xfrm>
           <a:prstGeom prst="rect">
             <a:avLst/>
@@ -16510,7 +18073,7 @@
           <a:p>
             <a:pPr algn="ctr"/>
             <a:r>
-              <a:rPr sz="1300" b="0">
+              <a:rPr sz="1300" b="0" dirty="0">
                 <a:solidFill>
                   <a:srgbClr val="696C77"/>
                 </a:solidFill>
@@ -16529,7 +18092,7 @@
         </p:nvSpPr>
         <p:spPr>
           <a:xfrm>
-            <a:off x="4343400" y="1024128"/>
+            <a:off x="4343400" y="1103638"/>
             <a:ext cx="3657600" cy="1691640"/>
           </a:xfrm>
           <a:prstGeom prst="rect">
@@ -16573,7 +18136,7 @@
         </p:nvSpPr>
         <p:spPr>
           <a:xfrm>
-            <a:off x="4343400" y="1024128"/>
+            <a:off x="4343400" y="1103638"/>
             <a:ext cx="3657600" cy="50800"/>
           </a:xfrm>
           <a:prstGeom prst="rect">
@@ -16617,7 +18180,7 @@
         </p:nvSpPr>
         <p:spPr>
           <a:xfrm>
-            <a:off x="4343400" y="1097280"/>
+            <a:off x="4343400" y="1383522"/>
             <a:ext cx="3657600" cy="914400"/>
           </a:xfrm>
           <a:prstGeom prst="rect">
@@ -16652,8 +18215,8 @@
         </p:nvSpPr>
         <p:spPr>
           <a:xfrm>
-            <a:off x="4343400" y="2029968"/>
-            <a:ext cx="3657600" cy="457200"/>
+            <a:off x="4343400" y="2316210"/>
+            <a:ext cx="3657600" cy="200055"/>
           </a:xfrm>
           <a:prstGeom prst="rect">
             <a:avLst/>
@@ -16668,7 +18231,7 @@
           <a:p>
             <a:pPr algn="ctr"/>
             <a:r>
-              <a:rPr sz="1300" b="0">
+              <a:rPr sz="1300" b="0" dirty="0">
                 <a:solidFill>
                   <a:srgbClr val="696C77"/>
                 </a:solidFill>
@@ -16687,7 +18250,7 @@
         </p:nvSpPr>
         <p:spPr>
           <a:xfrm>
-            <a:off x="8275319" y="1024128"/>
+            <a:off x="8275319" y="1103638"/>
             <a:ext cx="3657600" cy="1691640"/>
           </a:xfrm>
           <a:prstGeom prst="rect">
@@ -16731,7 +18294,7 @@
         </p:nvSpPr>
         <p:spPr>
           <a:xfrm>
-            <a:off x="8275319" y="1024128"/>
+            <a:off x="8275319" y="1103638"/>
             <a:ext cx="3657600" cy="50800"/>
           </a:xfrm>
           <a:prstGeom prst="rect">
@@ -16775,7 +18338,7 @@
         </p:nvSpPr>
         <p:spPr>
           <a:xfrm>
-            <a:off x="8275319" y="1097280"/>
+            <a:off x="8275319" y="1383522"/>
             <a:ext cx="3657600" cy="914400"/>
           </a:xfrm>
           <a:prstGeom prst="rect">
@@ -16810,8 +18373,8 @@
         </p:nvSpPr>
         <p:spPr>
           <a:xfrm>
-            <a:off x="8275319" y="2029968"/>
-            <a:ext cx="3657600" cy="457200"/>
+            <a:off x="8275319" y="2316210"/>
+            <a:ext cx="3657600" cy="200055"/>
           </a:xfrm>
           <a:prstGeom prst="rect">
             <a:avLst/>
@@ -16826,7 +18389,7 @@
           <a:p>
             <a:pPr algn="ctr"/>
             <a:r>
-              <a:rPr sz="1300" b="0">
+              <a:rPr sz="1300" b="0" dirty="0">
                 <a:solidFill>
                   <a:srgbClr val="696C77"/>
                 </a:solidFill>
@@ -16843,10 +18406,16 @@
           <p:cNvGraphicFramePr>
             <a:graphicFrameLocks noGrp="1"/>
           </p:cNvGraphicFramePr>
-          <p:nvPr/>
+          <p:nvPr>
+            <p:extLst>
+              <p:ext uri="{D42A27DB-BD31-4B8C-83A1-F6EECF244321}">
+                <p14:modId xmlns:p14="http://schemas.microsoft.com/office/powerpoint/2010/main" val="4290114005"/>
+              </p:ext>
+            </p:extLst>
+          </p:nvPr>
         </p:nvGraphicFramePr>
         <p:xfrm>
-          <a:off x="411480" y="2880360"/>
+          <a:off x="411480" y="2959870"/>
           <a:ext cx="11338560" cy="2743200"/>
         </p:xfrm>
         <a:graphic>
@@ -17645,10 +19214,16 @@
           <p:cNvGraphicFramePr>
             <a:graphicFrameLocks noGrp="1"/>
           </p:cNvGraphicFramePr>
-          <p:nvPr/>
+          <p:nvPr>
+            <p:extLst>
+              <p:ext uri="{D42A27DB-BD31-4B8C-83A1-F6EECF244321}">
+                <p14:modId xmlns:p14="http://schemas.microsoft.com/office/powerpoint/2010/main" val="2546662133"/>
+              </p:ext>
+            </p:extLst>
+          </p:nvPr>
         </p:nvGraphicFramePr>
         <p:xfrm>
-          <a:off x="411480" y="1024128"/>
+          <a:off x="411480" y="1103638"/>
           <a:ext cx="11338560" cy="3566160"/>
         </p:xfrm>
         <a:graphic>
@@ -17688,7 +19263,7 @@
                     <a:p>
                       <a:pPr algn="ctr"/>
                       <a:r>
-                        <a:rPr sz="1200" b="1">
+                        <a:rPr sz="1400" b="1" dirty="0">
                           <a:solidFill>
                             <a:srgbClr val="FFFFFF"/>
                           </a:solidFill>
@@ -17711,7 +19286,7 @@
                     <a:p>
                       <a:pPr algn="ctr"/>
                       <a:r>
-                        <a:rPr sz="1200" b="1">
+                        <a:rPr sz="1400" b="1" dirty="0">
                           <a:solidFill>
                             <a:srgbClr val="FFFFFF"/>
                           </a:solidFill>
@@ -17734,7 +19309,7 @@
                     <a:p>
                       <a:pPr algn="ctr"/>
                       <a:r>
-                        <a:rPr sz="1200" b="1">
+                        <a:rPr sz="1400" b="1" dirty="0">
                           <a:solidFill>
                             <a:srgbClr val="FFFFFF"/>
                           </a:solidFill>
@@ -18342,7 +19917,7 @@
                     <a:p>
                       <a:pPr algn="l"/>
                       <a:r>
-                        <a:rPr sz="1150" b="0">
+                        <a:rPr sz="1150" b="0" dirty="0">
                           <a:solidFill>
                             <a:srgbClr val="383A42"/>
                           </a:solidFill>
@@ -18376,7 +19951,7 @@
         </p:nvSpPr>
         <p:spPr>
           <a:xfrm>
-            <a:off x="411480" y="4736592"/>
+            <a:off x="411480" y="4816102"/>
             <a:ext cx="11338560" cy="658368"/>
           </a:xfrm>
           <a:prstGeom prst="rect">
@@ -18420,7 +19995,7 @@
         </p:nvSpPr>
         <p:spPr>
           <a:xfrm>
-            <a:off x="411480" y="4736592"/>
+            <a:off x="411480" y="4816102"/>
             <a:ext cx="50800" cy="658368"/>
           </a:xfrm>
           <a:prstGeom prst="rect">
@@ -18464,7 +20039,7 @@
         </p:nvSpPr>
         <p:spPr>
           <a:xfrm>
-            <a:off x="589280" y="4812792"/>
+            <a:off x="589280" y="4892302"/>
             <a:ext cx="11084560" cy="505968"/>
           </a:xfrm>
           <a:prstGeom prst="rect">
@@ -18498,7 +20073,7 @@
         </p:nvSpPr>
         <p:spPr>
           <a:xfrm>
-            <a:off x="411480" y="5504688"/>
+            <a:off x="411480" y="5584198"/>
             <a:ext cx="11338560" cy="384048"/>
           </a:xfrm>
           <a:prstGeom prst="rect">
@@ -18758,7 +20333,7 @@
         </p:nvSpPr>
         <p:spPr>
           <a:xfrm>
-            <a:off x="411480" y="1024128"/>
+            <a:off x="411480" y="1103638"/>
             <a:ext cx="11338560" cy="5486400"/>
           </a:xfrm>
           <a:prstGeom prst="rect">
@@ -18802,7 +20377,7 @@
         </p:nvSpPr>
         <p:spPr>
           <a:xfrm>
-            <a:off x="411480" y="1024128"/>
+            <a:off x="411480" y="1103638"/>
             <a:ext cx="38100" cy="5486400"/>
           </a:xfrm>
           <a:prstGeom prst="rect">
@@ -18846,7 +20421,7 @@
         </p:nvSpPr>
         <p:spPr>
           <a:xfrm>
-            <a:off x="538480" y="1125728"/>
+            <a:off x="538480" y="1205238"/>
             <a:ext cx="11109960" cy="5283200"/>
           </a:xfrm>
           <a:prstGeom prst="rect">
@@ -19485,10 +21060,16 @@
           <p:cNvGraphicFramePr>
             <a:graphicFrameLocks noGrp="1"/>
           </p:cNvGraphicFramePr>
-          <p:nvPr/>
+          <p:nvPr>
+            <p:extLst>
+              <p:ext uri="{D42A27DB-BD31-4B8C-83A1-F6EECF244321}">
+                <p14:modId xmlns:p14="http://schemas.microsoft.com/office/powerpoint/2010/main" val="1496476508"/>
+              </p:ext>
+            </p:extLst>
+          </p:nvPr>
         </p:nvGraphicFramePr>
         <p:xfrm>
-          <a:off x="411480" y="1024128"/>
+          <a:off x="411480" y="1103638"/>
           <a:ext cx="11338560" cy="5376672"/>
         </p:xfrm>
         <a:graphic>
@@ -19535,7 +21116,7 @@
                     <a:p>
                       <a:pPr algn="ctr"/>
                       <a:r>
-                        <a:rPr sz="1100" b="1">
+                        <a:rPr sz="1400" b="1" dirty="0">
                           <a:solidFill>
                             <a:srgbClr val="FFFFFF"/>
                           </a:solidFill>
@@ -19558,7 +21139,7 @@
                     <a:p>
                       <a:pPr algn="ctr"/>
                       <a:r>
-                        <a:rPr sz="1100" b="1">
+                        <a:rPr sz="1400" b="1" dirty="0">
                           <a:solidFill>
                             <a:srgbClr val="FFFFFF"/>
                           </a:solidFill>
@@ -19581,7 +21162,7 @@
                     <a:p>
                       <a:pPr algn="ctr"/>
                       <a:r>
-                        <a:rPr sz="1100" b="1">
+                        <a:rPr sz="1400" b="1">
                           <a:solidFill>
                             <a:srgbClr val="FFFFFF"/>
                           </a:solidFill>
@@ -19604,7 +21185,7 @@
                     <a:p>
                       <a:pPr algn="ctr"/>
                       <a:r>
-                        <a:rPr sz="1100" b="1">
+                        <a:rPr sz="1400" b="1" dirty="0">
                           <a:solidFill>
                             <a:srgbClr val="FFFFFF"/>
                           </a:solidFill>
@@ -19657,7 +21238,7 @@
                     <a:p>
                       <a:pPr algn="l"/>
                       <a:r>
-                        <a:rPr sz="1050" b="0">
+                        <a:rPr sz="1050" b="0" dirty="0">
                           <a:solidFill>
                             <a:srgbClr val="383A42"/>
                           </a:solidFill>
@@ -19680,7 +21261,7 @@
                     <a:p>
                       <a:pPr algn="l"/>
                       <a:r>
-                        <a:rPr sz="1050" b="0">
+                        <a:rPr sz="1050" b="0" dirty="0">
                           <a:solidFill>
                             <a:srgbClr val="383A42"/>
                           </a:solidFill>
@@ -20891,7 +22472,7 @@
                     <a:p>
                       <a:pPr algn="l"/>
                       <a:r>
-                        <a:rPr sz="1050" b="0">
+                        <a:rPr sz="1050" b="0" dirty="0">
                           <a:solidFill>
                             <a:srgbClr val="383A42"/>
                           </a:solidFill>
@@ -21115,7 +22696,7 @@
         </p:nvSpPr>
         <p:spPr>
           <a:xfrm>
-            <a:off x="411480" y="1024128"/>
+            <a:off x="411480" y="1103638"/>
             <a:ext cx="3730752" cy="2194560"/>
           </a:xfrm>
           <a:prstGeom prst="rect">
@@ -21159,7 +22740,7 @@
         </p:nvSpPr>
         <p:spPr>
           <a:xfrm>
-            <a:off x="411480" y="1024128"/>
+            <a:off x="411480" y="1103638"/>
             <a:ext cx="3730752" cy="38100"/>
           </a:xfrm>
           <a:prstGeom prst="rect">
@@ -21203,8 +22784,8 @@
         </p:nvSpPr>
         <p:spPr>
           <a:xfrm>
-            <a:off x="513080" y="1151128"/>
-            <a:ext cx="3527552" cy="384048"/>
+            <a:off x="513080" y="1230638"/>
+            <a:ext cx="3527552" cy="215444"/>
           </a:xfrm>
           <a:prstGeom prst="rect">
             <a:avLst/>
@@ -21219,7 +22800,7 @@
           <a:p>
             <a:pPr algn="l"/>
             <a:r>
-              <a:rPr sz="1150" b="1">
+              <a:rPr sz="1400" b="1" dirty="0">
                 <a:solidFill>
                   <a:srgbClr val="E45649"/>
                 </a:solidFill>
@@ -21238,8 +22819,8 @@
         </p:nvSpPr>
         <p:spPr>
           <a:xfrm>
-            <a:off x="513080" y="1499616"/>
-            <a:ext cx="3527552" cy="1645920"/>
+            <a:off x="513080" y="1579126"/>
+            <a:ext cx="3527552" cy="553998"/>
           </a:xfrm>
           <a:prstGeom prst="rect">
             <a:avLst/>
@@ -21254,7 +22835,7 @@
           <a:p>
             <a:pPr algn="l"/>
             <a:r>
-              <a:rPr sz="1050" b="0">
+              <a:rPr sz="1200" b="0" dirty="0">
                 <a:solidFill>
                   <a:srgbClr val="383A42"/>
                 </a:solidFill>
@@ -21273,7 +22854,7 @@
         </p:nvSpPr>
         <p:spPr>
           <a:xfrm>
-            <a:off x="4343400" y="1024128"/>
+            <a:off x="4343400" y="1103638"/>
             <a:ext cx="3730752" cy="2194560"/>
           </a:xfrm>
           <a:prstGeom prst="rect">
@@ -21317,7 +22898,7 @@
         </p:nvSpPr>
         <p:spPr>
           <a:xfrm>
-            <a:off x="4343400" y="1024128"/>
+            <a:off x="4343400" y="1103638"/>
             <a:ext cx="3730752" cy="38100"/>
           </a:xfrm>
           <a:prstGeom prst="rect">
@@ -21361,8 +22942,8 @@
         </p:nvSpPr>
         <p:spPr>
           <a:xfrm>
-            <a:off x="4445000" y="1151128"/>
-            <a:ext cx="3527552" cy="384048"/>
+            <a:off x="4445000" y="1230638"/>
+            <a:ext cx="3527552" cy="215444"/>
           </a:xfrm>
           <a:prstGeom prst="rect">
             <a:avLst/>
@@ -21377,7 +22958,7 @@
           <a:p>
             <a:pPr algn="l"/>
             <a:r>
-              <a:rPr sz="1150" b="1">
+              <a:rPr sz="1400" b="1">
                 <a:solidFill>
                   <a:srgbClr val="C18401"/>
                 </a:solidFill>
@@ -21396,8 +22977,8 @@
         </p:nvSpPr>
         <p:spPr>
           <a:xfrm>
-            <a:off x="4445000" y="1499616"/>
-            <a:ext cx="3527552" cy="1645920"/>
+            <a:off x="4445000" y="1579126"/>
+            <a:ext cx="3527552" cy="553998"/>
           </a:xfrm>
           <a:prstGeom prst="rect">
             <a:avLst/>
@@ -21412,7 +22993,7 @@
           <a:p>
             <a:pPr algn="l"/>
             <a:r>
-              <a:rPr sz="1050" b="0">
+              <a:rPr sz="1200" b="0">
                 <a:solidFill>
                   <a:srgbClr val="383A42"/>
                 </a:solidFill>
@@ -21431,7 +23012,7 @@
         </p:nvSpPr>
         <p:spPr>
           <a:xfrm>
-            <a:off x="8275319" y="1024128"/>
+            <a:off x="8275319" y="1103638"/>
             <a:ext cx="3730752" cy="2194560"/>
           </a:xfrm>
           <a:prstGeom prst="rect">
@@ -21475,7 +23056,7 @@
         </p:nvSpPr>
         <p:spPr>
           <a:xfrm>
-            <a:off x="8275319" y="1024128"/>
+            <a:off x="8275319" y="1103638"/>
             <a:ext cx="3730752" cy="38100"/>
           </a:xfrm>
           <a:prstGeom prst="rect">
@@ -21519,8 +23100,8 @@
         </p:nvSpPr>
         <p:spPr>
           <a:xfrm>
-            <a:off x="8376919" y="1151128"/>
-            <a:ext cx="3527552" cy="384048"/>
+            <a:off x="8376919" y="1230638"/>
+            <a:ext cx="3527552" cy="215444"/>
           </a:xfrm>
           <a:prstGeom prst="rect">
             <a:avLst/>
@@ -21535,7 +23116,7 @@
           <a:p>
             <a:pPr algn="l"/>
             <a:r>
-              <a:rPr sz="1150" b="1">
+              <a:rPr sz="1400" b="1">
                 <a:solidFill>
                   <a:srgbClr val="0184BC"/>
                 </a:solidFill>
@@ -21554,8 +23135,8 @@
         </p:nvSpPr>
         <p:spPr>
           <a:xfrm>
-            <a:off x="8376919" y="1499616"/>
-            <a:ext cx="3527552" cy="1645920"/>
+            <a:off x="8376919" y="1579126"/>
+            <a:ext cx="3527552" cy="553998"/>
           </a:xfrm>
           <a:prstGeom prst="rect">
             <a:avLst/>
@@ -21570,7 +23151,7 @@
           <a:p>
             <a:pPr algn="l"/>
             <a:r>
-              <a:rPr sz="1050" b="0">
+              <a:rPr sz="1200" b="0">
                 <a:solidFill>
                   <a:srgbClr val="383A42"/>
                 </a:solidFill>
@@ -21589,7 +23170,7 @@
         </p:nvSpPr>
         <p:spPr>
           <a:xfrm>
-            <a:off x="411480" y="3401568"/>
+            <a:off x="411480" y="3481078"/>
             <a:ext cx="3730752" cy="2194560"/>
           </a:xfrm>
           <a:prstGeom prst="rect">
@@ -21633,7 +23214,7 @@
         </p:nvSpPr>
         <p:spPr>
           <a:xfrm>
-            <a:off x="411480" y="3401568"/>
+            <a:off x="411480" y="3481078"/>
             <a:ext cx="3730752" cy="38100"/>
           </a:xfrm>
           <a:prstGeom prst="rect">
@@ -21677,8 +23258,8 @@
         </p:nvSpPr>
         <p:spPr>
           <a:xfrm>
-            <a:off x="513080" y="3528568"/>
-            <a:ext cx="3527552" cy="384048"/>
+            <a:off x="513080" y="3608078"/>
+            <a:ext cx="3527552" cy="215444"/>
           </a:xfrm>
           <a:prstGeom prst="rect">
             <a:avLst/>
@@ -21693,7 +23274,7 @@
           <a:p>
             <a:pPr algn="l"/>
             <a:r>
-              <a:rPr sz="1150" b="1">
+              <a:rPr sz="1400" b="1">
                 <a:solidFill>
                   <a:srgbClr val="50A14F"/>
                 </a:solidFill>
@@ -21712,8 +23293,8 @@
         </p:nvSpPr>
         <p:spPr>
           <a:xfrm>
-            <a:off x="513080" y="3877056"/>
-            <a:ext cx="3527552" cy="1645920"/>
+            <a:off x="513080" y="3956566"/>
+            <a:ext cx="3527552" cy="553998"/>
           </a:xfrm>
           <a:prstGeom prst="rect">
             <a:avLst/>
@@ -21728,7 +23309,7 @@
           <a:p>
             <a:pPr algn="l"/>
             <a:r>
-              <a:rPr sz="1050" b="0">
+              <a:rPr sz="1200" b="0">
                 <a:solidFill>
                   <a:srgbClr val="383A42"/>
                 </a:solidFill>
@@ -21747,7 +23328,7 @@
         </p:nvSpPr>
         <p:spPr>
           <a:xfrm>
-            <a:off x="4343400" y="3401568"/>
+            <a:off x="4343400" y="3481078"/>
             <a:ext cx="3730752" cy="2194560"/>
           </a:xfrm>
           <a:prstGeom prst="rect">
@@ -21791,7 +23372,7 @@
         </p:nvSpPr>
         <p:spPr>
           <a:xfrm>
-            <a:off x="4343400" y="3401568"/>
+            <a:off x="4343400" y="3481078"/>
             <a:ext cx="3730752" cy="38100"/>
           </a:xfrm>
           <a:prstGeom prst="rect">
@@ -21835,8 +23416,8 @@
         </p:nvSpPr>
         <p:spPr>
           <a:xfrm>
-            <a:off x="4445000" y="3528568"/>
-            <a:ext cx="3527552" cy="384048"/>
+            <a:off x="4445000" y="3608078"/>
+            <a:ext cx="3527552" cy="215444"/>
           </a:xfrm>
           <a:prstGeom prst="rect">
             <a:avLst/>
@@ -21851,7 +23432,7 @@
           <a:p>
             <a:pPr algn="l"/>
             <a:r>
-              <a:rPr sz="1150" b="1">
+              <a:rPr sz="1400" b="1">
                 <a:solidFill>
                   <a:srgbClr val="0997B3"/>
                 </a:solidFill>
@@ -21870,8 +23451,8 @@
         </p:nvSpPr>
         <p:spPr>
           <a:xfrm>
-            <a:off x="4445000" y="3877056"/>
-            <a:ext cx="3527552" cy="1645920"/>
+            <a:off x="4445000" y="3956566"/>
+            <a:ext cx="3527552" cy="553998"/>
           </a:xfrm>
           <a:prstGeom prst="rect">
             <a:avLst/>
@@ -21886,7 +23467,7 @@
           <a:p>
             <a:pPr algn="l"/>
             <a:r>
-              <a:rPr sz="1050" b="0">
+              <a:rPr sz="1200" b="0">
                 <a:solidFill>
                   <a:srgbClr val="383A42"/>
                 </a:solidFill>
@@ -21905,7 +23486,7 @@
         </p:nvSpPr>
         <p:spPr>
           <a:xfrm>
-            <a:off x="8275319" y="3401568"/>
+            <a:off x="8275319" y="3481078"/>
             <a:ext cx="3730752" cy="2194560"/>
           </a:xfrm>
           <a:prstGeom prst="rect">
@@ -21949,7 +23530,7 @@
         </p:nvSpPr>
         <p:spPr>
           <a:xfrm>
-            <a:off x="8275319" y="3401568"/>
+            <a:off x="8275319" y="3481078"/>
             <a:ext cx="3730752" cy="38100"/>
           </a:xfrm>
           <a:prstGeom prst="rect">
@@ -21993,8 +23574,8 @@
         </p:nvSpPr>
         <p:spPr>
           <a:xfrm>
-            <a:off x="8376919" y="3528568"/>
-            <a:ext cx="3527552" cy="384048"/>
+            <a:off x="8376919" y="3608078"/>
+            <a:ext cx="3527552" cy="215444"/>
           </a:xfrm>
           <a:prstGeom prst="rect">
             <a:avLst/>
@@ -22009,7 +23590,7 @@
           <a:p>
             <a:pPr algn="l"/>
             <a:r>
-              <a:rPr sz="1150" b="1">
+              <a:rPr sz="1400" b="1">
                 <a:solidFill>
                   <a:srgbClr val="C18401"/>
                 </a:solidFill>
@@ -22028,8 +23609,8 @@
         </p:nvSpPr>
         <p:spPr>
           <a:xfrm>
-            <a:off x="8376919" y="3877056"/>
-            <a:ext cx="3527552" cy="1645920"/>
+            <a:off x="8376919" y="3956566"/>
+            <a:ext cx="3527552" cy="553998"/>
           </a:xfrm>
           <a:prstGeom prst="rect">
             <a:avLst/>
@@ -22044,7 +23625,7 @@
           <a:p>
             <a:pPr algn="l"/>
             <a:r>
-              <a:rPr sz="1050" b="0">
+              <a:rPr sz="1200" b="0">
                 <a:solidFill>
                   <a:srgbClr val="383A42"/>
                 </a:solidFill>
@@ -22254,7 +23835,7 @@
         <p:spPr>
           <a:xfrm>
             <a:off x="411480" y="1024128"/>
-            <a:ext cx="11430000" cy="347472"/>
+            <a:ext cx="11430000" cy="215444"/>
           </a:xfrm>
           <a:prstGeom prst="rect">
             <a:avLst/>
@@ -22269,7 +23850,7 @@
           <a:p>
             <a:pPr algn="l"/>
             <a:r>
-              <a:rPr sz="1300" b="1">
+              <a:rPr sz="1400" b="1" dirty="0">
                 <a:solidFill>
                   <a:srgbClr val="0184BC"/>
                 </a:solidFill>
@@ -22333,7 +23914,7 @@
         <p:spPr>
           <a:xfrm>
             <a:off x="411480" y="1495552"/>
-            <a:ext cx="502920" cy="548640"/>
+            <a:ext cx="502920" cy="369332"/>
           </a:xfrm>
           <a:prstGeom prst="rect">
             <a:avLst/>
@@ -22348,9 +23929,9 @@
           <a:p>
             <a:pPr algn="ctr"/>
             <a:r>
-              <a:rPr sz="2400" b="1">
-                <a:solidFill>
-                  <a:srgbClr val="0184BC"/>
+              <a:rPr sz="2400" b="1" dirty="0">
+                <a:solidFill>
+                  <a:schemeClr val="bg1"/>
                 </a:solidFill>
                 <a:latin typeface="Calibri"/>
               </a:rPr>
@@ -22411,8 +23992,8 @@
         </p:nvSpPr>
         <p:spPr>
           <a:xfrm>
-            <a:off x="1115568" y="1495552"/>
-            <a:ext cx="4023360" cy="256032"/>
+            <a:off x="1115568" y="1646622"/>
+            <a:ext cx="4023360" cy="215444"/>
           </a:xfrm>
           <a:prstGeom prst="rect">
             <a:avLst/>
@@ -22427,7 +24008,7 @@
           <a:p>
             <a:pPr algn="l"/>
             <a:r>
-              <a:rPr sz="1200" b="1">
+              <a:rPr sz="1400" b="1" dirty="0">
                 <a:solidFill>
                   <a:srgbClr val="383A42"/>
                 </a:solidFill>
@@ -22446,8 +24027,8 @@
         </p:nvSpPr>
         <p:spPr>
           <a:xfrm>
-            <a:off x="5349240" y="1495552"/>
-            <a:ext cx="6126480" cy="530352"/>
+            <a:off x="4760843" y="1662530"/>
+            <a:ext cx="6126480" cy="184666"/>
           </a:xfrm>
           <a:prstGeom prst="rect">
             <a:avLst/>
@@ -22462,7 +24043,7 @@
           <a:p>
             <a:pPr algn="l"/>
             <a:r>
-              <a:rPr sz="1100" b="0">
+              <a:rPr sz="1200" b="0" dirty="0">
                 <a:solidFill>
                   <a:srgbClr val="696C77"/>
                 </a:solidFill>
@@ -22526,7 +24107,7 @@
         <p:spPr>
           <a:xfrm>
             <a:off x="411480" y="2355088"/>
-            <a:ext cx="502920" cy="548640"/>
+            <a:ext cx="502920" cy="369332"/>
           </a:xfrm>
           <a:prstGeom prst="rect">
             <a:avLst/>
@@ -22543,7 +24124,7 @@
             <a:r>
               <a:rPr sz="2400" b="1">
                 <a:solidFill>
-                  <a:srgbClr val="0184BC"/>
+                  <a:schemeClr val="bg1"/>
                 </a:solidFill>
                 <a:latin typeface="Calibri"/>
               </a:rPr>
@@ -22604,8 +24185,8 @@
         </p:nvSpPr>
         <p:spPr>
           <a:xfrm>
-            <a:off x="1115568" y="2355088"/>
-            <a:ext cx="4023360" cy="256032"/>
+            <a:off x="1115568" y="2506158"/>
+            <a:ext cx="4023360" cy="215444"/>
           </a:xfrm>
           <a:prstGeom prst="rect">
             <a:avLst/>
@@ -22620,7 +24201,7 @@
           <a:p>
             <a:pPr algn="l"/>
             <a:r>
-              <a:rPr sz="1200" b="1">
+              <a:rPr sz="1400" b="1">
                 <a:solidFill>
                   <a:srgbClr val="383A42"/>
                 </a:solidFill>
@@ -22639,8 +24220,8 @@
         </p:nvSpPr>
         <p:spPr>
           <a:xfrm>
-            <a:off x="5349240" y="2355088"/>
-            <a:ext cx="6126480" cy="530352"/>
+            <a:off x="4760843" y="2522066"/>
+            <a:ext cx="6126480" cy="184666"/>
           </a:xfrm>
           <a:prstGeom prst="rect">
             <a:avLst/>
@@ -22655,7 +24236,7 @@
           <a:p>
             <a:pPr algn="l"/>
             <a:r>
-              <a:rPr sz="1100" b="0">
+              <a:rPr sz="1200" b="0">
                 <a:solidFill>
                   <a:srgbClr val="696C77"/>
                 </a:solidFill>
@@ -22719,7 +24300,7 @@
         <p:spPr>
           <a:xfrm>
             <a:off x="411480" y="3214624"/>
-            <a:ext cx="502920" cy="548640"/>
+            <a:ext cx="502920" cy="369332"/>
           </a:xfrm>
           <a:prstGeom prst="rect">
             <a:avLst/>
@@ -22736,7 +24317,7 @@
             <a:r>
               <a:rPr sz="2400" b="1">
                 <a:solidFill>
-                  <a:srgbClr val="0184BC"/>
+                  <a:schemeClr val="bg1"/>
                 </a:solidFill>
                 <a:latin typeface="Calibri"/>
               </a:rPr>
@@ -22797,8 +24378,8 @@
         </p:nvSpPr>
         <p:spPr>
           <a:xfrm>
-            <a:off x="1115568" y="3214624"/>
-            <a:ext cx="4023360" cy="256032"/>
+            <a:off x="1115568" y="3365694"/>
+            <a:ext cx="4023360" cy="215444"/>
           </a:xfrm>
           <a:prstGeom prst="rect">
             <a:avLst/>
@@ -22813,7 +24394,7 @@
           <a:p>
             <a:pPr algn="l"/>
             <a:r>
-              <a:rPr sz="1200" b="1">
+              <a:rPr sz="1400" b="1">
                 <a:solidFill>
                   <a:srgbClr val="383A42"/>
                 </a:solidFill>
@@ -22832,8 +24413,8 @@
         </p:nvSpPr>
         <p:spPr>
           <a:xfrm>
-            <a:off x="5349240" y="3214624"/>
-            <a:ext cx="6126480" cy="530352"/>
+            <a:off x="4760843" y="3381602"/>
+            <a:ext cx="6126480" cy="184666"/>
           </a:xfrm>
           <a:prstGeom prst="rect">
             <a:avLst/>
@@ -22848,7 +24429,7 @@
           <a:p>
             <a:pPr algn="l"/>
             <a:r>
-              <a:rPr sz="1100" b="0">
+              <a:rPr sz="1200" b="0">
                 <a:solidFill>
                   <a:srgbClr val="696C77"/>
                 </a:solidFill>
@@ -22912,7 +24493,7 @@
         <p:spPr>
           <a:xfrm>
             <a:off x="411480" y="4074160"/>
-            <a:ext cx="502920" cy="548640"/>
+            <a:ext cx="502920" cy="369332"/>
           </a:xfrm>
           <a:prstGeom prst="rect">
             <a:avLst/>
@@ -22929,7 +24510,7 @@
             <a:r>
               <a:rPr sz="2400" b="1">
                 <a:solidFill>
-                  <a:srgbClr val="0184BC"/>
+                  <a:schemeClr val="bg1"/>
                 </a:solidFill>
                 <a:latin typeface="Calibri"/>
               </a:rPr>
@@ -22990,8 +24571,8 @@
         </p:nvSpPr>
         <p:spPr>
           <a:xfrm>
-            <a:off x="1115568" y="4074160"/>
-            <a:ext cx="4023360" cy="256032"/>
+            <a:off x="1115568" y="4225230"/>
+            <a:ext cx="4023360" cy="215444"/>
           </a:xfrm>
           <a:prstGeom prst="rect">
             <a:avLst/>
@@ -23006,7 +24587,7 @@
           <a:p>
             <a:pPr algn="l"/>
             <a:r>
-              <a:rPr sz="1200" b="1">
+              <a:rPr sz="1400" b="1">
                 <a:solidFill>
                   <a:srgbClr val="383A42"/>
                 </a:solidFill>
@@ -23025,8 +24606,8 @@
         </p:nvSpPr>
         <p:spPr>
           <a:xfrm>
-            <a:off x="5349240" y="4074160"/>
-            <a:ext cx="6126480" cy="530352"/>
+            <a:off x="4760843" y="4241138"/>
+            <a:ext cx="6126480" cy="184666"/>
           </a:xfrm>
           <a:prstGeom prst="rect">
             <a:avLst/>
@@ -23041,7 +24622,7 @@
           <a:p>
             <a:pPr algn="l"/>
             <a:r>
-              <a:rPr sz="1100" b="0">
+              <a:rPr sz="1200" b="0">
                 <a:solidFill>
                   <a:srgbClr val="696C77"/>
                 </a:solidFill>
@@ -23061,7 +24642,7 @@
         <p:spPr>
           <a:xfrm>
             <a:off x="411480" y="5010912"/>
-            <a:ext cx="11430000" cy="347472"/>
+            <a:ext cx="11430000" cy="215444"/>
           </a:xfrm>
           <a:prstGeom prst="rect">
             <a:avLst/>
@@ -23076,7 +24657,7 @@
           <a:p>
             <a:pPr algn="l"/>
             <a:r>
-              <a:rPr sz="1300" b="1">
+              <a:rPr sz="1400" b="1" dirty="0">
                 <a:solidFill>
                   <a:srgbClr val="0184BC"/>
                 </a:solidFill>
@@ -23277,7 +24858,7 @@
         </p:nvSpPr>
         <p:spPr>
           <a:xfrm>
-            <a:off x="502920" y="1188720"/>
+            <a:off x="502920" y="807057"/>
             <a:ext cx="10972800" cy="777240"/>
           </a:xfrm>
           <a:prstGeom prst="rect">
@@ -23293,7 +24874,7 @@
           <a:p>
             <a:pPr algn="l"/>
             <a:r>
-              <a:rPr sz="3400" b="1">
+              <a:rPr sz="3400" b="1" dirty="0">
                 <a:solidFill>
                   <a:srgbClr val="383A42"/>
                 </a:solidFill>
@@ -23312,7 +24893,7 @@
         </p:nvSpPr>
         <p:spPr>
           <a:xfrm>
-            <a:off x="502920" y="2029968"/>
+            <a:off x="502920" y="1648305"/>
             <a:ext cx="10972800" cy="457200"/>
           </a:xfrm>
           <a:prstGeom prst="rect">
@@ -23345,10 +24926,16 @@
           <p:cNvGraphicFramePr>
             <a:graphicFrameLocks noGrp="1"/>
           </p:cNvGraphicFramePr>
-          <p:nvPr/>
+          <p:nvPr>
+            <p:extLst>
+              <p:ext uri="{D42A27DB-BD31-4B8C-83A1-F6EECF244321}">
+                <p14:modId xmlns:p14="http://schemas.microsoft.com/office/powerpoint/2010/main" val="1816659688"/>
+              </p:ext>
+            </p:extLst>
+          </p:nvPr>
         </p:nvGraphicFramePr>
         <p:xfrm>
-          <a:off x="502920" y="2633472"/>
+          <a:off x="502920" y="2251809"/>
           <a:ext cx="10058400" cy="1572768"/>
         </p:xfrm>
         <a:graphic>
@@ -23402,7 +24989,7 @@
                     <a:p>
                       <a:pPr algn="ctr"/>
                       <a:r>
-                        <a:rPr sz="1150" b="1">
+                        <a:rPr sz="1400" b="1" dirty="0">
                           <a:solidFill>
                             <a:srgbClr val="FFFFFF"/>
                           </a:solidFill>
@@ -23425,7 +25012,7 @@
                     <a:p>
                       <a:pPr algn="ctr"/>
                       <a:r>
-                        <a:rPr sz="1150" b="1">
+                        <a:rPr sz="1400" b="1" dirty="0">
                           <a:solidFill>
                             <a:srgbClr val="FFFFFF"/>
                           </a:solidFill>
@@ -23448,7 +25035,7 @@
                     <a:p>
                       <a:pPr algn="ctr"/>
                       <a:r>
-                        <a:rPr sz="1150" b="1">
+                        <a:rPr sz="1400" b="1" dirty="0">
                           <a:solidFill>
                             <a:srgbClr val="FFFFFF"/>
                           </a:solidFill>
@@ -23471,7 +25058,7 @@
                     <a:p>
                       <a:pPr algn="ctr"/>
                       <a:r>
-                        <a:rPr sz="1150" b="1">
+                        <a:rPr sz="1400" b="1" dirty="0">
                           <a:solidFill>
                             <a:srgbClr val="FFFFFF"/>
                           </a:solidFill>
@@ -23494,7 +25081,7 @@
                     <a:p>
                       <a:pPr algn="ctr"/>
                       <a:r>
-                        <a:rPr sz="1150" b="1">
+                        <a:rPr sz="1400" b="1" dirty="0">
                           <a:solidFill>
                             <a:srgbClr val="FFFFFF"/>
                           </a:solidFill>
@@ -23860,7 +25447,7 @@
                     <a:p>
                       <a:pPr algn="l"/>
                       <a:r>
-                        <a:rPr sz="1100" b="0">
+                        <a:rPr sz="1100" b="0" dirty="0">
                           <a:solidFill>
                             <a:srgbClr val="383A42"/>
                           </a:solidFill>
@@ -23894,8 +25481,8 @@
         </p:nvSpPr>
         <p:spPr>
           <a:xfrm>
-            <a:off x="502920" y="4343400"/>
-            <a:ext cx="4572000" cy="320040"/>
+            <a:off x="502920" y="3961737"/>
+            <a:ext cx="4572000" cy="215444"/>
           </a:xfrm>
           <a:prstGeom prst="rect">
             <a:avLst/>
@@ -23910,7 +25497,7 @@
           <a:p>
             <a:pPr algn="l"/>
             <a:r>
-              <a:rPr sz="1300" b="1">
+              <a:rPr sz="1400" b="1" dirty="0">
                 <a:solidFill>
                   <a:srgbClr val="0184BC"/>
                 </a:solidFill>
@@ -23929,7 +25516,7 @@
         </p:nvSpPr>
         <p:spPr>
           <a:xfrm>
-            <a:off x="502920" y="4736592"/>
+            <a:off x="502920" y="4354929"/>
             <a:ext cx="10972800" cy="292608"/>
           </a:xfrm>
           <a:prstGeom prst="rect">
@@ -23964,7 +25551,7 @@
         </p:nvSpPr>
         <p:spPr>
           <a:xfrm>
-            <a:off x="502920" y="5065776"/>
+            <a:off x="502920" y="4684113"/>
             <a:ext cx="10972800" cy="292608"/>
           </a:xfrm>
           <a:prstGeom prst="rect">
@@ -23999,7 +25586,7 @@
         </p:nvSpPr>
         <p:spPr>
           <a:xfrm>
-            <a:off x="502920" y="5394959"/>
+            <a:off x="502920" y="5013296"/>
             <a:ext cx="10972800" cy="292608"/>
           </a:xfrm>
           <a:prstGeom prst="rect">
@@ -24034,7 +25621,7 @@
         </p:nvSpPr>
         <p:spPr>
           <a:xfrm>
-            <a:off x="502920" y="5724144"/>
+            <a:off x="502920" y="5342481"/>
             <a:ext cx="10972800" cy="292608"/>
           </a:xfrm>
           <a:prstGeom prst="rect">
@@ -24069,7 +25656,7 @@
         </p:nvSpPr>
         <p:spPr>
           <a:xfrm>
-            <a:off x="502920" y="6053327"/>
+            <a:off x="502920" y="5671664"/>
             <a:ext cx="10972800" cy="292608"/>
           </a:xfrm>
           <a:prstGeom prst="rect">
@@ -24105,7 +25692,7 @@
         <p:spPr>
           <a:xfrm>
             <a:off x="502920" y="6510528"/>
-            <a:ext cx="11338560" cy="256032"/>
+            <a:ext cx="11338560" cy="146194"/>
           </a:xfrm>
           <a:prstGeom prst="rect">
             <a:avLst/>
@@ -24120,13 +25707,67 @@
           <a:p>
             <a:pPr algn="l"/>
             <a:r>
-              <a:rPr sz="950" b="0">
+              <a:rPr sz="950" b="0" dirty="0">
                 <a:solidFill>
                   <a:srgbClr val="696C77"/>
                 </a:solidFill>
                 <a:latin typeface="Calibri"/>
               </a:rPr>
-              <a:t>Global Facility for Disaster Reduction and Recovery (GFDRR)  |  Digital Earth Team  |  World Bank  |  May 2026</a:t>
+              <a:t>Global Facility for Disaster Reduction and Recovery (GFDRR)  |  </a:t>
+            </a:r>
+            <a:r>
+              <a:rPr lang="en-US" sz="950" b="0" dirty="0">
+                <a:solidFill>
+                  <a:srgbClr val="696C77"/>
+                </a:solidFill>
+                <a:latin typeface="Calibri"/>
+              </a:rPr>
+              <a:t>Risk Data Library </a:t>
+            </a:r>
+            <a:r>
+              <a:rPr sz="950" b="0" dirty="0">
+                <a:solidFill>
+                  <a:srgbClr val="696C77"/>
+                </a:solidFill>
+                <a:latin typeface="Calibri"/>
+              </a:rPr>
+              <a:t>Team  |  </a:t>
+            </a:r>
+            <a:r>
+              <a:rPr lang="en-US" sz="950" b="0" dirty="0">
+                <a:solidFill>
+                  <a:srgbClr val="696C77"/>
+                </a:solidFill>
+                <a:latin typeface="Calibri"/>
+              </a:rPr>
+              <a:t>The </a:t>
+            </a:r>
+            <a:r>
+              <a:rPr sz="950" b="0" dirty="0">
+                <a:solidFill>
+                  <a:srgbClr val="696C77"/>
+                </a:solidFill>
+                <a:latin typeface="Calibri"/>
+              </a:rPr>
+              <a:t>World Bank</a:t>
+            </a:r>
+            <a:r>
+              <a:rPr lang="en-US" sz="950" b="0" dirty="0">
+                <a:solidFill>
+                  <a:srgbClr val="696C77"/>
+                </a:solidFill>
+                <a:latin typeface="Calibri"/>
+              </a:rPr>
+              <a:t> Group</a:t>
+            </a:r>
+            <a:r>
+              <a:rPr sz="950" b="0" dirty="0">
+                <a:solidFill>
+                  <a:srgbClr val="696C77"/>
+                </a:solidFill>
+                <a:latin typeface="Calibri"/>
+              </a:rPr>
+              <a:t>  |  May 2026</a:t>
             </a:r>
           </a:p>
         </p:txBody>
@@ -24252,7 +25893,7 @@
         <p:spPr>
           <a:xfrm>
             <a:off x="502920" y="2331720"/>
-            <a:ext cx="10972800" cy="502920"/>
+            <a:ext cx="10972800" cy="246221"/>
           </a:xfrm>
           <a:prstGeom prst="rect">
             <a:avLst/>
@@ -24267,13 +25908,31 @@
           <a:p>
             <a:pPr algn="l"/>
             <a:r>
-              <a:rPr sz="1600" b="0">
+              <a:rPr sz="1600" b="0" dirty="0">
                 <a:solidFill>
                   <a:srgbClr val="E45649"/>
                 </a:solidFill>
                 <a:latin typeface="Calibri"/>
               </a:rPr>
-              <a:t>Act 1</a:t>
+              <a:t>Act</a:t>
+            </a:r>
+            <a:r>
+              <a:rPr lang="en-US" sz="1600" b="0" dirty="0">
+                <a:solidFill>
+                  <a:srgbClr val="E45649"/>
+                </a:solidFill>
+                <a:latin typeface="Calibri"/>
+              </a:rPr>
+              <a:t>ivity</a:t>
+            </a:r>
+            <a:r>
+              <a:rPr sz="1600" b="0" dirty="0">
+                <a:solidFill>
+                  <a:srgbClr val="E45649"/>
+                </a:solidFill>
+                <a:latin typeface="Calibri"/>
+              </a:rPr>
+              <a:t> 1</a:t>
             </a:r>
           </a:p>
         </p:txBody>
@@ -24322,7 +25981,7 @@
         <p:spPr>
           <a:xfrm>
             <a:off x="502920" y="3749039"/>
-            <a:ext cx="10972800" cy="502920"/>
+            <a:ext cx="10972800" cy="246221"/>
           </a:xfrm>
           <a:prstGeom prst="rect">
             <a:avLst/>
@@ -24337,13 +25996,31 @@
           <a:p>
             <a:pPr algn="l"/>
             <a:r>
-              <a:rPr sz="1600" b="0">
+              <a:rPr sz="1600" b="0" dirty="0">
                 <a:solidFill>
                   <a:srgbClr val="383A42"/>
                 </a:solidFill>
                 <a:latin typeface="Calibri"/>
               </a:rPr>
-              <a:t>Deterministic. Fast. 12,594 records in under 60 seconds.</a:t>
+              <a:t>Deterministic. </a:t>
+            </a:r>
+            <a:r>
+              <a:rPr sz="1600" b="0" dirty="0">
+                <a:solidFill>
+                  <a:srgbClr val="E45649"/>
+                </a:solidFill>
+                <a:latin typeface="Calibri"/>
+              </a:rPr>
+              <a:t>Fast.</a:t>
+            </a:r>
+            <a:r>
+              <a:rPr sz="1600" b="0" dirty="0">
+                <a:solidFill>
+                  <a:srgbClr val="383A42"/>
+                </a:solidFill>
+                <a:latin typeface="Calibri"/>
+              </a:rPr>
+              <a:t> 12,594 records in under 60 seconds.</a:t>
             </a:r>
           </a:p>
         </p:txBody>
@@ -24678,7 +26355,7 @@
         </p:nvSpPr>
         <p:spPr>
           <a:xfrm>
-            <a:off x="411480" y="1024128"/>
+            <a:off x="411480" y="1103638"/>
             <a:ext cx="5486400" cy="4206240"/>
           </a:xfrm>
           <a:prstGeom prst="rect">
@@ -24722,7 +26399,7 @@
         </p:nvSpPr>
         <p:spPr>
           <a:xfrm>
-            <a:off x="411480" y="1024128"/>
+            <a:off x="411480" y="1103638"/>
             <a:ext cx="38100" cy="4206240"/>
           </a:xfrm>
           <a:prstGeom prst="rect">
@@ -24766,7 +26443,7 @@
         </p:nvSpPr>
         <p:spPr>
           <a:xfrm>
-            <a:off x="538480" y="1125728"/>
+            <a:off x="538480" y="1205238"/>
             <a:ext cx="5257800" cy="4003040"/>
           </a:xfrm>
           <a:prstGeom prst="rect">
@@ -25247,8 +26924,8 @@
         </p:nvSpPr>
         <p:spPr>
           <a:xfrm>
-            <a:off x="6126480" y="1024128"/>
-            <a:ext cx="5669280" cy="347472"/>
+            <a:off x="6126480" y="1103638"/>
+            <a:ext cx="5669280" cy="215444"/>
           </a:xfrm>
           <a:prstGeom prst="rect">
             <a:avLst/>
@@ -25261,9 +26938,8 @@
           </a:bodyPr>
           <a:lstStyle/>
           <a:p>
-            <a:pPr algn="l"/>
-            <a:r>
-              <a:rPr sz="1200" b="1">
+            <a:r>
+              <a:rPr sz="1400" b="1" dirty="0">
                 <a:solidFill>
                   <a:srgbClr val="0184BC"/>
                 </a:solidFill>
@@ -25282,7 +26958,7 @@
         </p:nvSpPr>
         <p:spPr>
           <a:xfrm>
-            <a:off x="6126480" y="1417320"/>
+            <a:off x="6126480" y="1496830"/>
             <a:ext cx="5623560" cy="2697480"/>
           </a:xfrm>
           <a:prstGeom prst="rect">
@@ -25326,7 +27002,7 @@
         </p:nvSpPr>
         <p:spPr>
           <a:xfrm>
-            <a:off x="6126480" y="1417320"/>
+            <a:off x="6126480" y="1496830"/>
             <a:ext cx="38100" cy="2697480"/>
           </a:xfrm>
           <a:prstGeom prst="rect">
@@ -25370,7 +27046,7 @@
         </p:nvSpPr>
         <p:spPr>
           <a:xfrm>
-            <a:off x="6253480" y="1518920"/>
+            <a:off x="6253480" y="1598430"/>
             <a:ext cx="5394960" cy="2494280"/>
           </a:xfrm>
           <a:prstGeom prst="rect">
@@ -25599,7 +27275,7 @@
         </p:nvSpPr>
         <p:spPr>
           <a:xfrm>
-            <a:off x="6126480" y="4206240"/>
+            <a:off x="6126480" y="4285750"/>
             <a:ext cx="5623560" cy="658368"/>
           </a:xfrm>
           <a:prstGeom prst="rect">
@@ -25643,7 +27319,7 @@
         </p:nvSpPr>
         <p:spPr>
           <a:xfrm>
-            <a:off x="6126480" y="4206240"/>
+            <a:off x="6126480" y="4285750"/>
             <a:ext cx="50800" cy="658368"/>
           </a:xfrm>
           <a:prstGeom prst="rect">
@@ -25687,7 +27363,7 @@
         </p:nvSpPr>
         <p:spPr>
           <a:xfrm>
-            <a:off x="6304280" y="4361956"/>
+            <a:off x="6304280" y="4441466"/>
             <a:ext cx="5369560" cy="338554"/>
           </a:xfrm>
           <a:prstGeom prst="rect">
@@ -25721,7 +27397,7 @@
         </p:nvSpPr>
         <p:spPr>
           <a:xfrm>
-            <a:off x="411480" y="5349240"/>
+            <a:off x="411480" y="5428750"/>
             <a:ext cx="11338560" cy="621792"/>
           </a:xfrm>
           <a:prstGeom prst="rect">
@@ -25765,7 +27441,7 @@
         </p:nvSpPr>
         <p:spPr>
           <a:xfrm>
-            <a:off x="411480" y="5349240"/>
+            <a:off x="411480" y="5428750"/>
             <a:ext cx="50800" cy="621792"/>
           </a:xfrm>
           <a:prstGeom prst="rect">
@@ -25809,7 +27485,7 @@
         </p:nvSpPr>
         <p:spPr>
           <a:xfrm>
-            <a:off x="589280" y="5544705"/>
+            <a:off x="589280" y="5624215"/>
             <a:ext cx="11084560" cy="215444"/>
           </a:xfrm>
           <a:prstGeom prst="rect">
@@ -26069,7 +27745,7 @@
         <p:spPr>
           <a:xfrm>
             <a:off x="411480" y="1024128"/>
-            <a:ext cx="11430000" cy="347472"/>
+            <a:ext cx="4319546" cy="200055"/>
           </a:xfrm>
           <a:prstGeom prst="rect">
             <a:avLst/>
@@ -26084,7 +27760,7 @@
           <a:p>
             <a:pPr algn="l"/>
             <a:r>
-              <a:rPr sz="1300" b="1">
+              <a:rPr sz="1300" b="1" dirty="0">
                 <a:solidFill>
                   <a:srgbClr val="C18401"/>
                 </a:solidFill>
@@ -26192,7 +27868,7 @@
         <p:spPr>
           <a:xfrm>
             <a:off x="538480" y="1518920"/>
-            <a:ext cx="11109960" cy="3088640"/>
+            <a:ext cx="5078313" cy="2000548"/>
           </a:xfrm>
           <a:prstGeom prst="rect">
             <a:avLst/>
@@ -26214,7 +27890,7 @@
               </a:spcAft>
             </a:pPr>
             <a:r>
-              <a:rPr sz="1000">
+              <a:rPr sz="1000" dirty="0">
                 <a:solidFill>
                   <a:srgbClr val="DCDFE4"/>
                 </a:solidFill>
@@ -26233,7 +27909,7 @@
               </a:spcAft>
             </a:pPr>
             <a:r>
-              <a:rPr sz="1000">
+              <a:rPr sz="1000" dirty="0">
                 <a:solidFill>
                   <a:srgbClr val="DCDFE4"/>
                 </a:solidFill>
@@ -26252,7 +27928,7 @@
               </a:spcAft>
             </a:pPr>
             <a:r>
-              <a:rPr sz="1000">
+              <a:rPr sz="1000" dirty="0">
                 <a:solidFill>
                   <a:srgbClr val="DCDFE4"/>
                 </a:solidFill>
@@ -26270,7 +27946,7 @@
                 <a:spcPts val="0"/>
               </a:spcAft>
             </a:pPr>
-            <a:endParaRPr sz="1000">
+            <a:endParaRPr sz="1000" dirty="0">
               <a:solidFill>
                 <a:srgbClr val="DCDFE4"/>
               </a:solidFill>
@@ -26287,7 +27963,7 @@
               </a:spcAft>
             </a:pPr>
             <a:r>
-              <a:rPr sz="1000">
+              <a:rPr sz="1000" dirty="0">
                 <a:solidFill>
                   <a:srgbClr val="DCDFE4"/>
                 </a:solidFill>
@@ -26306,13 +27982,31 @@
               </a:spcAft>
             </a:pPr>
             <a:r>
-              <a:rPr sz="1000">
+              <a:rPr sz="1000" dirty="0">
                 <a:solidFill>
                   <a:srgbClr val="DCDFE4"/>
                 </a:solidFill>
                 <a:latin typeface="Consolas"/>
               </a:rPr>
-              <a:t>  "population"  --&gt;  Exposure (population, count)           [FABRICATED]</a:t>
+              <a:t>  "population"  --&gt;  Exposure (population, count) </a:t>
+            </a:r>
+            <a:r>
+              <a:rPr lang="en-ID" sz="1000" dirty="0">
+                <a:solidFill>
+                  <a:srgbClr val="DCDFE4"/>
+                </a:solidFill>
+                <a:latin typeface="Consolas"/>
+              </a:rPr>
+              <a:t>          </a:t>
+            </a:r>
+            <a:r>
+              <a:rPr sz="1000" dirty="0">
+                <a:solidFill>
+                  <a:srgbClr val="DCDFE4"/>
+                </a:solidFill>
+                <a:latin typeface="Consolas"/>
+              </a:rPr>
+              <a:t>[FABRICATED]</a:t>
             </a:r>
           </a:p>
           <a:p>
@@ -26325,13 +28019,13 @@
               </a:spcAft>
             </a:pPr>
             <a:r>
-              <a:rPr sz="1000">
+              <a:rPr sz="1000" dirty="0">
                 <a:solidFill>
                   <a:srgbClr val="DCDFE4"/>
                 </a:solidFill>
                 <a:latin typeface="Consolas"/>
               </a:rPr>
-              <a:t>  "affected"    --&gt;  Vulnerability                           [FABRICATED]</a:t>
+              <a:t>  "affected"    --&gt;  Vulnerability                          [FABRICATED]</a:t>
             </a:r>
           </a:p>
           <a:p>
@@ -26344,13 +28038,13 @@
               </a:spcAft>
             </a:pPr>
             <a:r>
-              <a:rPr sz="1000">
+              <a:rPr sz="1000" dirty="0">
                 <a:solidFill>
                   <a:srgbClr val="DCDFE4"/>
                 </a:solidFill>
                 <a:latin typeface="Consolas"/>
               </a:rPr>
-              <a:t>  "mortality"   --&gt;  Loss                                    [CORRECT]</a:t>
+              <a:t>  "mortality"   --&gt;  Loss                                   [CORRECT]</a:t>
             </a:r>
           </a:p>
           <a:p>
@@ -26362,7 +28056,7 @@
                 <a:spcPts val="0"/>
               </a:spcAft>
             </a:pPr>
-            <a:endParaRPr sz="1000">
+            <a:endParaRPr sz="1000" dirty="0">
               <a:solidFill>
                 <a:srgbClr val="DCDFE4"/>
               </a:solidFill>
@@ -26379,7 +28073,7 @@
               </a:spcAft>
             </a:pPr>
             <a:r>
-              <a:rPr sz="1000">
+              <a:rPr sz="1000" dirty="0">
                 <a:solidFill>
                   <a:srgbClr val="DCDFE4"/>
                 </a:solidFill>
@@ -26397,7 +28091,7 @@
                 <a:spcPts val="0"/>
               </a:spcAft>
             </a:pPr>
-            <a:endParaRPr sz="1000">
+            <a:endParaRPr sz="1000" dirty="0">
               <a:solidFill>
                 <a:srgbClr val="DCDFE4"/>
               </a:solidFill>
@@ -26414,7 +28108,7 @@
               </a:spcAft>
             </a:pPr>
             <a:r>
-              <a:rPr sz="1000">
+              <a:rPr sz="1000" dirty="0">
                 <a:solidFill>
                   <a:srgbClr val="DCDFE4"/>
                 </a:solidFill>
@@ -26433,7 +28127,7 @@
               </a:spcAft>
             </a:pPr>
             <a:r>
-              <a:rPr sz="1000">
+              <a:rPr sz="1000" dirty="0">
                 <a:solidFill>
                   <a:srgbClr val="DCDFE4"/>
                 </a:solidFill>
@@ -26453,7 +28147,7 @@
         <p:spPr>
           <a:xfrm>
             <a:off x="411480" y="4828032"/>
-            <a:ext cx="5486400" cy="320040"/>
+            <a:ext cx="5486400" cy="215444"/>
           </a:xfrm>
           <a:prstGeom prst="rect">
             <a:avLst/>
@@ -26468,7 +28162,7 @@
           <a:p>
             <a:pPr algn="l"/>
             <a:r>
-              <a:rPr sz="1200" b="1">
+              <a:rPr sz="1400" b="1">
                 <a:solidFill>
                   <a:srgbClr val="0184BC"/>
                 </a:solidFill>
@@ -27032,6 +28726,55 @@
           </a:p>
         </p:txBody>
       </p:sp>
+      <p:sp>
+        <p:nvSpPr>
+          <p:cNvPr id="16" name="TextBox 15">
+            <a:extLst>
+              <a:ext uri="{FF2B5EF4-FFF2-40B4-BE49-F238E27FC236}">
+                <a16:creationId xmlns:a16="http://schemas.microsoft.com/office/drawing/2014/main" id="{5742809A-8091-A22A-8CDC-0250A499B00B}"/>
+              </a:ext>
+            </a:extLst>
+          </p:cNvPr>
+          <p:cNvSpPr txBox="1"/>
+          <p:nvPr/>
+        </p:nvSpPr>
+        <p:spPr>
+          <a:xfrm>
+            <a:off x="4832143" y="1022702"/>
+            <a:ext cx="6872177" cy="400110"/>
+          </a:xfrm>
+          <a:prstGeom prst="rect">
+            <a:avLst/>
+          </a:prstGeom>
+          <a:noFill/>
+        </p:spPr>
+        <p:txBody>
+          <a:bodyPr wrap="square" lIns="0" tIns="0" rIns="0" bIns="0">
+            <a:spAutoFit/>
+          </a:bodyPr>
+          <a:lstStyle/>
+          <a:p>
+            <a:r>
+              <a:rPr lang="en-ID" sz="1300" dirty="0">
+                <a:hlinkClick r:id="rId2"/>
+              </a:rPr>
+              <a:t>https://data.humdata.org/dataset/c7e5d29e-f5e8-4d8b-a437-f784fcfd6103</a:t>
+            </a:r>
+            <a:r>
+              <a:rPr lang="en-ID" sz="1300" dirty="0"/>
+              <a:t> </a:t>
+            </a:r>
+          </a:p>
+          <a:p>
+            <a:endParaRPr sz="1300" b="0" dirty="0">
+              <a:solidFill>
+                <a:srgbClr val="696C77"/>
+              </a:solidFill>
+              <a:latin typeface="Calibri"/>
+            </a:endParaRPr>
+          </a:p>
+        </p:txBody>
+      </p:sp>
     </p:spTree>
   </p:cSld>
   <p:clrMapOvr>
@@ -27263,10 +29006,16 @@
           <p:cNvGraphicFramePr>
             <a:graphicFrameLocks noGrp="1"/>
           </p:cNvGraphicFramePr>
-          <p:nvPr/>
+          <p:nvPr>
+            <p:extLst>
+              <p:ext uri="{D42A27DB-BD31-4B8C-83A1-F6EECF244321}">
+                <p14:modId xmlns:p14="http://schemas.microsoft.com/office/powerpoint/2010/main" val="2378738993"/>
+              </p:ext>
+            </p:extLst>
+          </p:nvPr>
         </p:nvGraphicFramePr>
         <p:xfrm>
-          <a:off x="411480" y="1024128"/>
+          <a:off x="411480" y="1103638"/>
           <a:ext cx="11338560" cy="2514600"/>
         </p:xfrm>
         <a:graphic>
@@ -27306,7 +29055,7 @@
                     <a:p>
                       <a:pPr algn="ctr"/>
                       <a:r>
-                        <a:rPr sz="1100" b="1">
+                        <a:rPr sz="1400" b="1" dirty="0">
                           <a:solidFill>
                             <a:srgbClr val="FFFFFF"/>
                           </a:solidFill>
@@ -27329,7 +29078,7 @@
                     <a:p>
                       <a:pPr algn="ctr"/>
                       <a:r>
-                        <a:rPr sz="1100" b="1">
+                        <a:rPr sz="1400" b="1" dirty="0">
                           <a:solidFill>
                             <a:srgbClr val="FFFFFF"/>
                           </a:solidFill>
@@ -27352,7 +29101,7 @@
                     <a:p>
                       <a:pPr algn="ctr"/>
                       <a:r>
-                        <a:rPr sz="1100" b="1">
+                        <a:rPr sz="1400" b="1" dirty="0">
                           <a:solidFill>
                             <a:srgbClr val="FFFFFF"/>
                           </a:solidFill>
@@ -27732,7 +29481,7 @@
                     <a:p>
                       <a:pPr algn="l"/>
                       <a:r>
-                        <a:rPr sz="1050" b="0">
+                        <a:rPr sz="1050" b="0" dirty="0">
                           <a:solidFill>
                             <a:srgbClr val="383A42"/>
                           </a:solidFill>
@@ -27766,8 +29515,8 @@
         </p:nvSpPr>
         <p:spPr>
           <a:xfrm>
-            <a:off x="411480" y="3657600"/>
-            <a:ext cx="5394960" cy="320040"/>
+            <a:off x="411480" y="3737110"/>
+            <a:ext cx="5394960" cy="215444"/>
           </a:xfrm>
           <a:prstGeom prst="rect">
             <a:avLst/>
@@ -27782,7 +29531,7 @@
           <a:p>
             <a:pPr algn="l"/>
             <a:r>
-              <a:rPr sz="1150" b="1">
+              <a:rPr sz="1400" b="1">
                 <a:solidFill>
                   <a:srgbClr val="E45649"/>
                 </a:solidFill>
@@ -27801,7 +29550,7 @@
         </p:nvSpPr>
         <p:spPr>
           <a:xfrm>
-            <a:off x="411480" y="4023360"/>
+            <a:off x="411480" y="4102870"/>
             <a:ext cx="5394960" cy="2450592"/>
           </a:xfrm>
           <a:prstGeom prst="rect">
@@ -27845,7 +29594,7 @@
         </p:nvSpPr>
         <p:spPr>
           <a:xfrm>
-            <a:off x="411480" y="4023360"/>
+            <a:off x="411480" y="4102870"/>
             <a:ext cx="38100" cy="2450592"/>
           </a:xfrm>
           <a:prstGeom prst="rect">
@@ -27889,7 +29638,7 @@
         </p:nvSpPr>
         <p:spPr>
           <a:xfrm>
-            <a:off x="538480" y="4124960"/>
+            <a:off x="538480" y="4204470"/>
             <a:ext cx="5166360" cy="2247392"/>
           </a:xfrm>
           <a:prstGeom prst="rect">
@@ -28064,8 +29813,8 @@
         </p:nvSpPr>
         <p:spPr>
           <a:xfrm>
-            <a:off x="6217920" y="3657600"/>
-            <a:ext cx="5486400" cy="320040"/>
+            <a:off x="6217920" y="3737110"/>
+            <a:ext cx="5486400" cy="215444"/>
           </a:xfrm>
           <a:prstGeom prst="rect">
             <a:avLst/>
@@ -28080,7 +29829,7 @@
           <a:p>
             <a:pPr algn="l"/>
             <a:r>
-              <a:rPr sz="1150" b="1">
+              <a:rPr sz="1400" b="1">
                 <a:solidFill>
                   <a:srgbClr val="50A14F"/>
                 </a:solidFill>
@@ -28099,7 +29848,7 @@
         </p:nvSpPr>
         <p:spPr>
           <a:xfrm>
-            <a:off x="6217920" y="4023360"/>
+            <a:off x="6217920" y="4102870"/>
             <a:ext cx="5486400" cy="2450592"/>
           </a:xfrm>
           <a:prstGeom prst="rect">
@@ -28143,7 +29892,7 @@
         </p:nvSpPr>
         <p:spPr>
           <a:xfrm>
-            <a:off x="6217920" y="4023360"/>
+            <a:off x="6217920" y="4102870"/>
             <a:ext cx="38100" cy="2450592"/>
           </a:xfrm>
           <a:prstGeom prst="rect">
@@ -28187,7 +29936,7 @@
         </p:nvSpPr>
         <p:spPr>
           <a:xfrm>
-            <a:off x="6344920" y="4124960"/>
+            <a:off x="6344920" y="4204470"/>
             <a:ext cx="5257800" cy="2247392"/>
           </a:xfrm>
           <a:prstGeom prst="rect">
@@ -28588,10 +30337,16 @@
           <p:cNvGraphicFramePr>
             <a:graphicFrameLocks noGrp="1"/>
           </p:cNvGraphicFramePr>
-          <p:nvPr/>
+          <p:nvPr>
+            <p:extLst>
+              <p:ext uri="{D42A27DB-BD31-4B8C-83A1-F6EECF244321}">
+                <p14:modId xmlns:p14="http://schemas.microsoft.com/office/powerpoint/2010/main" val="4006410504"/>
+              </p:ext>
+            </p:extLst>
+          </p:nvPr>
         </p:nvGraphicFramePr>
         <p:xfrm>
-          <a:off x="411480" y="1024128"/>
+          <a:off x="411480" y="1103638"/>
           <a:ext cx="5669280" cy="4251960"/>
         </p:xfrm>
         <a:graphic>
@@ -28624,7 +30379,7 @@
                     <a:p>
                       <a:pPr algn="ctr"/>
                       <a:r>
-                        <a:rPr sz="1150" b="1">
+                        <a:rPr sz="1400" b="1" dirty="0">
                           <a:solidFill>
                             <a:srgbClr val="FFFFFF"/>
                           </a:solidFill>
@@ -28647,7 +30402,7 @@
                     <a:p>
                       <a:pPr algn="ctr"/>
                       <a:r>
-                        <a:rPr sz="1150" b="1">
+                        <a:rPr sz="1400" b="1" dirty="0">
                           <a:solidFill>
                             <a:srgbClr val="FFFFFF"/>
                           </a:solidFill>
@@ -29071,7 +30826,7 @@
                     <a:p>
                       <a:pPr algn="l"/>
                       <a:r>
-                        <a:rPr sz="1100" b="0">
+                        <a:rPr sz="1100" b="0" dirty="0">
                           <a:solidFill>
                             <a:srgbClr val="383A42"/>
                           </a:solidFill>
@@ -29105,8 +30860,8 @@
         </p:nvSpPr>
         <p:spPr>
           <a:xfrm>
-            <a:off x="6400800" y="1024128"/>
-            <a:ext cx="5394960" cy="347472"/>
+            <a:off x="6400800" y="1103638"/>
+            <a:ext cx="5394960" cy="215444"/>
           </a:xfrm>
           <a:prstGeom prst="rect">
             <a:avLst/>
@@ -29121,7 +30876,7 @@
           <a:p>
             <a:pPr algn="l"/>
             <a:r>
-              <a:rPr sz="1200" b="1">
+              <a:rPr sz="1400" b="1">
                 <a:solidFill>
                   <a:srgbClr val="50A14F"/>
                 </a:solidFill>
@@ -29140,8 +30895,8 @@
         </p:nvSpPr>
         <p:spPr>
           <a:xfrm>
-            <a:off x="6400800" y="1463040"/>
-            <a:ext cx="5394960" cy="384048"/>
+            <a:off x="6400800" y="1542550"/>
+            <a:ext cx="5394960" cy="184666"/>
           </a:xfrm>
           <a:prstGeom prst="rect">
             <a:avLst/>
@@ -29156,7 +30911,7 @@
           <a:p>
             <a:pPr algn="l"/>
             <a:r>
-              <a:rPr sz="1150" b="0">
+              <a:rPr sz="1200" b="0">
                 <a:solidFill>
                   <a:srgbClr val="50A14F"/>
                 </a:solidFill>
@@ -29175,8 +30930,8 @@
         </p:nvSpPr>
         <p:spPr>
           <a:xfrm>
-            <a:off x="6400800" y="1883664"/>
-            <a:ext cx="5394960" cy="384048"/>
+            <a:off x="6400800" y="1963174"/>
+            <a:ext cx="5394960" cy="184666"/>
           </a:xfrm>
           <a:prstGeom prst="rect">
             <a:avLst/>
@@ -29191,7 +30946,7 @@
           <a:p>
             <a:pPr algn="l"/>
             <a:r>
-              <a:rPr sz="1150" b="0">
+              <a:rPr sz="1200" b="0">
                 <a:solidFill>
                   <a:srgbClr val="50A14F"/>
                 </a:solidFill>
@@ -29210,8 +30965,8 @@
         </p:nvSpPr>
         <p:spPr>
           <a:xfrm>
-            <a:off x="6400800" y="2304288"/>
-            <a:ext cx="5394960" cy="384048"/>
+            <a:off x="6400800" y="2383798"/>
+            <a:ext cx="5394960" cy="184666"/>
           </a:xfrm>
           <a:prstGeom prst="rect">
             <a:avLst/>
@@ -29226,7 +30981,7 @@
           <a:p>
             <a:pPr algn="l"/>
             <a:r>
-              <a:rPr sz="1150" b="0">
+              <a:rPr sz="1200" b="0">
                 <a:solidFill>
                   <a:srgbClr val="50A14F"/>
                 </a:solidFill>
@@ -29245,8 +31000,8 @@
         </p:nvSpPr>
         <p:spPr>
           <a:xfrm>
-            <a:off x="6400800" y="2724912"/>
-            <a:ext cx="5394960" cy="384048"/>
+            <a:off x="6400800" y="2804422"/>
+            <a:ext cx="5394960" cy="184666"/>
           </a:xfrm>
           <a:prstGeom prst="rect">
             <a:avLst/>
@@ -29261,7 +31016,7 @@
           <a:p>
             <a:pPr algn="l"/>
             <a:r>
-              <a:rPr sz="1150" b="0">
+              <a:rPr sz="1200" b="0">
                 <a:solidFill>
                   <a:srgbClr val="50A14F"/>
                 </a:solidFill>
@@ -29280,8 +31035,8 @@
         </p:nvSpPr>
         <p:spPr>
           <a:xfrm>
-            <a:off x="6400800" y="3383280"/>
-            <a:ext cx="5394960" cy="347472"/>
+            <a:off x="6400800" y="3462790"/>
+            <a:ext cx="5394960" cy="215444"/>
           </a:xfrm>
           <a:prstGeom prst="rect">
             <a:avLst/>
@@ -29296,7 +31051,7 @@
           <a:p>
             <a:pPr algn="l"/>
             <a:r>
-              <a:rPr sz="1200" b="1">
+              <a:rPr sz="1400" b="1">
                 <a:solidFill>
                   <a:srgbClr val="E45649"/>
                 </a:solidFill>
@@ -29315,7 +31070,7 @@
         </p:nvSpPr>
         <p:spPr>
           <a:xfrm>
-            <a:off x="6400800" y="3794760"/>
+            <a:off x="6400800" y="3874270"/>
             <a:ext cx="5394960" cy="1737360"/>
           </a:xfrm>
           <a:prstGeom prst="rect">
@@ -29359,7 +31114,7 @@
         </p:nvSpPr>
         <p:spPr>
           <a:xfrm>
-            <a:off x="6400800" y="3794760"/>
+            <a:off x="6400800" y="3874270"/>
             <a:ext cx="50800" cy="1737360"/>
           </a:xfrm>
           <a:prstGeom prst="rect">
@@ -29403,8 +31158,8 @@
         </p:nvSpPr>
         <p:spPr>
           <a:xfrm>
-            <a:off x="6578600" y="3870960"/>
-            <a:ext cx="5140960" cy="1584960"/>
+            <a:off x="6578600" y="3950470"/>
+            <a:ext cx="5140960" cy="553998"/>
           </a:xfrm>
           <a:prstGeom prst="rect">
             <a:avLst/>
@@ -29418,7 +31173,7 @@
           <a:lstStyle/>
           <a:p>
             <a:r>
-              <a:rPr sz="1100" b="0">
+              <a:rPr sz="1200" b="0" dirty="0">
                 <a:solidFill>
                   <a:srgbClr val="383A42"/>
                 </a:solidFill>
@@ -29515,7 +31270,7 @@
         <p:spPr>
           <a:xfrm>
             <a:off x="502920" y="2331720"/>
-            <a:ext cx="10972800" cy="502920"/>
+            <a:ext cx="10972800" cy="246221"/>
           </a:xfrm>
           <a:prstGeom prst="rect">
             <a:avLst/>
@@ -29530,13 +31285,31 @@
           <a:p>
             <a:pPr algn="l"/>
             <a:r>
-              <a:rPr sz="1600" b="0">
+              <a:rPr sz="1600" b="0" dirty="0">
                 <a:solidFill>
                   <a:srgbClr val="C18401"/>
                 </a:solidFill>
                 <a:latin typeface="Calibri"/>
               </a:rPr>
-              <a:t>Act 2</a:t>
+              <a:t>Act</a:t>
+            </a:r>
+            <a:r>
+              <a:rPr lang="en-US" sz="1600" b="0" dirty="0">
+                <a:solidFill>
+                  <a:srgbClr val="C18401"/>
+                </a:solidFill>
+                <a:latin typeface="Calibri"/>
+              </a:rPr>
+              <a:t>ivity</a:t>
+            </a:r>
+            <a:r>
+              <a:rPr sz="1600" b="0" dirty="0">
+                <a:solidFill>
+                  <a:srgbClr val="C18401"/>
+                </a:solidFill>
+                <a:latin typeface="Calibri"/>
+              </a:rPr>
+              <a:t> 2</a:t>
             </a:r>
           </a:p>
         </p:txBody>
@@ -29585,7 +31358,7 @@
         <p:spPr>
           <a:xfrm>
             <a:off x="502920" y="3749039"/>
-            <a:ext cx="10972800" cy="502920"/>
+            <a:ext cx="10972800" cy="246221"/>
           </a:xfrm>
           <a:prstGeom prst="rect">
             <a:avLst/>
@@ -29600,13 +31373,31 @@
           <a:p>
             <a:pPr algn="l"/>
             <a:r>
-              <a:rPr sz="1600" b="0">
+              <a:rPr sz="1600" b="0" dirty="0">
                 <a:solidFill>
                   <a:srgbClr val="383A42"/>
                 </a:solidFill>
                 <a:latin typeface="Calibri"/>
               </a:rPr>
-              <a:t>Regex for clear-cut cases. LLM where it matters. Column headers as evidence.</a:t>
+              <a:t>Regex for clear-cut cases. </a:t>
+            </a:r>
+            <a:r>
+              <a:rPr sz="1600" b="0" dirty="0">
+                <a:solidFill>
+                  <a:srgbClr val="C18401"/>
+                </a:solidFill>
+                <a:latin typeface="Calibri"/>
+              </a:rPr>
+              <a:t>LLM where it matters. </a:t>
+            </a:r>
+            <a:r>
+              <a:rPr sz="1600" b="0" dirty="0">
+                <a:solidFill>
+                  <a:srgbClr val="383A42"/>
+                </a:solidFill>
+                <a:latin typeface="Calibri"/>
+              </a:rPr>
+              <a:t>Column headers as evidence.</a:t>
             </a:r>
           </a:p>
         </p:txBody>
@@ -29923,7 +31714,7 @@
         </p:nvSpPr>
         <p:spPr>
           <a:xfrm>
-            <a:off x="411480" y="1024128"/>
+            <a:off x="411480" y="1103638"/>
             <a:ext cx="11338560" cy="5349240"/>
           </a:xfrm>
           <a:prstGeom prst="rect">
@@ -29967,7 +31758,7 @@
         </p:nvSpPr>
         <p:spPr>
           <a:xfrm>
-            <a:off x="411480" y="1024128"/>
+            <a:off x="411480" y="1103638"/>
             <a:ext cx="38100" cy="5349240"/>
           </a:xfrm>
           <a:prstGeom prst="rect">
@@ -30011,7 +31802,7 @@
         </p:nvSpPr>
         <p:spPr>
           <a:xfrm>
-            <a:off x="538480" y="1125728"/>
+            <a:off x="538480" y="1205238"/>
             <a:ext cx="11109960" cy="5146040"/>
           </a:xfrm>
           <a:prstGeom prst="rect">
